--- a/01_Foundational_Concepts/Drawings.pptx
+++ b/01_Foundational_Concepts/Drawings.pptx
@@ -5,7 +5,7 @@
     <p:sldMasterId id="2147483648" r:id="rId1"/>
   </p:sldMasterIdLst>
   <p:notesMasterIdLst>
-    <p:notesMasterId r:id="rId7"/>
+    <p:notesMasterId r:id="rId9"/>
   </p:notesMasterIdLst>
   <p:sldIdLst>
     <p:sldId id="256" r:id="rId2"/>
@@ -13,6 +13,8 @@
     <p:sldId id="258" r:id="rId4"/>
     <p:sldId id="259" r:id="rId5"/>
     <p:sldId id="260" r:id="rId6"/>
+    <p:sldId id="261" r:id="rId7"/>
+    <p:sldId id="262" r:id="rId8"/>
   </p:sldIdLst>
   <p:sldSz cx="12192000" cy="6858000"/>
   <p:notesSz cx="6858000" cy="9144000"/>
@@ -201,7 +203,7 @@
           <a:p>
             <a:fld id="{91EB33D0-185C-4380-8DA6-9AF9060E860B}" type="datetimeFigureOut">
               <a:rPr lang="en-US" smtClean="0"/>
-              <a:t>2/25/2026</a:t>
+              <a:t>3/8/2026</a:t>
             </a:fld>
             <a:endParaRPr lang="en-US"/>
           </a:p>
@@ -778,6 +780,228 @@
 </p:notes>
 </file>
 
+<file path=ppt/notesSlides/notesSlide4.xml><?xml version="1.0" encoding="utf-8"?>
+<p:notes xmlns:a="http://schemas.openxmlformats.org/drawingml/2006/main" xmlns:r="http://schemas.openxmlformats.org/officeDocument/2006/relationships" xmlns:p="http://schemas.openxmlformats.org/presentationml/2006/main">
+  <p:cSld>
+    <p:spTree>
+      <p:nvGrpSpPr>
+        <p:cNvPr id="1" name="">
+          <a:extLst>
+            <a:ext uri="{FF2B5EF4-FFF2-40B4-BE49-F238E27FC236}">
+              <a16:creationId xmlns:a16="http://schemas.microsoft.com/office/drawing/2014/main" id="{E75D1AFD-06E4-C4D9-543B-B4A470FFAA16}"/>
+            </a:ext>
+          </a:extLst>
+        </p:cNvPr>
+        <p:cNvGrpSpPr/>
+        <p:nvPr/>
+      </p:nvGrpSpPr>
+      <p:grpSpPr>
+        <a:xfrm>
+          <a:off x="0" y="0"/>
+          <a:ext cx="0" cy="0"/>
+          <a:chOff x="0" y="0"/>
+          <a:chExt cx="0" cy="0"/>
+        </a:xfrm>
+      </p:grpSpPr>
+      <p:sp>
+        <p:nvSpPr>
+          <p:cNvPr id="2" name="슬라이드 이미지 개체 틀 1">
+            <a:extLst>
+              <a:ext uri="{FF2B5EF4-FFF2-40B4-BE49-F238E27FC236}">
+                <a16:creationId xmlns:a16="http://schemas.microsoft.com/office/drawing/2014/main" id="{0DC2A0C0-472C-7F29-54A0-A1DE763D2B13}"/>
+              </a:ext>
+            </a:extLst>
+          </p:cNvPr>
+          <p:cNvSpPr>
+            <a:spLocks noGrp="1" noRot="1" noChangeAspect="1"/>
+          </p:cNvSpPr>
+          <p:nvPr>
+            <p:ph type="sldImg"/>
+          </p:nvPr>
+        </p:nvSpPr>
+        <p:spPr/>
+      </p:sp>
+      <p:sp>
+        <p:nvSpPr>
+          <p:cNvPr id="3" name="슬라이드 노트 개체 틀 2">
+            <a:extLst>
+              <a:ext uri="{FF2B5EF4-FFF2-40B4-BE49-F238E27FC236}">
+                <a16:creationId xmlns:a16="http://schemas.microsoft.com/office/drawing/2014/main" id="{D6A13749-16FB-4C5F-3F07-512A1B846C07}"/>
+              </a:ext>
+            </a:extLst>
+          </p:cNvPr>
+          <p:cNvSpPr>
+            <a:spLocks noGrp="1"/>
+          </p:cNvSpPr>
+          <p:nvPr>
+            <p:ph type="body" idx="1"/>
+          </p:nvPr>
+        </p:nvSpPr>
+        <p:spPr/>
+        <p:txBody>
+          <a:bodyPr/>
+          <a:lstStyle/>
+          <a:p>
+            <a:r>
+              <a:rPr lang="en-US" dirty="0"/>
+              <a:t>Sample space</a:t>
+            </a:r>
+          </a:p>
+        </p:txBody>
+      </p:sp>
+      <p:sp>
+        <p:nvSpPr>
+          <p:cNvPr id="4" name="슬라이드 번호 개체 틀 3">
+            <a:extLst>
+              <a:ext uri="{FF2B5EF4-FFF2-40B4-BE49-F238E27FC236}">
+                <a16:creationId xmlns:a16="http://schemas.microsoft.com/office/drawing/2014/main" id="{6B2F8BB2-9CBE-834A-647B-B11418BC38C0}"/>
+              </a:ext>
+            </a:extLst>
+          </p:cNvPr>
+          <p:cNvSpPr>
+            <a:spLocks noGrp="1"/>
+          </p:cNvSpPr>
+          <p:nvPr>
+            <p:ph type="sldNum" sz="quarter" idx="5"/>
+          </p:nvPr>
+        </p:nvSpPr>
+        <p:spPr/>
+        <p:txBody>
+          <a:bodyPr/>
+          <a:lstStyle/>
+          <a:p>
+            <a:fld id="{A7360639-163A-4450-8FAE-C19D9D8590D4}" type="slidenum">
+              <a:rPr lang="en-US" smtClean="0"/>
+              <a:t>6</a:t>
+            </a:fld>
+            <a:endParaRPr lang="en-US"/>
+          </a:p>
+        </p:txBody>
+      </p:sp>
+    </p:spTree>
+    <p:extLst>
+      <p:ext uri="{BB962C8B-B14F-4D97-AF65-F5344CB8AC3E}">
+        <p14:creationId xmlns:p14="http://schemas.microsoft.com/office/powerpoint/2010/main" val="2354907724"/>
+      </p:ext>
+    </p:extLst>
+  </p:cSld>
+  <p:clrMapOvr>
+    <a:masterClrMapping/>
+  </p:clrMapOvr>
+</p:notes>
+</file>
+
+<file path=ppt/notesSlides/notesSlide5.xml><?xml version="1.0" encoding="utf-8"?>
+<p:notes xmlns:a="http://schemas.openxmlformats.org/drawingml/2006/main" xmlns:r="http://schemas.openxmlformats.org/officeDocument/2006/relationships" xmlns:p="http://schemas.openxmlformats.org/presentationml/2006/main">
+  <p:cSld>
+    <p:spTree>
+      <p:nvGrpSpPr>
+        <p:cNvPr id="1" name="">
+          <a:extLst>
+            <a:ext uri="{FF2B5EF4-FFF2-40B4-BE49-F238E27FC236}">
+              <a16:creationId xmlns:a16="http://schemas.microsoft.com/office/drawing/2014/main" id="{9099121B-1631-8079-4B6B-2D28F2FB2E23}"/>
+            </a:ext>
+          </a:extLst>
+        </p:cNvPr>
+        <p:cNvGrpSpPr/>
+        <p:nvPr/>
+      </p:nvGrpSpPr>
+      <p:grpSpPr>
+        <a:xfrm>
+          <a:off x="0" y="0"/>
+          <a:ext cx="0" cy="0"/>
+          <a:chOff x="0" y="0"/>
+          <a:chExt cx="0" cy="0"/>
+        </a:xfrm>
+      </p:grpSpPr>
+      <p:sp>
+        <p:nvSpPr>
+          <p:cNvPr id="2" name="슬라이드 이미지 개체 틀 1">
+            <a:extLst>
+              <a:ext uri="{FF2B5EF4-FFF2-40B4-BE49-F238E27FC236}">
+                <a16:creationId xmlns:a16="http://schemas.microsoft.com/office/drawing/2014/main" id="{F473AC50-F9D8-54C6-4E95-36DB8433971B}"/>
+              </a:ext>
+            </a:extLst>
+          </p:cNvPr>
+          <p:cNvSpPr>
+            <a:spLocks noGrp="1" noRot="1" noChangeAspect="1"/>
+          </p:cNvSpPr>
+          <p:nvPr>
+            <p:ph type="sldImg"/>
+          </p:nvPr>
+        </p:nvSpPr>
+        <p:spPr/>
+      </p:sp>
+      <p:sp>
+        <p:nvSpPr>
+          <p:cNvPr id="3" name="슬라이드 노트 개체 틀 2">
+            <a:extLst>
+              <a:ext uri="{FF2B5EF4-FFF2-40B4-BE49-F238E27FC236}">
+                <a16:creationId xmlns:a16="http://schemas.microsoft.com/office/drawing/2014/main" id="{5A7E5F8A-CC48-6AD5-8308-6E45D6F94702}"/>
+              </a:ext>
+            </a:extLst>
+          </p:cNvPr>
+          <p:cNvSpPr>
+            <a:spLocks noGrp="1"/>
+          </p:cNvSpPr>
+          <p:nvPr>
+            <p:ph type="body" idx="1"/>
+          </p:nvPr>
+        </p:nvSpPr>
+        <p:spPr/>
+        <p:txBody>
+          <a:bodyPr/>
+          <a:lstStyle/>
+          <a:p>
+            <a:r>
+              <a:rPr lang="en-US" dirty="0"/>
+              <a:t>Sample space</a:t>
+            </a:r>
+          </a:p>
+        </p:txBody>
+      </p:sp>
+      <p:sp>
+        <p:nvSpPr>
+          <p:cNvPr id="4" name="슬라이드 번호 개체 틀 3">
+            <a:extLst>
+              <a:ext uri="{FF2B5EF4-FFF2-40B4-BE49-F238E27FC236}">
+                <a16:creationId xmlns:a16="http://schemas.microsoft.com/office/drawing/2014/main" id="{DD926037-9667-7D84-113B-3CF1F959230A}"/>
+              </a:ext>
+            </a:extLst>
+          </p:cNvPr>
+          <p:cNvSpPr>
+            <a:spLocks noGrp="1"/>
+          </p:cNvSpPr>
+          <p:nvPr>
+            <p:ph type="sldNum" sz="quarter" idx="5"/>
+          </p:nvPr>
+        </p:nvSpPr>
+        <p:spPr/>
+        <p:txBody>
+          <a:bodyPr/>
+          <a:lstStyle/>
+          <a:p>
+            <a:fld id="{A7360639-163A-4450-8FAE-C19D9D8590D4}" type="slidenum">
+              <a:rPr lang="en-US" smtClean="0"/>
+              <a:t>7</a:t>
+            </a:fld>
+            <a:endParaRPr lang="en-US"/>
+          </a:p>
+        </p:txBody>
+      </p:sp>
+    </p:spTree>
+    <p:extLst>
+      <p:ext uri="{BB962C8B-B14F-4D97-AF65-F5344CB8AC3E}">
+        <p14:creationId xmlns:p14="http://schemas.microsoft.com/office/powerpoint/2010/main" val="2937134946"/>
+      </p:ext>
+    </p:extLst>
+  </p:cSld>
+  <p:clrMapOvr>
+    <a:masterClrMapping/>
+  </p:clrMapOvr>
+</p:notes>
+</file>
+
 <file path=ppt/slideLayouts/slideLayout1.xml><?xml version="1.0" encoding="utf-8"?>
 <p:sldLayout xmlns:a="http://schemas.openxmlformats.org/drawingml/2006/main" xmlns:r="http://schemas.openxmlformats.org/officeDocument/2006/relationships" xmlns:p="http://schemas.openxmlformats.org/presentationml/2006/main" type="title" preserve="1">
   <p:cSld name="제목 슬라이드">
@@ -927,7 +1151,7 @@
           <a:p>
             <a:fld id="{E76E12A1-65CB-470B-BF0A-B1C5B1B67D68}" type="datetimeFigureOut">
               <a:rPr lang="en-US" smtClean="0"/>
-              <a:t>2/25/2026</a:t>
+              <a:t>3/8/2026</a:t>
             </a:fld>
             <a:endParaRPr lang="en-US"/>
           </a:p>
@@ -1127,7 +1351,7 @@
           <a:p>
             <a:fld id="{E76E12A1-65CB-470B-BF0A-B1C5B1B67D68}" type="datetimeFigureOut">
               <a:rPr lang="en-US" smtClean="0"/>
-              <a:t>2/25/2026</a:t>
+              <a:t>3/8/2026</a:t>
             </a:fld>
             <a:endParaRPr lang="en-US"/>
           </a:p>
@@ -1337,7 +1561,7 @@
           <a:p>
             <a:fld id="{E76E12A1-65CB-470B-BF0A-B1C5B1B67D68}" type="datetimeFigureOut">
               <a:rPr lang="en-US" smtClean="0"/>
-              <a:t>2/25/2026</a:t>
+              <a:t>3/8/2026</a:t>
             </a:fld>
             <a:endParaRPr lang="en-US"/>
           </a:p>
@@ -1537,7 +1761,7 @@
           <a:p>
             <a:fld id="{E76E12A1-65CB-470B-BF0A-B1C5B1B67D68}" type="datetimeFigureOut">
               <a:rPr lang="en-US" smtClean="0"/>
-              <a:t>2/25/2026</a:t>
+              <a:t>3/8/2026</a:t>
             </a:fld>
             <a:endParaRPr lang="en-US"/>
           </a:p>
@@ -1813,7 +2037,7 @@
           <a:p>
             <a:fld id="{E76E12A1-65CB-470B-BF0A-B1C5B1B67D68}" type="datetimeFigureOut">
               <a:rPr lang="en-US" smtClean="0"/>
-              <a:t>2/25/2026</a:t>
+              <a:t>3/8/2026</a:t>
             </a:fld>
             <a:endParaRPr lang="en-US"/>
           </a:p>
@@ -2081,7 +2305,7 @@
           <a:p>
             <a:fld id="{E76E12A1-65CB-470B-BF0A-B1C5B1B67D68}" type="datetimeFigureOut">
               <a:rPr lang="en-US" smtClean="0"/>
-              <a:t>2/25/2026</a:t>
+              <a:t>3/8/2026</a:t>
             </a:fld>
             <a:endParaRPr lang="en-US"/>
           </a:p>
@@ -2496,7 +2720,7 @@
           <a:p>
             <a:fld id="{E76E12A1-65CB-470B-BF0A-B1C5B1B67D68}" type="datetimeFigureOut">
               <a:rPr lang="en-US" smtClean="0"/>
-              <a:t>2/25/2026</a:t>
+              <a:t>3/8/2026</a:t>
             </a:fld>
             <a:endParaRPr lang="en-US"/>
           </a:p>
@@ -2638,7 +2862,7 @@
           <a:p>
             <a:fld id="{E76E12A1-65CB-470B-BF0A-B1C5B1B67D68}" type="datetimeFigureOut">
               <a:rPr lang="en-US" smtClean="0"/>
-              <a:t>2/25/2026</a:t>
+              <a:t>3/8/2026</a:t>
             </a:fld>
             <a:endParaRPr lang="en-US"/>
           </a:p>
@@ -2751,7 +2975,7 @@
           <a:p>
             <a:fld id="{E76E12A1-65CB-470B-BF0A-B1C5B1B67D68}" type="datetimeFigureOut">
               <a:rPr lang="en-US" smtClean="0"/>
-              <a:t>2/25/2026</a:t>
+              <a:t>3/8/2026</a:t>
             </a:fld>
             <a:endParaRPr lang="en-US"/>
           </a:p>
@@ -3064,7 +3288,7 @@
           <a:p>
             <a:fld id="{E76E12A1-65CB-470B-BF0A-B1C5B1B67D68}" type="datetimeFigureOut">
               <a:rPr lang="en-US" smtClean="0"/>
-              <a:t>2/25/2026</a:t>
+              <a:t>3/8/2026</a:t>
             </a:fld>
             <a:endParaRPr lang="en-US"/>
           </a:p>
@@ -3353,7 +3577,7 @@
           <a:p>
             <a:fld id="{E76E12A1-65CB-470B-BF0A-B1C5B1B67D68}" type="datetimeFigureOut">
               <a:rPr lang="en-US" smtClean="0"/>
-              <a:t>2/25/2026</a:t>
+              <a:t>3/8/2026</a:t>
             </a:fld>
             <a:endParaRPr lang="en-US"/>
           </a:p>
@@ -3596,7 +3820,7 @@
           <a:p>
             <a:fld id="{E76E12A1-65CB-470B-BF0A-B1C5B1B67D68}" type="datetimeFigureOut">
               <a:rPr lang="en-US" smtClean="0"/>
-              <a:t>2/25/2026</a:t>
+              <a:t>3/8/2026</a:t>
             </a:fld>
             <a:endParaRPr lang="en-US"/>
           </a:p>
@@ -19293,7 +19517,7 @@
         </p:nvSpPr>
         <p:spPr>
           <a:xfrm>
-            <a:off x="7274028" y="2252823"/>
+            <a:off x="7156570" y="45434"/>
             <a:ext cx="3787442" cy="2067940"/>
           </a:xfrm>
           <a:prstGeom prst="rect">
@@ -19349,7 +19573,7 @@
         </p:nvSpPr>
         <p:spPr>
           <a:xfrm>
-            <a:off x="7554395" y="2773564"/>
+            <a:off x="7436937" y="566175"/>
             <a:ext cx="3090746" cy="1317145"/>
           </a:xfrm>
           <a:prstGeom prst="ellipse">
@@ -20016,8 +20240,8 @@
           </a:fontRef>
         </p:style>
       </p:cxnSp>
-      <mc:AlternateContent xmlns:mc="http://schemas.openxmlformats.org/markup-compatibility/2006">
-        <mc:Choice xmlns:a14="http://schemas.microsoft.com/office/drawing/2010/main" Requires="a14">
+      <mc:AlternateContent xmlns:mc="http://schemas.openxmlformats.org/markup-compatibility/2006" xmlns:a14="http://schemas.microsoft.com/office/drawing/2010/main">
+        <mc:Choice Requires="a14">
           <p:sp>
             <p:nvSpPr>
               <p:cNvPr id="62" name="TextBox 61">
@@ -20101,7 +20325,7 @@
             </p:txBody>
           </p:sp>
         </mc:Choice>
-        <mc:Fallback>
+        <mc:Fallback xmlns="">
           <p:sp>
             <p:nvSpPr>
               <p:cNvPr id="62" name="TextBox 61">
@@ -20146,8 +20370,8 @@
           </p:sp>
         </mc:Fallback>
       </mc:AlternateContent>
-      <mc:AlternateContent xmlns:mc="http://schemas.openxmlformats.org/markup-compatibility/2006">
-        <mc:Choice xmlns:a14="http://schemas.microsoft.com/office/drawing/2010/main" Requires="a14">
+      <mc:AlternateContent xmlns:mc="http://schemas.openxmlformats.org/markup-compatibility/2006" xmlns:a14="http://schemas.microsoft.com/office/drawing/2010/main">
+        <mc:Choice Requires="a14">
           <p:sp>
             <p:nvSpPr>
               <p:cNvPr id="65" name="TextBox 64">
@@ -20252,7 +20476,7 @@
             </p:txBody>
           </p:sp>
         </mc:Choice>
-        <mc:Fallback>
+        <mc:Fallback xmlns="">
           <p:sp>
             <p:nvSpPr>
               <p:cNvPr id="65" name="TextBox 64">
@@ -20297,8 +20521,8 @@
           </p:sp>
         </mc:Fallback>
       </mc:AlternateContent>
-      <mc:AlternateContent xmlns:mc="http://schemas.openxmlformats.org/markup-compatibility/2006">
-        <mc:Choice xmlns:a14="http://schemas.microsoft.com/office/drawing/2010/main" Requires="a14">
+      <mc:AlternateContent xmlns:mc="http://schemas.openxmlformats.org/markup-compatibility/2006" xmlns:a14="http://schemas.microsoft.com/office/drawing/2010/main">
+        <mc:Choice Requires="a14">
           <p:sp>
             <p:nvSpPr>
               <p:cNvPr id="66" name="TextBox 65">
@@ -20400,7 +20624,7 @@
             </p:txBody>
           </p:sp>
         </mc:Choice>
-        <mc:Fallback>
+        <mc:Fallback xmlns="">
           <p:sp>
             <p:nvSpPr>
               <p:cNvPr id="66" name="TextBox 65">
@@ -20445,8 +20669,8 @@
           </p:sp>
         </mc:Fallback>
       </mc:AlternateContent>
-      <mc:AlternateContent xmlns:mc="http://schemas.openxmlformats.org/markup-compatibility/2006">
-        <mc:Choice xmlns:a14="http://schemas.microsoft.com/office/drawing/2010/main" Requires="a14">
+      <mc:AlternateContent xmlns:mc="http://schemas.openxmlformats.org/markup-compatibility/2006" xmlns:a14="http://schemas.microsoft.com/office/drawing/2010/main">
+        <mc:Choice Requires="a14">
           <p:sp>
             <p:nvSpPr>
               <p:cNvPr id="68" name="TextBox 67">
@@ -20562,7 +20786,7 @@
             </p:txBody>
           </p:sp>
         </mc:Choice>
-        <mc:Fallback>
+        <mc:Fallback xmlns="">
           <p:sp>
             <p:nvSpPr>
               <p:cNvPr id="68" name="TextBox 67">
@@ -20607,8 +20831,8 @@
           </p:sp>
         </mc:Fallback>
       </mc:AlternateContent>
-      <mc:AlternateContent xmlns:mc="http://schemas.openxmlformats.org/markup-compatibility/2006">
-        <mc:Choice xmlns:a14="http://schemas.microsoft.com/office/drawing/2010/main" Requires="a14">
+      <mc:AlternateContent xmlns:mc="http://schemas.openxmlformats.org/markup-compatibility/2006" xmlns:a14="http://schemas.microsoft.com/office/drawing/2010/main">
+        <mc:Choice Requires="a14">
           <p:sp>
             <p:nvSpPr>
               <p:cNvPr id="69" name="TextBox 68">
@@ -20665,7 +20889,7 @@
             </p:txBody>
           </p:sp>
         </mc:Choice>
-        <mc:Fallback>
+        <mc:Fallback xmlns="">
           <p:sp>
             <p:nvSpPr>
               <p:cNvPr id="69" name="TextBox 68">
@@ -20710,8 +20934,8 @@
           </p:sp>
         </mc:Fallback>
       </mc:AlternateContent>
-      <mc:AlternateContent xmlns:mc="http://schemas.openxmlformats.org/markup-compatibility/2006">
-        <mc:Choice xmlns:a14="http://schemas.microsoft.com/office/drawing/2010/main" Requires="a14">
+      <mc:AlternateContent xmlns:mc="http://schemas.openxmlformats.org/markup-compatibility/2006" xmlns:a14="http://schemas.microsoft.com/office/drawing/2010/main">
+        <mc:Choice Requires="a14">
           <p:sp>
             <p:nvSpPr>
               <p:cNvPr id="71" name="TextBox 70">
@@ -20786,7 +21010,7 @@
             </p:txBody>
           </p:sp>
         </mc:Choice>
-        <mc:Fallback>
+        <mc:Fallback xmlns="">
           <p:sp>
             <p:nvSpPr>
               <p:cNvPr id="71" name="TextBox 70">
@@ -20831,8 +21055,8 @@
           </p:sp>
         </mc:Fallback>
       </mc:AlternateContent>
-      <mc:AlternateContent xmlns:mc="http://schemas.openxmlformats.org/markup-compatibility/2006">
-        <mc:Choice xmlns:a14="http://schemas.microsoft.com/office/drawing/2010/main" Requires="a14">
+      <mc:AlternateContent xmlns:mc="http://schemas.openxmlformats.org/markup-compatibility/2006" xmlns:a14="http://schemas.microsoft.com/office/drawing/2010/main">
+        <mc:Choice Requires="a14">
           <p:sp>
             <p:nvSpPr>
               <p:cNvPr id="80" name="TextBox 79">
@@ -20928,7 +21152,7 @@
             </p:txBody>
           </p:sp>
         </mc:Choice>
-        <mc:Fallback>
+        <mc:Fallback xmlns="">
           <p:sp>
             <p:nvSpPr>
               <p:cNvPr id="80" name="TextBox 79">
@@ -20973,8 +21197,8 @@
           </p:sp>
         </mc:Fallback>
       </mc:AlternateContent>
-      <mc:AlternateContent xmlns:mc="http://schemas.openxmlformats.org/markup-compatibility/2006">
-        <mc:Choice xmlns:a14="http://schemas.microsoft.com/office/drawing/2010/main" Requires="a14">
+      <mc:AlternateContent xmlns:mc="http://schemas.openxmlformats.org/markup-compatibility/2006" xmlns:a14="http://schemas.microsoft.com/office/drawing/2010/main">
+        <mc:Choice Requires="a14">
           <p:sp>
             <p:nvSpPr>
               <p:cNvPr id="81" name="TextBox 80">
@@ -21095,7 +21319,7 @@
             </p:txBody>
           </p:sp>
         </mc:Choice>
-        <mc:Fallback>
+        <mc:Fallback xmlns="">
           <p:sp>
             <p:nvSpPr>
               <p:cNvPr id="81" name="TextBox 80">
@@ -21140,8 +21364,8 @@
           </p:sp>
         </mc:Fallback>
       </mc:AlternateContent>
-      <mc:AlternateContent xmlns:mc="http://schemas.openxmlformats.org/markup-compatibility/2006">
-        <mc:Choice xmlns:a14="http://schemas.microsoft.com/office/drawing/2010/main" Requires="a14">
+      <mc:AlternateContent xmlns:mc="http://schemas.openxmlformats.org/markup-compatibility/2006" xmlns:a14="http://schemas.microsoft.com/office/drawing/2010/main">
+        <mc:Choice Requires="a14">
           <p:sp>
             <p:nvSpPr>
               <p:cNvPr id="83" name="TextBox 82">
@@ -21241,7 +21465,7 @@
             </p:txBody>
           </p:sp>
         </mc:Choice>
-        <mc:Fallback>
+        <mc:Fallback xmlns="">
           <p:sp>
             <p:nvSpPr>
               <p:cNvPr id="83" name="TextBox 82">
@@ -21286,8 +21510,8 @@
           </p:sp>
         </mc:Fallback>
       </mc:AlternateContent>
-      <mc:AlternateContent xmlns:mc="http://schemas.openxmlformats.org/markup-compatibility/2006">
-        <mc:Choice xmlns:a14="http://schemas.microsoft.com/office/drawing/2010/main" Requires="a14">
+      <mc:AlternateContent xmlns:mc="http://schemas.openxmlformats.org/markup-compatibility/2006" xmlns:a14="http://schemas.microsoft.com/office/drawing/2010/main">
+        <mc:Choice Requires="a14">
           <p:sp>
             <p:nvSpPr>
               <p:cNvPr id="84" name="TextBox 83">
@@ -21387,7 +21611,7 @@
             </p:txBody>
           </p:sp>
         </mc:Choice>
-        <mc:Fallback>
+        <mc:Fallback xmlns="">
           <p:sp>
             <p:nvSpPr>
               <p:cNvPr id="84" name="TextBox 83">
@@ -21432,8 +21656,8 @@
           </p:sp>
         </mc:Fallback>
       </mc:AlternateContent>
-      <mc:AlternateContent xmlns:mc="http://schemas.openxmlformats.org/markup-compatibility/2006">
-        <mc:Choice xmlns:a14="http://schemas.microsoft.com/office/drawing/2010/main" Requires="a14">
+      <mc:AlternateContent xmlns:mc="http://schemas.openxmlformats.org/markup-compatibility/2006" xmlns:a14="http://schemas.microsoft.com/office/drawing/2010/main">
+        <mc:Choice Requires="a14">
           <p:sp>
             <p:nvSpPr>
               <p:cNvPr id="85" name="TextBox 84">
@@ -21558,7 +21782,7 @@
             </p:txBody>
           </p:sp>
         </mc:Choice>
-        <mc:Fallback>
+        <mc:Fallback xmlns="">
           <p:sp>
             <p:nvSpPr>
               <p:cNvPr id="85" name="TextBox 84">
@@ -21603,8 +21827,8 @@
           </p:sp>
         </mc:Fallback>
       </mc:AlternateContent>
-      <mc:AlternateContent xmlns:mc="http://schemas.openxmlformats.org/markup-compatibility/2006">
-        <mc:Choice xmlns:a14="http://schemas.microsoft.com/office/drawing/2010/main" Requires="a14">
+      <mc:AlternateContent xmlns:mc="http://schemas.openxmlformats.org/markup-compatibility/2006" xmlns:a14="http://schemas.microsoft.com/office/drawing/2010/main">
+        <mc:Choice Requires="a14">
           <p:sp>
             <p:nvSpPr>
               <p:cNvPr id="86" name="TextBox 85">
@@ -21731,7 +21955,7 @@
             </p:txBody>
           </p:sp>
         </mc:Choice>
-        <mc:Fallback>
+        <mc:Fallback xmlns="">
           <p:sp>
             <p:nvSpPr>
               <p:cNvPr id="86" name="TextBox 85">
@@ -21776,8 +22000,8 @@
           </p:sp>
         </mc:Fallback>
       </mc:AlternateContent>
-      <mc:AlternateContent xmlns:mc="http://schemas.openxmlformats.org/markup-compatibility/2006">
-        <mc:Choice xmlns:a14="http://schemas.microsoft.com/office/drawing/2010/main" Requires="a14">
+      <mc:AlternateContent xmlns:mc="http://schemas.openxmlformats.org/markup-compatibility/2006" xmlns:a14="http://schemas.microsoft.com/office/drawing/2010/main">
+        <mc:Choice Requires="a14">
           <p:sp>
             <p:nvSpPr>
               <p:cNvPr id="87" name="TextBox 86">
@@ -21859,7 +22083,7 @@
             </p:txBody>
           </p:sp>
         </mc:Choice>
-        <mc:Fallback>
+        <mc:Fallback xmlns="">
           <p:sp>
             <p:nvSpPr>
               <p:cNvPr id="87" name="TextBox 86">
@@ -21904,8 +22128,8 @@
           </p:sp>
         </mc:Fallback>
       </mc:AlternateContent>
-      <mc:AlternateContent xmlns:mc="http://schemas.openxmlformats.org/markup-compatibility/2006">
-        <mc:Choice xmlns:a14="http://schemas.microsoft.com/office/drawing/2010/main" Requires="a14">
+      <mc:AlternateContent xmlns:mc="http://schemas.openxmlformats.org/markup-compatibility/2006" xmlns:a14="http://schemas.microsoft.com/office/drawing/2010/main">
+        <mc:Choice Requires="a14">
           <p:sp>
             <p:nvSpPr>
               <p:cNvPr id="89" name="TextBox 88">
@@ -22057,7 +22281,7 @@
             </p:txBody>
           </p:sp>
         </mc:Choice>
-        <mc:Fallback>
+        <mc:Fallback xmlns="">
           <p:sp>
             <p:nvSpPr>
               <p:cNvPr id="89" name="TextBox 88">
@@ -22102,8 +22326,8 @@
           </p:sp>
         </mc:Fallback>
       </mc:AlternateContent>
-      <mc:AlternateContent xmlns:mc="http://schemas.openxmlformats.org/markup-compatibility/2006">
-        <mc:Choice xmlns:a14="http://schemas.microsoft.com/office/drawing/2010/main" Requires="a14">
+      <mc:AlternateContent xmlns:mc="http://schemas.openxmlformats.org/markup-compatibility/2006" xmlns:a14="http://schemas.microsoft.com/office/drawing/2010/main">
+        <mc:Choice Requires="a14">
           <p:sp>
             <p:nvSpPr>
               <p:cNvPr id="90" name="TextBox 89">
@@ -22238,7 +22462,7 @@
             </p:txBody>
           </p:sp>
         </mc:Choice>
-        <mc:Fallback>
+        <mc:Fallback xmlns="">
           <p:sp>
             <p:nvSpPr>
               <p:cNvPr id="90" name="TextBox 89">
@@ -22283,8 +22507,8 @@
           </p:sp>
         </mc:Fallback>
       </mc:AlternateContent>
-      <mc:AlternateContent xmlns:mc="http://schemas.openxmlformats.org/markup-compatibility/2006">
-        <mc:Choice xmlns:a14="http://schemas.microsoft.com/office/drawing/2010/main" Requires="a14">
+      <mc:AlternateContent xmlns:mc="http://schemas.openxmlformats.org/markup-compatibility/2006" xmlns:a14="http://schemas.microsoft.com/office/drawing/2010/main">
+        <mc:Choice Requires="a14">
           <p:sp>
             <p:nvSpPr>
               <p:cNvPr id="91" name="TextBox 90">
@@ -22429,7 +22653,7 @@
             </p:txBody>
           </p:sp>
         </mc:Choice>
-        <mc:Fallback>
+        <mc:Fallback xmlns="">
           <p:sp>
             <p:nvSpPr>
               <p:cNvPr id="91" name="TextBox 90">
@@ -22474,8 +22698,8 @@
           </p:sp>
         </mc:Fallback>
       </mc:AlternateContent>
-      <mc:AlternateContent xmlns:mc="http://schemas.openxmlformats.org/markup-compatibility/2006">
-        <mc:Choice xmlns:a14="http://schemas.microsoft.com/office/drawing/2010/main" Requires="a14">
+      <mc:AlternateContent xmlns:mc="http://schemas.openxmlformats.org/markup-compatibility/2006" xmlns:a14="http://schemas.microsoft.com/office/drawing/2010/main">
+        <mc:Choice Requires="a14">
           <p:sp>
             <p:nvSpPr>
               <p:cNvPr id="93" name="TextBox 92">
@@ -22621,7 +22845,7 @@
             </p:txBody>
           </p:sp>
         </mc:Choice>
-        <mc:Fallback>
+        <mc:Fallback xmlns="">
           <p:sp>
             <p:nvSpPr>
               <p:cNvPr id="93" name="TextBox 92">
@@ -22666,8 +22890,8 @@
           </p:sp>
         </mc:Fallback>
       </mc:AlternateContent>
-      <mc:AlternateContent xmlns:mc="http://schemas.openxmlformats.org/markup-compatibility/2006">
-        <mc:Choice xmlns:a14="http://schemas.microsoft.com/office/drawing/2010/main" Requires="a14">
+      <mc:AlternateContent xmlns:mc="http://schemas.openxmlformats.org/markup-compatibility/2006" xmlns:a14="http://schemas.microsoft.com/office/drawing/2010/main">
+        <mc:Choice Requires="a14">
           <p:sp>
             <p:nvSpPr>
               <p:cNvPr id="94" name="TextBox 93">
@@ -22846,7 +23070,7 @@
             </p:txBody>
           </p:sp>
         </mc:Choice>
-        <mc:Fallback>
+        <mc:Fallback xmlns="">
           <p:sp>
             <p:nvSpPr>
               <p:cNvPr id="94" name="TextBox 93">
@@ -22907,7 +23131,7 @@
             </p:nvSpPr>
             <p:spPr>
               <a:xfrm>
-                <a:off x="10557504" y="2290467"/>
+                <a:off x="10440046" y="83078"/>
                 <a:ext cx="560732" cy="369332"/>
               </a:xfrm>
               <a:prstGeom prst="rect">
@@ -22991,7 +23215,7 @@
             </p:nvSpPr>
             <p:spPr>
               <a:xfrm>
-                <a:off x="10557504" y="2290467"/>
+                <a:off x="10440046" y="83078"/>
                 <a:ext cx="560732" cy="369332"/>
               </a:xfrm>
               <a:prstGeom prst="rect">
@@ -23033,7 +23257,7 @@
         </p:nvSpPr>
         <p:spPr>
           <a:xfrm>
-            <a:off x="10103026" y="2328700"/>
+            <a:off x="9985568" y="121311"/>
             <a:ext cx="698742" cy="307777"/>
           </a:xfrm>
           <a:prstGeom prst="rect">
@@ -23073,7 +23297,7 @@
         </p:nvSpPr>
         <p:spPr>
           <a:xfrm>
-            <a:off x="7271647" y="2254317"/>
+            <a:off x="7154189" y="46928"/>
             <a:ext cx="1260159" cy="307777"/>
           </a:xfrm>
           <a:prstGeom prst="rect">
@@ -23112,7 +23336,7 @@
             </p:nvSpPr>
             <p:spPr>
               <a:xfrm>
-                <a:off x="8476010" y="2269705"/>
+                <a:off x="8358552" y="62316"/>
                 <a:ext cx="232435" cy="307777"/>
               </a:xfrm>
               <a:prstGeom prst="rect">
@@ -23167,7 +23391,7 @@
             </p:nvSpPr>
             <p:spPr>
               <a:xfrm>
-                <a:off x="8476010" y="2269705"/>
+                <a:off x="8358552" y="62316"/>
                 <a:ext cx="232435" cy="307777"/>
               </a:xfrm>
               <a:prstGeom prst="rect">
@@ -23176,7 +23400,7 @@
               <a:blipFill>
                 <a:blip r:embed="rId22"/>
                 <a:stretch>
-                  <a:fillRect l="-23077" r="-25641" b="-5882"/>
+                  <a:fillRect l="-23684" r="-28947" b="-5882"/>
                 </a:stretch>
               </a:blipFill>
             </p:spPr>
@@ -23211,7 +23435,7 @@
         </p:nvCxnSpPr>
         <p:spPr>
           <a:xfrm flipH="1">
-            <a:off x="8864899" y="2252823"/>
+            <a:off x="8747441" y="45434"/>
             <a:ext cx="662466" cy="1283478"/>
           </a:xfrm>
           <a:prstGeom prst="line">
@@ -23254,7 +23478,7 @@
         </p:nvCxnSpPr>
         <p:spPr>
           <a:xfrm flipH="1">
-            <a:off x="7271647" y="3536301"/>
+            <a:off x="7154189" y="1328912"/>
             <a:ext cx="1593252" cy="585389"/>
           </a:xfrm>
           <a:prstGeom prst="line">
@@ -23297,7 +23521,7 @@
         </p:nvCxnSpPr>
         <p:spPr>
           <a:xfrm flipH="1" flipV="1">
-            <a:off x="8999220" y="3312367"/>
+            <a:off x="8881762" y="1104978"/>
             <a:ext cx="1933222" cy="1008396"/>
           </a:xfrm>
           <a:prstGeom prst="line">
@@ -23340,7 +23564,7 @@
             </p:nvSpPr>
             <p:spPr>
               <a:xfrm>
-                <a:off x="8008872" y="3958347"/>
+                <a:off x="7891414" y="1750958"/>
                 <a:ext cx="560732" cy="369332"/>
               </a:xfrm>
               <a:prstGeom prst="rect">
@@ -23424,7 +23648,7 @@
             </p:nvSpPr>
             <p:spPr>
               <a:xfrm>
-                <a:off x="8008872" y="3958347"/>
+                <a:off x="7891414" y="1750958"/>
                 <a:ext cx="560732" cy="369332"/>
               </a:xfrm>
               <a:prstGeom prst="rect">
@@ -23466,7 +23690,7 @@
         </p:nvSpPr>
         <p:spPr>
           <a:xfrm>
-            <a:off x="7554394" y="3996580"/>
+            <a:off x="7436936" y="1789191"/>
             <a:ext cx="698742" cy="307777"/>
           </a:xfrm>
           <a:prstGeom prst="rect">
@@ -23508,7 +23732,7 @@
             </p:nvSpPr>
             <p:spPr>
               <a:xfrm>
-                <a:off x="7728506" y="2517774"/>
+                <a:off x="7611048" y="310385"/>
                 <a:ext cx="560732" cy="369332"/>
               </a:xfrm>
               <a:prstGeom prst="rect">
@@ -23592,7 +23816,7 @@
             </p:nvSpPr>
             <p:spPr>
               <a:xfrm>
-                <a:off x="7728506" y="2517774"/>
+                <a:off x="7611048" y="310385"/>
                 <a:ext cx="560732" cy="369332"/>
               </a:xfrm>
               <a:prstGeom prst="rect">
@@ -23634,7 +23858,7 @@
         </p:nvSpPr>
         <p:spPr>
           <a:xfrm>
-            <a:off x="7274028" y="2556007"/>
+            <a:off x="7156570" y="348618"/>
             <a:ext cx="698742" cy="307777"/>
           </a:xfrm>
           <a:prstGeom prst="rect">
@@ -23676,7 +23900,7 @@
             </p:nvSpPr>
             <p:spPr>
               <a:xfrm>
-                <a:off x="7702789" y="3143647"/>
+                <a:off x="7585331" y="936258"/>
                 <a:ext cx="1005655" cy="369332"/>
               </a:xfrm>
               <a:prstGeom prst="rect">
@@ -23780,7 +24004,7 @@
             </p:nvSpPr>
             <p:spPr>
               <a:xfrm>
-                <a:off x="7702789" y="3143647"/>
+                <a:off x="7585331" y="936258"/>
                 <a:ext cx="1005655" cy="369332"/>
               </a:xfrm>
               <a:prstGeom prst="rect">
@@ -23824,7 +24048,7 @@
             </p:nvSpPr>
             <p:spPr>
               <a:xfrm>
-                <a:off x="9280309" y="3022264"/>
+                <a:off x="9162851" y="814875"/>
                 <a:ext cx="1005655" cy="369332"/>
               </a:xfrm>
               <a:prstGeom prst="rect">
@@ -23928,7 +24152,7 @@
             </p:nvSpPr>
             <p:spPr>
               <a:xfrm>
-                <a:off x="9280309" y="3022264"/>
+                <a:off x="9162851" y="814875"/>
                 <a:ext cx="1005655" cy="369332"/>
               </a:xfrm>
               <a:prstGeom prst="rect">
@@ -23972,7 +24196,7 @@
             </p:nvSpPr>
             <p:spPr>
               <a:xfrm>
-                <a:off x="8571478" y="3626744"/>
+                <a:off x="8454020" y="1419355"/>
                 <a:ext cx="1005655" cy="369332"/>
               </a:xfrm>
               <a:prstGeom prst="rect">
@@ -24076,7 +24300,7 @@
             </p:nvSpPr>
             <p:spPr>
               <a:xfrm>
-                <a:off x="8571478" y="3626744"/>
+                <a:off x="8454020" y="1419355"/>
                 <a:ext cx="1005655" cy="369332"/>
               </a:xfrm>
               <a:prstGeom prst="rect">
@@ -24104,10 +24328,5659 @@
           </p:sp>
         </mc:Fallback>
       </mc:AlternateContent>
+      <p:sp>
+        <p:nvSpPr>
+          <p:cNvPr id="2" name="직사각형 1">
+            <a:extLst>
+              <a:ext uri="{FF2B5EF4-FFF2-40B4-BE49-F238E27FC236}">
+                <a16:creationId xmlns:a16="http://schemas.microsoft.com/office/drawing/2014/main" id="{C18433F6-51B6-6BE7-1AE5-CDC37FF6ED05}"/>
+              </a:ext>
+            </a:extLst>
+          </p:cNvPr>
+          <p:cNvSpPr/>
+          <p:nvPr/>
+        </p:nvSpPr>
+        <p:spPr>
+          <a:xfrm>
+            <a:off x="7154189" y="2215411"/>
+            <a:ext cx="3787442" cy="2067940"/>
+          </a:xfrm>
+          <a:prstGeom prst="rect">
+            <a:avLst/>
+          </a:prstGeom>
+          <a:solidFill>
+            <a:schemeClr val="bg1">
+              <a:lumMod val="95000"/>
+            </a:schemeClr>
+          </a:solidFill>
+          <a:ln>
+            <a:solidFill>
+              <a:schemeClr val="tx1"/>
+            </a:solidFill>
+          </a:ln>
+        </p:spPr>
+        <p:style>
+          <a:lnRef idx="2">
+            <a:schemeClr val="accent1">
+              <a:shade val="15000"/>
+            </a:schemeClr>
+          </a:lnRef>
+          <a:fillRef idx="1">
+            <a:schemeClr val="accent1"/>
+          </a:fillRef>
+          <a:effectRef idx="0">
+            <a:schemeClr val="accent1"/>
+          </a:effectRef>
+          <a:fontRef idx="minor">
+            <a:schemeClr val="lt1"/>
+          </a:fontRef>
+        </p:style>
+        <p:txBody>
+          <a:bodyPr rtlCol="0" anchor="ctr"/>
+          <a:lstStyle/>
+          <a:p>
+            <a:pPr algn="ctr"/>
+            <a:endParaRPr lang="en-US"/>
+          </a:p>
+        </p:txBody>
+      </p:sp>
+      <p:sp>
+        <p:nvSpPr>
+          <p:cNvPr id="3" name="타원 2">
+            <a:extLst>
+              <a:ext uri="{FF2B5EF4-FFF2-40B4-BE49-F238E27FC236}">
+                <a16:creationId xmlns:a16="http://schemas.microsoft.com/office/drawing/2014/main" id="{DBB215DE-049C-1A6E-2819-D0FB0ECF8C9A}"/>
+              </a:ext>
+            </a:extLst>
+          </p:cNvPr>
+          <p:cNvSpPr/>
+          <p:nvPr/>
+        </p:nvSpPr>
+        <p:spPr>
+          <a:xfrm>
+            <a:off x="7410782" y="2551756"/>
+            <a:ext cx="1600198" cy="1618066"/>
+          </a:xfrm>
+          <a:prstGeom prst="ellipse">
+            <a:avLst/>
+          </a:prstGeom>
+          <a:solidFill>
+            <a:schemeClr val="accent2">
+              <a:lumMod val="20000"/>
+              <a:lumOff val="80000"/>
+            </a:schemeClr>
+          </a:solidFill>
+          <a:ln w="28575">
+            <a:solidFill>
+              <a:schemeClr val="accent5">
+                <a:lumMod val="50000"/>
+              </a:schemeClr>
+            </a:solidFill>
+          </a:ln>
+        </p:spPr>
+        <p:style>
+          <a:lnRef idx="2">
+            <a:schemeClr val="accent1">
+              <a:shade val="15000"/>
+            </a:schemeClr>
+          </a:lnRef>
+          <a:fillRef idx="1">
+            <a:schemeClr val="accent1"/>
+          </a:fillRef>
+          <a:effectRef idx="0">
+            <a:schemeClr val="accent1"/>
+          </a:effectRef>
+          <a:fontRef idx="minor">
+            <a:schemeClr val="lt1"/>
+          </a:fontRef>
+        </p:style>
+        <p:txBody>
+          <a:bodyPr rtlCol="0" anchor="ctr"/>
+          <a:lstStyle/>
+          <a:p>
+            <a:pPr algn="ctr"/>
+            <a:endParaRPr lang="en-US">
+              <a:solidFill>
+                <a:schemeClr val="accent5">
+                  <a:lumMod val="75000"/>
+                </a:schemeClr>
+              </a:solidFill>
+            </a:endParaRPr>
+          </a:p>
+        </p:txBody>
+      </p:sp>
+      <p:sp>
+        <p:nvSpPr>
+          <p:cNvPr id="4" name="TextBox 3">
+            <a:extLst>
+              <a:ext uri="{FF2B5EF4-FFF2-40B4-BE49-F238E27FC236}">
+                <a16:creationId xmlns:a16="http://schemas.microsoft.com/office/drawing/2014/main" id="{4A20C267-326D-0BF5-F280-7CC933B8B17E}"/>
+              </a:ext>
+            </a:extLst>
+          </p:cNvPr>
+          <p:cNvSpPr txBox="1"/>
+          <p:nvPr/>
+        </p:nvSpPr>
+        <p:spPr>
+          <a:xfrm>
+            <a:off x="7151808" y="2216905"/>
+            <a:ext cx="1260159" cy="307777"/>
+          </a:xfrm>
+          <a:prstGeom prst="rect">
+            <a:avLst/>
+          </a:prstGeom>
+          <a:noFill/>
+        </p:spPr>
+        <p:txBody>
+          <a:bodyPr wrap="square" rtlCol="0">
+            <a:spAutoFit/>
+          </a:bodyPr>
+          <a:lstStyle/>
+          <a:p>
+            <a:r>
+              <a:rPr lang="en-US" sz="1400" dirty="0">
+                <a:latin typeface="Georgia" panose="02040502050405020303" pitchFamily="18" charset="0"/>
+              </a:rPr>
+              <a:t>Sample space</a:t>
+            </a:r>
+          </a:p>
+        </p:txBody>
+      </p:sp>
+      <mc:AlternateContent xmlns:mc="http://schemas.openxmlformats.org/markup-compatibility/2006">
+        <mc:Choice xmlns:a14="http://schemas.microsoft.com/office/drawing/2010/main" Requires="a14">
+          <p:sp>
+            <p:nvSpPr>
+              <p:cNvPr id="5" name="TextBox 4">
+                <a:extLst>
+                  <a:ext uri="{FF2B5EF4-FFF2-40B4-BE49-F238E27FC236}">
+                    <a16:creationId xmlns:a16="http://schemas.microsoft.com/office/drawing/2014/main" id="{11AE03DB-7437-F558-46A8-075EB716D49B}"/>
+                  </a:ext>
+                </a:extLst>
+              </p:cNvPr>
+              <p:cNvSpPr txBox="1"/>
+              <p:nvPr/>
+            </p:nvSpPr>
+            <p:spPr>
+              <a:xfrm>
+                <a:off x="8356171" y="2232293"/>
+                <a:ext cx="232435" cy="307777"/>
+              </a:xfrm>
+              <a:prstGeom prst="rect">
+                <a:avLst/>
+              </a:prstGeom>
+              <a:noFill/>
+            </p:spPr>
+            <p:txBody>
+              <a:bodyPr wrap="none" lIns="0" tIns="0" rIns="0" bIns="0" rtlCol="0">
+                <a:spAutoFit/>
+              </a:bodyPr>
+              <a:lstStyle/>
+              <a:p>
+                <a:pPr/>
+                <a14:m>
+                  <m:oMathPara xmlns:m="http://schemas.openxmlformats.org/officeDocument/2006/math">
+                    <m:oMathParaPr>
+                      <m:jc m:val="centerGroup"/>
+                    </m:oMathParaPr>
+                    <m:oMath xmlns:m="http://schemas.openxmlformats.org/officeDocument/2006/math">
+                      <m:r>
+                        <m:rPr>
+                          <m:sty m:val="p"/>
+                        </m:rPr>
+                        <a:rPr lang="el-GR" sz="2000" i="1" smtClean="0">
+                          <a:latin typeface="Cambria Math" panose="02040503050406030204" pitchFamily="18" charset="0"/>
+                        </a:rPr>
+                        <m:t>Ω</m:t>
+                      </m:r>
+                    </m:oMath>
+                  </m:oMathPara>
+                </a14:m>
+                <a:endParaRPr lang="en-US" sz="2000" dirty="0"/>
+              </a:p>
+            </p:txBody>
+          </p:sp>
+        </mc:Choice>
+        <mc:Fallback>
+          <p:sp>
+            <p:nvSpPr>
+              <p:cNvPr id="5" name="TextBox 4">
+                <a:extLst>
+                  <a:ext uri="{FF2B5EF4-FFF2-40B4-BE49-F238E27FC236}">
+                    <a16:creationId xmlns:a16="http://schemas.microsoft.com/office/drawing/2014/main" id="{11AE03DB-7437-F558-46A8-075EB716D49B}"/>
+                  </a:ext>
+                </a:extLst>
+              </p:cNvPr>
+              <p:cNvSpPr txBox="1">
+                <a:spLocks noRot="1" noChangeAspect="1" noMove="1" noResize="1" noEditPoints="1" noAdjustHandles="1" noChangeArrowheads="1" noChangeShapeType="1" noTextEdit="1"/>
+              </p:cNvSpPr>
+              <p:nvPr/>
+            </p:nvSpPr>
+            <p:spPr>
+              <a:xfrm>
+                <a:off x="8356171" y="2232293"/>
+                <a:ext cx="232435" cy="307777"/>
+              </a:xfrm>
+              <a:prstGeom prst="rect">
+                <a:avLst/>
+              </a:prstGeom>
+              <a:blipFill>
+                <a:blip r:embed="rId28"/>
+                <a:stretch>
+                  <a:fillRect l="-26316" r="-26316" b="-5882"/>
+                </a:stretch>
+              </a:blipFill>
+            </p:spPr>
+            <p:txBody>
+              <a:bodyPr/>
+              <a:lstStyle/>
+              <a:p>
+                <a:r>
+                  <a:rPr lang="en-US">
+                    <a:noFill/>
+                  </a:rPr>
+                  <a:t> </a:t>
+                </a:r>
+              </a:p>
+            </p:txBody>
+          </p:sp>
+        </mc:Fallback>
+      </mc:AlternateContent>
+      <p:sp>
+        <p:nvSpPr>
+          <p:cNvPr id="6" name="타원 5">
+            <a:extLst>
+              <a:ext uri="{FF2B5EF4-FFF2-40B4-BE49-F238E27FC236}">
+                <a16:creationId xmlns:a16="http://schemas.microsoft.com/office/drawing/2014/main" id="{EB19BBE7-15C9-2315-7426-5E1C4D191A40}"/>
+              </a:ext>
+            </a:extLst>
+          </p:cNvPr>
+          <p:cNvSpPr/>
+          <p:nvPr/>
+        </p:nvSpPr>
+        <p:spPr>
+          <a:xfrm>
+            <a:off x="9384946" y="2622380"/>
+            <a:ext cx="1287728" cy="1189095"/>
+          </a:xfrm>
+          <a:prstGeom prst="ellipse">
+            <a:avLst/>
+          </a:prstGeom>
+          <a:solidFill>
+            <a:schemeClr val="accent6">
+              <a:lumMod val="20000"/>
+              <a:lumOff val="80000"/>
+            </a:schemeClr>
+          </a:solidFill>
+          <a:ln w="28575">
+            <a:solidFill>
+              <a:schemeClr val="accent5">
+                <a:lumMod val="50000"/>
+              </a:schemeClr>
+            </a:solidFill>
+          </a:ln>
+        </p:spPr>
+        <p:style>
+          <a:lnRef idx="2">
+            <a:schemeClr val="accent1">
+              <a:shade val="15000"/>
+            </a:schemeClr>
+          </a:lnRef>
+          <a:fillRef idx="1">
+            <a:schemeClr val="accent1"/>
+          </a:fillRef>
+          <a:effectRef idx="0">
+            <a:schemeClr val="accent1"/>
+          </a:effectRef>
+          <a:fontRef idx="minor">
+            <a:schemeClr val="lt1"/>
+          </a:fontRef>
+        </p:style>
+        <p:txBody>
+          <a:bodyPr rtlCol="0" anchor="ctr"/>
+          <a:lstStyle/>
+          <a:p>
+            <a:pPr algn="ctr"/>
+            <a:endParaRPr lang="en-US">
+              <a:solidFill>
+                <a:srgbClr val="FF0000"/>
+              </a:solidFill>
+            </a:endParaRPr>
+          </a:p>
+        </p:txBody>
+      </p:sp>
+      <mc:AlternateContent xmlns:mc="http://schemas.openxmlformats.org/markup-compatibility/2006">
+        <mc:Choice xmlns:a14="http://schemas.microsoft.com/office/drawing/2010/main" Requires="a14">
+          <p:sp>
+            <p:nvSpPr>
+              <p:cNvPr id="7" name="TextBox 6">
+                <a:extLst>
+                  <a:ext uri="{FF2B5EF4-FFF2-40B4-BE49-F238E27FC236}">
+                    <a16:creationId xmlns:a16="http://schemas.microsoft.com/office/drawing/2014/main" id="{F39C8C42-FB7A-2919-1FB3-863C5AF2C292}"/>
+                  </a:ext>
+                </a:extLst>
+              </p:cNvPr>
+              <p:cNvSpPr txBox="1"/>
+              <p:nvPr/>
+            </p:nvSpPr>
+            <p:spPr>
+              <a:xfrm>
+                <a:off x="8262675" y="3181117"/>
+                <a:ext cx="408284" cy="369332"/>
+              </a:xfrm>
+              <a:prstGeom prst="rect">
+                <a:avLst/>
+              </a:prstGeom>
+              <a:noFill/>
+            </p:spPr>
+            <p:txBody>
+              <a:bodyPr wrap="square" rtlCol="0">
+                <a:spAutoFit/>
+              </a:bodyPr>
+              <a:lstStyle/>
+              <a:p>
+                <a:pPr/>
+                <a14:m>
+                  <m:oMathPara xmlns:m="http://schemas.openxmlformats.org/officeDocument/2006/math">
+                    <m:oMathParaPr>
+                      <m:jc m:val="centerGroup"/>
+                    </m:oMathParaPr>
+                    <m:oMath xmlns:m="http://schemas.openxmlformats.org/officeDocument/2006/math">
+                      <m:r>
+                        <a:rPr lang="en-US" b="0" i="1" dirty="0" smtClean="0">
+                          <a:solidFill>
+                            <a:schemeClr val="accent5">
+                              <a:lumMod val="75000"/>
+                            </a:schemeClr>
+                          </a:solidFill>
+                          <a:latin typeface="Cambria Math" panose="02040503050406030204" pitchFamily="18" charset="0"/>
+                        </a:rPr>
+                        <m:t>𝐴</m:t>
+                      </m:r>
+                    </m:oMath>
+                  </m:oMathPara>
+                </a14:m>
+                <a:endParaRPr lang="en-US" b="0" dirty="0">
+                  <a:solidFill>
+                    <a:schemeClr val="accent5">
+                      <a:lumMod val="75000"/>
+                    </a:schemeClr>
+                  </a:solidFill>
+                </a:endParaRPr>
+              </a:p>
+            </p:txBody>
+          </p:sp>
+        </mc:Choice>
+        <mc:Fallback>
+          <p:sp>
+            <p:nvSpPr>
+              <p:cNvPr id="7" name="TextBox 6">
+                <a:extLst>
+                  <a:ext uri="{FF2B5EF4-FFF2-40B4-BE49-F238E27FC236}">
+                    <a16:creationId xmlns:a16="http://schemas.microsoft.com/office/drawing/2014/main" id="{F39C8C42-FB7A-2919-1FB3-863C5AF2C292}"/>
+                  </a:ext>
+                </a:extLst>
+              </p:cNvPr>
+              <p:cNvSpPr txBox="1">
+                <a:spLocks noRot="1" noChangeAspect="1" noMove="1" noResize="1" noEditPoints="1" noAdjustHandles="1" noChangeArrowheads="1" noChangeShapeType="1" noTextEdit="1"/>
+              </p:cNvSpPr>
+              <p:nvPr/>
+            </p:nvSpPr>
+            <p:spPr>
+              <a:xfrm>
+                <a:off x="8262675" y="3181117"/>
+                <a:ext cx="408284" cy="369332"/>
+              </a:xfrm>
+              <a:prstGeom prst="rect">
+                <a:avLst/>
+              </a:prstGeom>
+              <a:blipFill>
+                <a:blip r:embed="rId29"/>
+                <a:stretch>
+                  <a:fillRect/>
+                </a:stretch>
+              </a:blipFill>
+            </p:spPr>
+            <p:txBody>
+              <a:bodyPr/>
+              <a:lstStyle/>
+              <a:p>
+                <a:r>
+                  <a:rPr lang="en-US">
+                    <a:noFill/>
+                  </a:rPr>
+                  <a:t> </a:t>
+                </a:r>
+              </a:p>
+            </p:txBody>
+          </p:sp>
+        </mc:Fallback>
+      </mc:AlternateContent>
+      <p:sp>
+        <p:nvSpPr>
+          <p:cNvPr id="8" name="TextBox 7">
+            <a:extLst>
+              <a:ext uri="{FF2B5EF4-FFF2-40B4-BE49-F238E27FC236}">
+                <a16:creationId xmlns:a16="http://schemas.microsoft.com/office/drawing/2014/main" id="{5461CBBF-4BBB-1233-5BFE-05D009291FAB}"/>
+              </a:ext>
+            </a:extLst>
+          </p:cNvPr>
+          <p:cNvSpPr txBox="1"/>
+          <p:nvPr/>
+        </p:nvSpPr>
+        <p:spPr>
+          <a:xfrm>
+            <a:off x="7808197" y="3219350"/>
+            <a:ext cx="698742" cy="307777"/>
+          </a:xfrm>
+          <a:prstGeom prst="rect">
+            <a:avLst/>
+          </a:prstGeom>
+          <a:noFill/>
+        </p:spPr>
+        <p:txBody>
+          <a:bodyPr wrap="square" rtlCol="0">
+            <a:spAutoFit/>
+          </a:bodyPr>
+          <a:lstStyle/>
+          <a:p>
+            <a:r>
+              <a:rPr lang="en-US" sz="1400" dirty="0">
+                <a:solidFill>
+                  <a:schemeClr val="accent5">
+                    <a:lumMod val="75000"/>
+                  </a:schemeClr>
+                </a:solidFill>
+                <a:latin typeface="Georgia" panose="02040502050405020303" pitchFamily="18" charset="0"/>
+              </a:rPr>
+              <a:t>Event</a:t>
+            </a:r>
+          </a:p>
+        </p:txBody>
+      </p:sp>
+      <mc:AlternateContent xmlns:mc="http://schemas.openxmlformats.org/markup-compatibility/2006">
+        <mc:Choice xmlns:a14="http://schemas.microsoft.com/office/drawing/2010/main" Requires="a14">
+          <p:sp>
+            <p:nvSpPr>
+              <p:cNvPr id="9" name="TextBox 8">
+                <a:extLst>
+                  <a:ext uri="{FF2B5EF4-FFF2-40B4-BE49-F238E27FC236}">
+                    <a16:creationId xmlns:a16="http://schemas.microsoft.com/office/drawing/2014/main" id="{8A333ECE-F811-C548-75B0-97051F842880}"/>
+                  </a:ext>
+                </a:extLst>
+              </p:cNvPr>
+              <p:cNvSpPr txBox="1"/>
+              <p:nvPr/>
+            </p:nvSpPr>
+            <p:spPr>
+              <a:xfrm>
+                <a:off x="10056716" y="3022256"/>
+                <a:ext cx="433239" cy="369332"/>
+              </a:xfrm>
+              <a:prstGeom prst="rect">
+                <a:avLst/>
+              </a:prstGeom>
+              <a:noFill/>
+            </p:spPr>
+            <p:txBody>
+              <a:bodyPr wrap="square" rtlCol="0">
+                <a:spAutoFit/>
+              </a:bodyPr>
+              <a:lstStyle/>
+              <a:p>
+                <a:pPr/>
+                <a14:m>
+                  <m:oMathPara xmlns:m="http://schemas.openxmlformats.org/officeDocument/2006/math">
+                    <m:oMathParaPr>
+                      <m:jc m:val="centerGroup"/>
+                    </m:oMathParaPr>
+                    <m:oMath xmlns:m="http://schemas.openxmlformats.org/officeDocument/2006/math">
+                      <m:r>
+                        <a:rPr lang="en-US" b="0" i="1" dirty="0" smtClean="0">
+                          <a:solidFill>
+                            <a:srgbClr val="FF0000"/>
+                          </a:solidFill>
+                          <a:latin typeface="Cambria Math" panose="02040503050406030204" pitchFamily="18" charset="0"/>
+                        </a:rPr>
+                        <m:t>𝐵</m:t>
+                      </m:r>
+                    </m:oMath>
+                  </m:oMathPara>
+                </a14:m>
+                <a:endParaRPr lang="en-US" b="0" dirty="0">
+                  <a:solidFill>
+                    <a:srgbClr val="FF0000"/>
+                  </a:solidFill>
+                </a:endParaRPr>
+              </a:p>
+            </p:txBody>
+          </p:sp>
+        </mc:Choice>
+        <mc:Fallback>
+          <p:sp>
+            <p:nvSpPr>
+              <p:cNvPr id="9" name="TextBox 8">
+                <a:extLst>
+                  <a:ext uri="{FF2B5EF4-FFF2-40B4-BE49-F238E27FC236}">
+                    <a16:creationId xmlns:a16="http://schemas.microsoft.com/office/drawing/2014/main" id="{8A333ECE-F811-C548-75B0-97051F842880}"/>
+                  </a:ext>
+                </a:extLst>
+              </p:cNvPr>
+              <p:cNvSpPr txBox="1">
+                <a:spLocks noRot="1" noChangeAspect="1" noMove="1" noResize="1" noEditPoints="1" noAdjustHandles="1" noChangeArrowheads="1" noChangeShapeType="1" noTextEdit="1"/>
+              </p:cNvSpPr>
+              <p:nvPr/>
+            </p:nvSpPr>
+            <p:spPr>
+              <a:xfrm>
+                <a:off x="10056716" y="3022256"/>
+                <a:ext cx="433239" cy="369332"/>
+              </a:xfrm>
+              <a:prstGeom prst="rect">
+                <a:avLst/>
+              </a:prstGeom>
+              <a:blipFill>
+                <a:blip r:embed="rId30"/>
+                <a:stretch>
+                  <a:fillRect/>
+                </a:stretch>
+              </a:blipFill>
+            </p:spPr>
+            <p:txBody>
+              <a:bodyPr/>
+              <a:lstStyle/>
+              <a:p>
+                <a:r>
+                  <a:rPr lang="en-US">
+                    <a:noFill/>
+                  </a:rPr>
+                  <a:t> </a:t>
+                </a:r>
+              </a:p>
+            </p:txBody>
+          </p:sp>
+        </mc:Fallback>
+      </mc:AlternateContent>
+      <p:sp>
+        <p:nvSpPr>
+          <p:cNvPr id="10" name="TextBox 9">
+            <a:extLst>
+              <a:ext uri="{FF2B5EF4-FFF2-40B4-BE49-F238E27FC236}">
+                <a16:creationId xmlns:a16="http://schemas.microsoft.com/office/drawing/2014/main" id="{C2EF21E7-BEBB-7B3D-4B9A-35741E47827C}"/>
+              </a:ext>
+            </a:extLst>
+          </p:cNvPr>
+          <p:cNvSpPr txBox="1"/>
+          <p:nvPr/>
+        </p:nvSpPr>
+        <p:spPr>
+          <a:xfrm>
+            <a:off x="9602238" y="3060489"/>
+            <a:ext cx="698742" cy="307777"/>
+          </a:xfrm>
+          <a:prstGeom prst="rect">
+            <a:avLst/>
+          </a:prstGeom>
+          <a:noFill/>
+        </p:spPr>
+        <p:txBody>
+          <a:bodyPr wrap="square" rtlCol="0">
+            <a:spAutoFit/>
+          </a:bodyPr>
+          <a:lstStyle/>
+          <a:p>
+            <a:r>
+              <a:rPr lang="en-US" sz="1400" dirty="0">
+                <a:solidFill>
+                  <a:srgbClr val="FF0000"/>
+                </a:solidFill>
+                <a:latin typeface="Georgia" panose="02040502050405020303" pitchFamily="18" charset="0"/>
+              </a:rPr>
+              <a:t>Event</a:t>
+            </a:r>
+          </a:p>
+        </p:txBody>
+      </p:sp>
+      <p:sp>
+        <p:nvSpPr>
+          <p:cNvPr id="20" name="직사각형 19">
+            <a:extLst>
+              <a:ext uri="{FF2B5EF4-FFF2-40B4-BE49-F238E27FC236}">
+                <a16:creationId xmlns:a16="http://schemas.microsoft.com/office/drawing/2014/main" id="{6635AA9B-6826-8D96-D99E-075B71989BAA}"/>
+              </a:ext>
+            </a:extLst>
+          </p:cNvPr>
+          <p:cNvSpPr/>
+          <p:nvPr/>
+        </p:nvSpPr>
+        <p:spPr>
+          <a:xfrm>
+            <a:off x="7154189" y="4513057"/>
+            <a:ext cx="3146791" cy="2223632"/>
+          </a:xfrm>
+          <a:prstGeom prst="rect">
+            <a:avLst/>
+          </a:prstGeom>
+          <a:solidFill>
+            <a:schemeClr val="bg1">
+              <a:lumMod val="95000"/>
+            </a:schemeClr>
+          </a:solidFill>
+          <a:ln>
+            <a:solidFill>
+              <a:schemeClr val="tx1"/>
+            </a:solidFill>
+          </a:ln>
+        </p:spPr>
+        <p:style>
+          <a:lnRef idx="2">
+            <a:schemeClr val="accent1">
+              <a:shade val="15000"/>
+            </a:schemeClr>
+          </a:lnRef>
+          <a:fillRef idx="1">
+            <a:schemeClr val="accent1"/>
+          </a:fillRef>
+          <a:effectRef idx="0">
+            <a:schemeClr val="accent1"/>
+          </a:effectRef>
+          <a:fontRef idx="minor">
+            <a:schemeClr val="lt1"/>
+          </a:fontRef>
+        </p:style>
+        <p:txBody>
+          <a:bodyPr rtlCol="0" anchor="ctr"/>
+          <a:lstStyle/>
+          <a:p>
+            <a:pPr algn="ctr"/>
+            <a:endParaRPr lang="en-US"/>
+          </a:p>
+        </p:txBody>
+      </p:sp>
+      <p:sp>
+        <p:nvSpPr>
+          <p:cNvPr id="22" name="타원 21">
+            <a:extLst>
+              <a:ext uri="{FF2B5EF4-FFF2-40B4-BE49-F238E27FC236}">
+                <a16:creationId xmlns:a16="http://schemas.microsoft.com/office/drawing/2014/main" id="{8E670EC2-401C-E93C-E501-83A28FDE16DE}"/>
+              </a:ext>
+            </a:extLst>
+          </p:cNvPr>
+          <p:cNvSpPr/>
+          <p:nvPr/>
+        </p:nvSpPr>
+        <p:spPr>
+          <a:xfrm>
+            <a:off x="7410781" y="4849402"/>
+            <a:ext cx="1752069" cy="1423818"/>
+          </a:xfrm>
+          <a:prstGeom prst="ellipse">
+            <a:avLst/>
+          </a:prstGeom>
+          <a:solidFill>
+            <a:schemeClr val="accent2">
+              <a:lumMod val="20000"/>
+              <a:lumOff val="80000"/>
+            </a:schemeClr>
+          </a:solidFill>
+          <a:ln w="28575">
+            <a:solidFill>
+              <a:schemeClr val="accent5">
+                <a:lumMod val="50000"/>
+              </a:schemeClr>
+            </a:solidFill>
+          </a:ln>
+        </p:spPr>
+        <p:style>
+          <a:lnRef idx="2">
+            <a:schemeClr val="accent1">
+              <a:shade val="15000"/>
+            </a:schemeClr>
+          </a:lnRef>
+          <a:fillRef idx="1">
+            <a:schemeClr val="accent1"/>
+          </a:fillRef>
+          <a:effectRef idx="0">
+            <a:schemeClr val="accent1"/>
+          </a:effectRef>
+          <a:fontRef idx="minor">
+            <a:schemeClr val="lt1"/>
+          </a:fontRef>
+        </p:style>
+        <p:txBody>
+          <a:bodyPr rtlCol="0" anchor="ctr"/>
+          <a:lstStyle/>
+          <a:p>
+            <a:pPr algn="ctr"/>
+            <a:endParaRPr lang="en-US">
+              <a:solidFill>
+                <a:schemeClr val="accent5">
+                  <a:lumMod val="75000"/>
+                </a:schemeClr>
+              </a:solidFill>
+            </a:endParaRPr>
+          </a:p>
+        </p:txBody>
+      </p:sp>
+      <p:sp>
+        <p:nvSpPr>
+          <p:cNvPr id="24" name="TextBox 23">
+            <a:extLst>
+              <a:ext uri="{FF2B5EF4-FFF2-40B4-BE49-F238E27FC236}">
+                <a16:creationId xmlns:a16="http://schemas.microsoft.com/office/drawing/2014/main" id="{B03E9F84-A299-36CE-433A-9ECA25ED3F4B}"/>
+              </a:ext>
+            </a:extLst>
+          </p:cNvPr>
+          <p:cNvSpPr txBox="1"/>
+          <p:nvPr/>
+        </p:nvSpPr>
+        <p:spPr>
+          <a:xfrm>
+            <a:off x="7151808" y="4514551"/>
+            <a:ext cx="1260159" cy="307777"/>
+          </a:xfrm>
+          <a:prstGeom prst="rect">
+            <a:avLst/>
+          </a:prstGeom>
+          <a:noFill/>
+        </p:spPr>
+        <p:txBody>
+          <a:bodyPr wrap="square" rtlCol="0">
+            <a:spAutoFit/>
+          </a:bodyPr>
+          <a:lstStyle/>
+          <a:p>
+            <a:r>
+              <a:rPr lang="en-US" sz="1400" dirty="0">
+                <a:latin typeface="Georgia" panose="02040502050405020303" pitchFamily="18" charset="0"/>
+              </a:rPr>
+              <a:t>Sample space</a:t>
+            </a:r>
+          </a:p>
+        </p:txBody>
+      </p:sp>
+      <mc:AlternateContent xmlns:mc="http://schemas.openxmlformats.org/markup-compatibility/2006">
+        <mc:Choice xmlns:a14="http://schemas.microsoft.com/office/drawing/2010/main" Requires="a14">
+          <p:sp>
+            <p:nvSpPr>
+              <p:cNvPr id="25" name="TextBox 24">
+                <a:extLst>
+                  <a:ext uri="{FF2B5EF4-FFF2-40B4-BE49-F238E27FC236}">
+                    <a16:creationId xmlns:a16="http://schemas.microsoft.com/office/drawing/2014/main" id="{F4A55DB0-F173-6ED2-B168-3BBCB6C74C54}"/>
+                  </a:ext>
+                </a:extLst>
+              </p:cNvPr>
+              <p:cNvSpPr txBox="1"/>
+              <p:nvPr/>
+            </p:nvSpPr>
+            <p:spPr>
+              <a:xfrm>
+                <a:off x="8356171" y="4529939"/>
+                <a:ext cx="232435" cy="307777"/>
+              </a:xfrm>
+              <a:prstGeom prst="rect">
+                <a:avLst/>
+              </a:prstGeom>
+              <a:noFill/>
+            </p:spPr>
+            <p:txBody>
+              <a:bodyPr wrap="none" lIns="0" tIns="0" rIns="0" bIns="0" rtlCol="0">
+                <a:spAutoFit/>
+              </a:bodyPr>
+              <a:lstStyle/>
+              <a:p>
+                <a:pPr/>
+                <a14:m>
+                  <m:oMathPara xmlns:m="http://schemas.openxmlformats.org/officeDocument/2006/math">
+                    <m:oMathParaPr>
+                      <m:jc m:val="centerGroup"/>
+                    </m:oMathParaPr>
+                    <m:oMath xmlns:m="http://schemas.openxmlformats.org/officeDocument/2006/math">
+                      <m:r>
+                        <m:rPr>
+                          <m:sty m:val="p"/>
+                        </m:rPr>
+                        <a:rPr lang="el-GR" sz="2000" i="1" smtClean="0">
+                          <a:latin typeface="Cambria Math" panose="02040503050406030204" pitchFamily="18" charset="0"/>
+                        </a:rPr>
+                        <m:t>Ω</m:t>
+                      </m:r>
+                    </m:oMath>
+                  </m:oMathPara>
+                </a14:m>
+                <a:endParaRPr lang="en-US" sz="2000" dirty="0"/>
+              </a:p>
+            </p:txBody>
+          </p:sp>
+        </mc:Choice>
+        <mc:Fallback>
+          <p:sp>
+            <p:nvSpPr>
+              <p:cNvPr id="25" name="TextBox 24">
+                <a:extLst>
+                  <a:ext uri="{FF2B5EF4-FFF2-40B4-BE49-F238E27FC236}">
+                    <a16:creationId xmlns:a16="http://schemas.microsoft.com/office/drawing/2014/main" id="{F4A55DB0-F173-6ED2-B168-3BBCB6C74C54}"/>
+                  </a:ext>
+                </a:extLst>
+              </p:cNvPr>
+              <p:cNvSpPr txBox="1">
+                <a:spLocks noRot="1" noChangeAspect="1" noMove="1" noResize="1" noEditPoints="1" noAdjustHandles="1" noChangeArrowheads="1" noChangeShapeType="1" noTextEdit="1"/>
+              </p:cNvSpPr>
+              <p:nvPr/>
+            </p:nvSpPr>
+            <p:spPr>
+              <a:xfrm>
+                <a:off x="8356171" y="4529939"/>
+                <a:ext cx="232435" cy="307777"/>
+              </a:xfrm>
+              <a:prstGeom prst="rect">
+                <a:avLst/>
+              </a:prstGeom>
+              <a:blipFill>
+                <a:blip r:embed="rId31"/>
+                <a:stretch>
+                  <a:fillRect l="-26316" r="-26316" b="-5882"/>
+                </a:stretch>
+              </a:blipFill>
+            </p:spPr>
+            <p:txBody>
+              <a:bodyPr/>
+              <a:lstStyle/>
+              <a:p>
+                <a:r>
+                  <a:rPr lang="en-US">
+                    <a:noFill/>
+                  </a:rPr>
+                  <a:t> </a:t>
+                </a:r>
+              </a:p>
+            </p:txBody>
+          </p:sp>
+        </mc:Fallback>
+      </mc:AlternateContent>
+      <p:sp>
+        <p:nvSpPr>
+          <p:cNvPr id="26" name="타원 25">
+            <a:extLst>
+              <a:ext uri="{FF2B5EF4-FFF2-40B4-BE49-F238E27FC236}">
+                <a16:creationId xmlns:a16="http://schemas.microsoft.com/office/drawing/2014/main" id="{ABE7C06E-48A3-8D36-02B2-D8A1136D6A1A}"/>
+              </a:ext>
+            </a:extLst>
+          </p:cNvPr>
+          <p:cNvSpPr/>
+          <p:nvPr/>
+        </p:nvSpPr>
+        <p:spPr>
+          <a:xfrm>
+            <a:off x="8881762" y="4646644"/>
+            <a:ext cx="1069847" cy="1626576"/>
+          </a:xfrm>
+          <a:prstGeom prst="ellipse">
+            <a:avLst/>
+          </a:prstGeom>
+          <a:solidFill>
+            <a:schemeClr val="accent6">
+              <a:lumMod val="20000"/>
+              <a:lumOff val="80000"/>
+              <a:alpha val="30000"/>
+            </a:schemeClr>
+          </a:solidFill>
+          <a:ln w="28575">
+            <a:solidFill>
+              <a:schemeClr val="accent5">
+                <a:lumMod val="50000"/>
+              </a:schemeClr>
+            </a:solidFill>
+          </a:ln>
+        </p:spPr>
+        <p:style>
+          <a:lnRef idx="2">
+            <a:schemeClr val="accent1">
+              <a:shade val="15000"/>
+            </a:schemeClr>
+          </a:lnRef>
+          <a:fillRef idx="1">
+            <a:schemeClr val="accent1"/>
+          </a:fillRef>
+          <a:effectRef idx="0">
+            <a:schemeClr val="accent1"/>
+          </a:effectRef>
+          <a:fontRef idx="minor">
+            <a:schemeClr val="lt1"/>
+          </a:fontRef>
+        </p:style>
+        <p:txBody>
+          <a:bodyPr rtlCol="0" anchor="ctr"/>
+          <a:lstStyle/>
+          <a:p>
+            <a:pPr algn="ctr"/>
+            <a:endParaRPr lang="en-US">
+              <a:solidFill>
+                <a:srgbClr val="FF0000"/>
+              </a:solidFill>
+            </a:endParaRPr>
+          </a:p>
+        </p:txBody>
+      </p:sp>
+      <mc:AlternateContent xmlns:mc="http://schemas.openxmlformats.org/markup-compatibility/2006">
+        <mc:Choice xmlns:a14="http://schemas.microsoft.com/office/drawing/2010/main" Requires="a14">
+          <p:sp>
+            <p:nvSpPr>
+              <p:cNvPr id="27" name="TextBox 26">
+                <a:extLst>
+                  <a:ext uri="{FF2B5EF4-FFF2-40B4-BE49-F238E27FC236}">
+                    <a16:creationId xmlns:a16="http://schemas.microsoft.com/office/drawing/2014/main" id="{B76655DF-97D9-888B-6116-1FE3ED084B71}"/>
+                  </a:ext>
+                </a:extLst>
+              </p:cNvPr>
+              <p:cNvSpPr txBox="1"/>
+              <p:nvPr/>
+            </p:nvSpPr>
+            <p:spPr>
+              <a:xfrm>
+                <a:off x="8262675" y="5357529"/>
+                <a:ext cx="408284" cy="369332"/>
+              </a:xfrm>
+              <a:prstGeom prst="rect">
+                <a:avLst/>
+              </a:prstGeom>
+              <a:noFill/>
+            </p:spPr>
+            <p:txBody>
+              <a:bodyPr wrap="square" rtlCol="0">
+                <a:spAutoFit/>
+              </a:bodyPr>
+              <a:lstStyle/>
+              <a:p>
+                <a:pPr/>
+                <a14:m>
+                  <m:oMathPara xmlns:m="http://schemas.openxmlformats.org/officeDocument/2006/math">
+                    <m:oMathParaPr>
+                      <m:jc m:val="centerGroup"/>
+                    </m:oMathParaPr>
+                    <m:oMath xmlns:m="http://schemas.openxmlformats.org/officeDocument/2006/math">
+                      <m:r>
+                        <a:rPr lang="en-US" b="0" i="1" dirty="0" smtClean="0">
+                          <a:solidFill>
+                            <a:schemeClr val="accent5">
+                              <a:lumMod val="75000"/>
+                            </a:schemeClr>
+                          </a:solidFill>
+                          <a:latin typeface="Cambria Math" panose="02040503050406030204" pitchFamily="18" charset="0"/>
+                        </a:rPr>
+                        <m:t>𝐴</m:t>
+                      </m:r>
+                    </m:oMath>
+                  </m:oMathPara>
+                </a14:m>
+                <a:endParaRPr lang="en-US" b="0" dirty="0">
+                  <a:solidFill>
+                    <a:schemeClr val="accent5">
+                      <a:lumMod val="75000"/>
+                    </a:schemeClr>
+                  </a:solidFill>
+                </a:endParaRPr>
+              </a:p>
+            </p:txBody>
+          </p:sp>
+        </mc:Choice>
+        <mc:Fallback>
+          <p:sp>
+            <p:nvSpPr>
+              <p:cNvPr id="27" name="TextBox 26">
+                <a:extLst>
+                  <a:ext uri="{FF2B5EF4-FFF2-40B4-BE49-F238E27FC236}">
+                    <a16:creationId xmlns:a16="http://schemas.microsoft.com/office/drawing/2014/main" id="{B76655DF-97D9-888B-6116-1FE3ED084B71}"/>
+                  </a:ext>
+                </a:extLst>
+              </p:cNvPr>
+              <p:cNvSpPr txBox="1">
+                <a:spLocks noRot="1" noChangeAspect="1" noMove="1" noResize="1" noEditPoints="1" noAdjustHandles="1" noChangeArrowheads="1" noChangeShapeType="1" noTextEdit="1"/>
+              </p:cNvSpPr>
+              <p:nvPr/>
+            </p:nvSpPr>
+            <p:spPr>
+              <a:xfrm>
+                <a:off x="8262675" y="5357529"/>
+                <a:ext cx="408284" cy="369332"/>
+              </a:xfrm>
+              <a:prstGeom prst="rect">
+                <a:avLst/>
+              </a:prstGeom>
+              <a:blipFill>
+                <a:blip r:embed="rId32"/>
+                <a:stretch>
+                  <a:fillRect/>
+                </a:stretch>
+              </a:blipFill>
+            </p:spPr>
+            <p:txBody>
+              <a:bodyPr/>
+              <a:lstStyle/>
+              <a:p>
+                <a:r>
+                  <a:rPr lang="en-US">
+                    <a:noFill/>
+                  </a:rPr>
+                  <a:t> </a:t>
+                </a:r>
+              </a:p>
+            </p:txBody>
+          </p:sp>
+        </mc:Fallback>
+      </mc:AlternateContent>
+      <p:sp>
+        <p:nvSpPr>
+          <p:cNvPr id="28" name="TextBox 27">
+            <a:extLst>
+              <a:ext uri="{FF2B5EF4-FFF2-40B4-BE49-F238E27FC236}">
+                <a16:creationId xmlns:a16="http://schemas.microsoft.com/office/drawing/2014/main" id="{8B639727-57DA-A0D5-D253-4DC277828898}"/>
+              </a:ext>
+            </a:extLst>
+          </p:cNvPr>
+          <p:cNvSpPr txBox="1"/>
+          <p:nvPr/>
+        </p:nvSpPr>
+        <p:spPr>
+          <a:xfrm>
+            <a:off x="7808197" y="5395762"/>
+            <a:ext cx="698742" cy="307777"/>
+          </a:xfrm>
+          <a:prstGeom prst="rect">
+            <a:avLst/>
+          </a:prstGeom>
+          <a:noFill/>
+        </p:spPr>
+        <p:txBody>
+          <a:bodyPr wrap="square" rtlCol="0">
+            <a:spAutoFit/>
+          </a:bodyPr>
+          <a:lstStyle/>
+          <a:p>
+            <a:r>
+              <a:rPr lang="en-US" sz="1400" dirty="0">
+                <a:solidFill>
+                  <a:schemeClr val="accent5">
+                    <a:lumMod val="75000"/>
+                  </a:schemeClr>
+                </a:solidFill>
+                <a:latin typeface="Georgia" panose="02040502050405020303" pitchFamily="18" charset="0"/>
+              </a:rPr>
+              <a:t>Event</a:t>
+            </a:r>
+          </a:p>
+        </p:txBody>
+      </p:sp>
+      <mc:AlternateContent xmlns:mc="http://schemas.openxmlformats.org/markup-compatibility/2006">
+        <mc:Choice xmlns:a14="http://schemas.microsoft.com/office/drawing/2010/main" Requires="a14">
+          <p:sp>
+            <p:nvSpPr>
+              <p:cNvPr id="29" name="TextBox 28">
+                <a:extLst>
+                  <a:ext uri="{FF2B5EF4-FFF2-40B4-BE49-F238E27FC236}">
+                    <a16:creationId xmlns:a16="http://schemas.microsoft.com/office/drawing/2014/main" id="{7FA48253-63D3-9E44-FE82-E09F7253F009}"/>
+                  </a:ext>
+                </a:extLst>
+              </p:cNvPr>
+              <p:cNvSpPr txBox="1"/>
+              <p:nvPr/>
+            </p:nvSpPr>
+            <p:spPr>
+              <a:xfrm>
+                <a:off x="9505893" y="4940349"/>
+                <a:ext cx="433239" cy="369332"/>
+              </a:xfrm>
+              <a:prstGeom prst="rect">
+                <a:avLst/>
+              </a:prstGeom>
+              <a:noFill/>
+            </p:spPr>
+            <p:txBody>
+              <a:bodyPr wrap="square" rtlCol="0">
+                <a:spAutoFit/>
+              </a:bodyPr>
+              <a:lstStyle/>
+              <a:p>
+                <a:pPr/>
+                <a14:m>
+                  <m:oMathPara xmlns:m="http://schemas.openxmlformats.org/officeDocument/2006/math">
+                    <m:oMathParaPr>
+                      <m:jc m:val="centerGroup"/>
+                    </m:oMathParaPr>
+                    <m:oMath xmlns:m="http://schemas.openxmlformats.org/officeDocument/2006/math">
+                      <m:r>
+                        <a:rPr lang="en-US" b="0" i="1" dirty="0" smtClean="0">
+                          <a:solidFill>
+                            <a:srgbClr val="FF0000"/>
+                          </a:solidFill>
+                          <a:latin typeface="Cambria Math" panose="02040503050406030204" pitchFamily="18" charset="0"/>
+                        </a:rPr>
+                        <m:t>𝐵</m:t>
+                      </m:r>
+                    </m:oMath>
+                  </m:oMathPara>
+                </a14:m>
+                <a:endParaRPr lang="en-US" b="0" dirty="0">
+                  <a:solidFill>
+                    <a:srgbClr val="FF0000"/>
+                  </a:solidFill>
+                </a:endParaRPr>
+              </a:p>
+            </p:txBody>
+          </p:sp>
+        </mc:Choice>
+        <mc:Fallback>
+          <p:sp>
+            <p:nvSpPr>
+              <p:cNvPr id="29" name="TextBox 28">
+                <a:extLst>
+                  <a:ext uri="{FF2B5EF4-FFF2-40B4-BE49-F238E27FC236}">
+                    <a16:creationId xmlns:a16="http://schemas.microsoft.com/office/drawing/2014/main" id="{7FA48253-63D3-9E44-FE82-E09F7253F009}"/>
+                  </a:ext>
+                </a:extLst>
+              </p:cNvPr>
+              <p:cNvSpPr txBox="1">
+                <a:spLocks noRot="1" noChangeAspect="1" noMove="1" noResize="1" noEditPoints="1" noAdjustHandles="1" noChangeArrowheads="1" noChangeShapeType="1" noTextEdit="1"/>
+              </p:cNvSpPr>
+              <p:nvPr/>
+            </p:nvSpPr>
+            <p:spPr>
+              <a:xfrm>
+                <a:off x="9505893" y="4940349"/>
+                <a:ext cx="433239" cy="369332"/>
+              </a:xfrm>
+              <a:prstGeom prst="rect">
+                <a:avLst/>
+              </a:prstGeom>
+              <a:blipFill>
+                <a:blip r:embed="rId33"/>
+                <a:stretch>
+                  <a:fillRect/>
+                </a:stretch>
+              </a:blipFill>
+            </p:spPr>
+            <p:txBody>
+              <a:bodyPr/>
+              <a:lstStyle/>
+              <a:p>
+                <a:r>
+                  <a:rPr lang="en-US">
+                    <a:noFill/>
+                  </a:rPr>
+                  <a:t> </a:t>
+                </a:r>
+              </a:p>
+            </p:txBody>
+          </p:sp>
+        </mc:Fallback>
+      </mc:AlternateContent>
+      <p:sp>
+        <p:nvSpPr>
+          <p:cNvPr id="30" name="TextBox 29">
+            <a:extLst>
+              <a:ext uri="{FF2B5EF4-FFF2-40B4-BE49-F238E27FC236}">
+                <a16:creationId xmlns:a16="http://schemas.microsoft.com/office/drawing/2014/main" id="{42753370-89CE-D9D7-9C68-7AE6BF72E768}"/>
+              </a:ext>
+            </a:extLst>
+          </p:cNvPr>
+          <p:cNvSpPr txBox="1"/>
+          <p:nvPr/>
+        </p:nvSpPr>
+        <p:spPr>
+          <a:xfrm>
+            <a:off x="9051415" y="4978582"/>
+            <a:ext cx="698742" cy="307777"/>
+          </a:xfrm>
+          <a:prstGeom prst="rect">
+            <a:avLst/>
+          </a:prstGeom>
+          <a:noFill/>
+        </p:spPr>
+        <p:txBody>
+          <a:bodyPr wrap="square" rtlCol="0">
+            <a:spAutoFit/>
+          </a:bodyPr>
+          <a:lstStyle/>
+          <a:p>
+            <a:r>
+              <a:rPr lang="en-US" sz="1400" dirty="0">
+                <a:solidFill>
+                  <a:srgbClr val="FF0000"/>
+                </a:solidFill>
+                <a:latin typeface="Georgia" panose="02040502050405020303" pitchFamily="18" charset="0"/>
+              </a:rPr>
+              <a:t>Event</a:t>
+            </a:r>
+          </a:p>
+        </p:txBody>
+      </p:sp>
+      <p:sp>
+        <p:nvSpPr>
+          <p:cNvPr id="31" name="직사각형 30">
+            <a:extLst>
+              <a:ext uri="{FF2B5EF4-FFF2-40B4-BE49-F238E27FC236}">
+                <a16:creationId xmlns:a16="http://schemas.microsoft.com/office/drawing/2014/main" id="{B886C392-34D8-F773-7930-6A106C27F2C6}"/>
+              </a:ext>
+            </a:extLst>
+          </p:cNvPr>
+          <p:cNvSpPr/>
+          <p:nvPr/>
+        </p:nvSpPr>
+        <p:spPr>
+          <a:xfrm>
+            <a:off x="7423602" y="6092648"/>
+            <a:ext cx="2561966" cy="546359"/>
+          </a:xfrm>
+          <a:prstGeom prst="rect">
+            <a:avLst/>
+          </a:prstGeom>
+          <a:solidFill>
+            <a:schemeClr val="accent4">
+              <a:lumMod val="20000"/>
+              <a:lumOff val="80000"/>
+              <a:alpha val="50000"/>
+            </a:schemeClr>
+          </a:solidFill>
+          <a:ln>
+            <a:solidFill>
+              <a:schemeClr val="tx1"/>
+            </a:solidFill>
+          </a:ln>
+        </p:spPr>
+        <p:style>
+          <a:lnRef idx="2">
+            <a:schemeClr val="accent1">
+              <a:shade val="15000"/>
+            </a:schemeClr>
+          </a:lnRef>
+          <a:fillRef idx="1">
+            <a:schemeClr val="accent1"/>
+          </a:fillRef>
+          <a:effectRef idx="0">
+            <a:schemeClr val="accent1"/>
+          </a:effectRef>
+          <a:fontRef idx="minor">
+            <a:schemeClr val="lt1"/>
+          </a:fontRef>
+        </p:style>
+        <p:txBody>
+          <a:bodyPr rtlCol="0" anchor="ctr"/>
+          <a:lstStyle/>
+          <a:p>
+            <a:pPr algn="ctr"/>
+            <a:endParaRPr lang="en-US"/>
+          </a:p>
+        </p:txBody>
+      </p:sp>
+      <mc:AlternateContent xmlns:mc="http://schemas.openxmlformats.org/markup-compatibility/2006">
+        <mc:Choice xmlns:a14="http://schemas.microsoft.com/office/drawing/2010/main" Requires="a14">
+          <p:sp>
+            <p:nvSpPr>
+              <p:cNvPr id="32" name="TextBox 31">
+                <a:extLst>
+                  <a:ext uri="{FF2B5EF4-FFF2-40B4-BE49-F238E27FC236}">
+                    <a16:creationId xmlns:a16="http://schemas.microsoft.com/office/drawing/2014/main" id="{94301D80-60EB-1A4F-88FB-6EDAABFEE6F4}"/>
+                  </a:ext>
+                </a:extLst>
+              </p:cNvPr>
+              <p:cNvSpPr txBox="1"/>
+              <p:nvPr/>
+            </p:nvSpPr>
+            <p:spPr>
+              <a:xfrm>
+                <a:off x="8766716" y="6236481"/>
+                <a:ext cx="433239" cy="369332"/>
+              </a:xfrm>
+              <a:prstGeom prst="rect">
+                <a:avLst/>
+              </a:prstGeom>
+              <a:noFill/>
+            </p:spPr>
+            <p:txBody>
+              <a:bodyPr wrap="square" rtlCol="0">
+                <a:spAutoFit/>
+              </a:bodyPr>
+              <a:lstStyle/>
+              <a:p>
+                <a:pPr/>
+                <a14:m>
+                  <m:oMathPara xmlns:m="http://schemas.openxmlformats.org/officeDocument/2006/math">
+                    <m:oMathParaPr>
+                      <m:jc m:val="centerGroup"/>
+                    </m:oMathParaPr>
+                    <m:oMath xmlns:m="http://schemas.openxmlformats.org/officeDocument/2006/math">
+                      <m:r>
+                        <a:rPr lang="en-US" b="0" i="1" dirty="0" smtClean="0">
+                          <a:solidFill>
+                            <a:schemeClr val="accent4">
+                              <a:lumMod val="50000"/>
+                            </a:schemeClr>
+                          </a:solidFill>
+                          <a:latin typeface="Cambria Math" panose="02040503050406030204" pitchFamily="18" charset="0"/>
+                        </a:rPr>
+                        <m:t>𝐶</m:t>
+                      </m:r>
+                    </m:oMath>
+                  </m:oMathPara>
+                </a14:m>
+                <a:endParaRPr lang="en-US" b="0" dirty="0">
+                  <a:solidFill>
+                    <a:schemeClr val="accent4">
+                      <a:lumMod val="50000"/>
+                    </a:schemeClr>
+                  </a:solidFill>
+                </a:endParaRPr>
+              </a:p>
+            </p:txBody>
+          </p:sp>
+        </mc:Choice>
+        <mc:Fallback>
+          <p:sp>
+            <p:nvSpPr>
+              <p:cNvPr id="32" name="TextBox 31">
+                <a:extLst>
+                  <a:ext uri="{FF2B5EF4-FFF2-40B4-BE49-F238E27FC236}">
+                    <a16:creationId xmlns:a16="http://schemas.microsoft.com/office/drawing/2014/main" id="{94301D80-60EB-1A4F-88FB-6EDAABFEE6F4}"/>
+                  </a:ext>
+                </a:extLst>
+              </p:cNvPr>
+              <p:cNvSpPr txBox="1">
+                <a:spLocks noRot="1" noChangeAspect="1" noMove="1" noResize="1" noEditPoints="1" noAdjustHandles="1" noChangeArrowheads="1" noChangeShapeType="1" noTextEdit="1"/>
+              </p:cNvSpPr>
+              <p:nvPr/>
+            </p:nvSpPr>
+            <p:spPr>
+              <a:xfrm>
+                <a:off x="8766716" y="6236481"/>
+                <a:ext cx="433239" cy="369332"/>
+              </a:xfrm>
+              <a:prstGeom prst="rect">
+                <a:avLst/>
+              </a:prstGeom>
+              <a:blipFill>
+                <a:blip r:embed="rId34"/>
+                <a:stretch>
+                  <a:fillRect/>
+                </a:stretch>
+              </a:blipFill>
+            </p:spPr>
+            <p:txBody>
+              <a:bodyPr/>
+              <a:lstStyle/>
+              <a:p>
+                <a:r>
+                  <a:rPr lang="en-US">
+                    <a:noFill/>
+                  </a:rPr>
+                  <a:t> </a:t>
+                </a:r>
+              </a:p>
+            </p:txBody>
+          </p:sp>
+        </mc:Fallback>
+      </mc:AlternateContent>
+      <p:sp>
+        <p:nvSpPr>
+          <p:cNvPr id="33" name="TextBox 32">
+            <a:extLst>
+              <a:ext uri="{FF2B5EF4-FFF2-40B4-BE49-F238E27FC236}">
+                <a16:creationId xmlns:a16="http://schemas.microsoft.com/office/drawing/2014/main" id="{6DBF2867-58DB-C451-0B78-B0A3FE6F071C}"/>
+              </a:ext>
+            </a:extLst>
+          </p:cNvPr>
+          <p:cNvSpPr txBox="1"/>
+          <p:nvPr/>
+        </p:nvSpPr>
+        <p:spPr>
+          <a:xfrm>
+            <a:off x="8312238" y="6274714"/>
+            <a:ext cx="698742" cy="307777"/>
+          </a:xfrm>
+          <a:prstGeom prst="rect">
+            <a:avLst/>
+          </a:prstGeom>
+          <a:noFill/>
+        </p:spPr>
+        <p:txBody>
+          <a:bodyPr wrap="square" rtlCol="0">
+            <a:spAutoFit/>
+          </a:bodyPr>
+          <a:lstStyle/>
+          <a:p>
+            <a:r>
+              <a:rPr lang="en-US" sz="1400" dirty="0">
+                <a:solidFill>
+                  <a:schemeClr val="accent4">
+                    <a:lumMod val="50000"/>
+                  </a:schemeClr>
+                </a:solidFill>
+                <a:latin typeface="Georgia" panose="02040502050405020303" pitchFamily="18" charset="0"/>
+              </a:rPr>
+              <a:t>Event</a:t>
+            </a:r>
+          </a:p>
+        </p:txBody>
+      </p:sp>
     </p:spTree>
     <p:extLst>
       <p:ext uri="{BB962C8B-B14F-4D97-AF65-F5344CB8AC3E}">
         <p14:creationId xmlns:p14="http://schemas.microsoft.com/office/powerpoint/2010/main" val="2621613359"/>
+      </p:ext>
+    </p:extLst>
+  </p:cSld>
+  <p:clrMapOvr>
+    <a:masterClrMapping/>
+  </p:clrMapOvr>
+</p:sld>
+</file>
+
+<file path=ppt/slides/slide6.xml><?xml version="1.0" encoding="utf-8"?>
+<p:sld xmlns:a="http://schemas.openxmlformats.org/drawingml/2006/main" xmlns:r="http://schemas.openxmlformats.org/officeDocument/2006/relationships" xmlns:p="http://schemas.openxmlformats.org/presentationml/2006/main">
+  <p:cSld>
+    <p:spTree>
+      <p:nvGrpSpPr>
+        <p:cNvPr id="1" name="">
+          <a:extLst>
+            <a:ext uri="{FF2B5EF4-FFF2-40B4-BE49-F238E27FC236}">
+              <a16:creationId xmlns:a16="http://schemas.microsoft.com/office/drawing/2014/main" id="{CD4F64D5-44A7-3952-E6DF-E9C670DCE604}"/>
+            </a:ext>
+          </a:extLst>
+        </p:cNvPr>
+        <p:cNvGrpSpPr/>
+        <p:nvPr/>
+      </p:nvGrpSpPr>
+      <p:grpSpPr>
+        <a:xfrm>
+          <a:off x="0" y="0"/>
+          <a:ext cx="0" cy="0"/>
+          <a:chOff x="0" y="0"/>
+          <a:chExt cx="0" cy="0"/>
+        </a:xfrm>
+      </p:grpSpPr>
+      <p:cxnSp>
+        <p:nvCxnSpPr>
+          <p:cNvPr id="3" name="직선 화살표 연결선 2">
+            <a:extLst>
+              <a:ext uri="{FF2B5EF4-FFF2-40B4-BE49-F238E27FC236}">
+                <a16:creationId xmlns:a16="http://schemas.microsoft.com/office/drawing/2014/main" id="{D6C79140-2FBE-9042-C596-35696DFA908D}"/>
+              </a:ext>
+            </a:extLst>
+          </p:cNvPr>
+          <p:cNvCxnSpPr>
+            <a:cxnSpLocks/>
+          </p:cNvCxnSpPr>
+          <p:nvPr/>
+        </p:nvCxnSpPr>
+        <p:spPr>
+          <a:xfrm flipV="1">
+            <a:off x="4502022" y="2304223"/>
+            <a:ext cx="709126" cy="933061"/>
+          </a:xfrm>
+          <a:prstGeom prst="straightConnector1">
+            <a:avLst/>
+          </a:prstGeom>
+          <a:ln w="19050">
+            <a:solidFill>
+              <a:schemeClr val="tx1"/>
+            </a:solidFill>
+            <a:tailEnd type="triangle"/>
+          </a:ln>
+        </p:spPr>
+        <p:style>
+          <a:lnRef idx="1">
+            <a:schemeClr val="accent1"/>
+          </a:lnRef>
+          <a:fillRef idx="0">
+            <a:schemeClr val="accent1"/>
+          </a:fillRef>
+          <a:effectRef idx="0">
+            <a:schemeClr val="accent1"/>
+          </a:effectRef>
+          <a:fontRef idx="minor">
+            <a:schemeClr val="tx1"/>
+          </a:fontRef>
+        </p:style>
+      </p:cxnSp>
+      <p:cxnSp>
+        <p:nvCxnSpPr>
+          <p:cNvPr id="4" name="직선 화살표 연결선 3">
+            <a:extLst>
+              <a:ext uri="{FF2B5EF4-FFF2-40B4-BE49-F238E27FC236}">
+                <a16:creationId xmlns:a16="http://schemas.microsoft.com/office/drawing/2014/main" id="{799868BB-D53A-F0F8-3BEA-9C154A36F1C5}"/>
+              </a:ext>
+            </a:extLst>
+          </p:cNvPr>
+          <p:cNvCxnSpPr>
+            <a:cxnSpLocks/>
+          </p:cNvCxnSpPr>
+          <p:nvPr/>
+        </p:nvCxnSpPr>
+        <p:spPr>
+          <a:xfrm flipV="1">
+            <a:off x="5211148" y="1828362"/>
+            <a:ext cx="1222310" cy="475861"/>
+          </a:xfrm>
+          <a:prstGeom prst="straightConnector1">
+            <a:avLst/>
+          </a:prstGeom>
+          <a:ln w="19050">
+            <a:solidFill>
+              <a:schemeClr val="tx1"/>
+            </a:solidFill>
+            <a:tailEnd type="triangle"/>
+          </a:ln>
+        </p:spPr>
+        <p:style>
+          <a:lnRef idx="1">
+            <a:schemeClr val="accent1"/>
+          </a:lnRef>
+          <a:fillRef idx="0">
+            <a:schemeClr val="accent1"/>
+          </a:fillRef>
+          <a:effectRef idx="0">
+            <a:schemeClr val="accent1"/>
+          </a:effectRef>
+          <a:fontRef idx="minor">
+            <a:schemeClr val="tx1"/>
+          </a:fontRef>
+        </p:style>
+      </p:cxnSp>
+      <p:cxnSp>
+        <p:nvCxnSpPr>
+          <p:cNvPr id="5" name="직선 화살표 연결선 4">
+            <a:extLst>
+              <a:ext uri="{FF2B5EF4-FFF2-40B4-BE49-F238E27FC236}">
+                <a16:creationId xmlns:a16="http://schemas.microsoft.com/office/drawing/2014/main" id="{4F6D3377-CB74-000E-F25B-265BE01CBCA4}"/>
+              </a:ext>
+            </a:extLst>
+          </p:cNvPr>
+          <p:cNvCxnSpPr>
+            <a:cxnSpLocks/>
+          </p:cNvCxnSpPr>
+          <p:nvPr/>
+        </p:nvCxnSpPr>
+        <p:spPr>
+          <a:xfrm flipV="1">
+            <a:off x="6433458" y="1511121"/>
+            <a:ext cx="1343609" cy="317241"/>
+          </a:xfrm>
+          <a:prstGeom prst="straightConnector1">
+            <a:avLst/>
+          </a:prstGeom>
+          <a:ln w="19050">
+            <a:solidFill>
+              <a:schemeClr val="tx1"/>
+            </a:solidFill>
+            <a:tailEnd type="triangle"/>
+          </a:ln>
+        </p:spPr>
+        <p:style>
+          <a:lnRef idx="1">
+            <a:schemeClr val="accent1"/>
+          </a:lnRef>
+          <a:fillRef idx="0">
+            <a:schemeClr val="accent1"/>
+          </a:fillRef>
+          <a:effectRef idx="0">
+            <a:schemeClr val="accent1"/>
+          </a:effectRef>
+          <a:fontRef idx="minor">
+            <a:schemeClr val="tx1"/>
+          </a:fontRef>
+        </p:style>
+      </p:cxnSp>
+      <p:cxnSp>
+        <p:nvCxnSpPr>
+          <p:cNvPr id="6" name="직선 화살표 연결선 5">
+            <a:extLst>
+              <a:ext uri="{FF2B5EF4-FFF2-40B4-BE49-F238E27FC236}">
+                <a16:creationId xmlns:a16="http://schemas.microsoft.com/office/drawing/2014/main" id="{28B0FBD9-FEC4-2C68-6A23-E198922D82C7}"/>
+              </a:ext>
+            </a:extLst>
+          </p:cNvPr>
+          <p:cNvCxnSpPr>
+            <a:cxnSpLocks/>
+          </p:cNvCxnSpPr>
+          <p:nvPr/>
+        </p:nvCxnSpPr>
+        <p:spPr>
+          <a:xfrm>
+            <a:off x="6396137" y="1828362"/>
+            <a:ext cx="1352935" cy="167950"/>
+          </a:xfrm>
+          <a:prstGeom prst="straightConnector1">
+            <a:avLst/>
+          </a:prstGeom>
+          <a:ln w="19050">
+            <a:solidFill>
+              <a:schemeClr val="tx1"/>
+            </a:solidFill>
+            <a:tailEnd type="triangle"/>
+          </a:ln>
+        </p:spPr>
+        <p:style>
+          <a:lnRef idx="1">
+            <a:schemeClr val="accent1"/>
+          </a:lnRef>
+          <a:fillRef idx="0">
+            <a:schemeClr val="accent1"/>
+          </a:fillRef>
+          <a:effectRef idx="0">
+            <a:schemeClr val="accent1"/>
+          </a:effectRef>
+          <a:fontRef idx="minor">
+            <a:schemeClr val="tx1"/>
+          </a:fontRef>
+        </p:style>
+      </p:cxnSp>
+      <p:cxnSp>
+        <p:nvCxnSpPr>
+          <p:cNvPr id="7" name="직선 화살표 연결선 6">
+            <a:extLst>
+              <a:ext uri="{FF2B5EF4-FFF2-40B4-BE49-F238E27FC236}">
+                <a16:creationId xmlns:a16="http://schemas.microsoft.com/office/drawing/2014/main" id="{D19FA5E1-6D06-CA05-603D-85E924C8C0C4}"/>
+              </a:ext>
+            </a:extLst>
+          </p:cNvPr>
+          <p:cNvCxnSpPr>
+            <a:cxnSpLocks/>
+          </p:cNvCxnSpPr>
+          <p:nvPr/>
+        </p:nvCxnSpPr>
+        <p:spPr>
+          <a:xfrm>
+            <a:off x="5211148" y="2304223"/>
+            <a:ext cx="1184989" cy="475861"/>
+          </a:xfrm>
+          <a:prstGeom prst="straightConnector1">
+            <a:avLst/>
+          </a:prstGeom>
+          <a:ln w="19050">
+            <a:solidFill>
+              <a:schemeClr val="tx1"/>
+            </a:solidFill>
+            <a:tailEnd type="triangle"/>
+          </a:ln>
+        </p:spPr>
+        <p:style>
+          <a:lnRef idx="1">
+            <a:schemeClr val="accent1"/>
+          </a:lnRef>
+          <a:fillRef idx="0">
+            <a:schemeClr val="accent1"/>
+          </a:fillRef>
+          <a:effectRef idx="0">
+            <a:schemeClr val="accent1"/>
+          </a:effectRef>
+          <a:fontRef idx="minor">
+            <a:schemeClr val="tx1"/>
+          </a:fontRef>
+        </p:style>
+      </p:cxnSp>
+      <p:cxnSp>
+        <p:nvCxnSpPr>
+          <p:cNvPr id="8" name="직선 화살표 연결선 7">
+            <a:extLst>
+              <a:ext uri="{FF2B5EF4-FFF2-40B4-BE49-F238E27FC236}">
+                <a16:creationId xmlns:a16="http://schemas.microsoft.com/office/drawing/2014/main" id="{93E93096-40F1-0839-3AA2-FD01AD66B0E9}"/>
+              </a:ext>
+            </a:extLst>
+          </p:cNvPr>
+          <p:cNvCxnSpPr>
+            <a:cxnSpLocks/>
+          </p:cNvCxnSpPr>
+          <p:nvPr/>
+        </p:nvCxnSpPr>
+        <p:spPr>
+          <a:xfrm flipV="1">
+            <a:off x="6433458" y="2588787"/>
+            <a:ext cx="1306288" cy="181967"/>
+          </a:xfrm>
+          <a:prstGeom prst="straightConnector1">
+            <a:avLst/>
+          </a:prstGeom>
+          <a:ln w="19050">
+            <a:solidFill>
+              <a:schemeClr val="tx1"/>
+            </a:solidFill>
+            <a:tailEnd type="triangle"/>
+          </a:ln>
+        </p:spPr>
+        <p:style>
+          <a:lnRef idx="1">
+            <a:schemeClr val="accent1"/>
+          </a:lnRef>
+          <a:fillRef idx="0">
+            <a:schemeClr val="accent1"/>
+          </a:fillRef>
+          <a:effectRef idx="0">
+            <a:schemeClr val="accent1"/>
+          </a:effectRef>
+          <a:fontRef idx="minor">
+            <a:schemeClr val="tx1"/>
+          </a:fontRef>
+        </p:style>
+      </p:cxnSp>
+      <p:cxnSp>
+        <p:nvCxnSpPr>
+          <p:cNvPr id="9" name="직선 화살표 연결선 8">
+            <a:extLst>
+              <a:ext uri="{FF2B5EF4-FFF2-40B4-BE49-F238E27FC236}">
+                <a16:creationId xmlns:a16="http://schemas.microsoft.com/office/drawing/2014/main" id="{011E77CF-0311-BC4E-4B77-D5C298FB042B}"/>
+              </a:ext>
+            </a:extLst>
+          </p:cNvPr>
+          <p:cNvCxnSpPr>
+            <a:cxnSpLocks/>
+          </p:cNvCxnSpPr>
+          <p:nvPr/>
+        </p:nvCxnSpPr>
+        <p:spPr>
+          <a:xfrm>
+            <a:off x="6396137" y="2770754"/>
+            <a:ext cx="1380930" cy="317241"/>
+          </a:xfrm>
+          <a:prstGeom prst="straightConnector1">
+            <a:avLst/>
+          </a:prstGeom>
+          <a:ln w="19050">
+            <a:solidFill>
+              <a:schemeClr val="tx1"/>
+            </a:solidFill>
+            <a:tailEnd type="triangle"/>
+          </a:ln>
+        </p:spPr>
+        <p:style>
+          <a:lnRef idx="1">
+            <a:schemeClr val="accent1"/>
+          </a:lnRef>
+          <a:fillRef idx="0">
+            <a:schemeClr val="accent1"/>
+          </a:fillRef>
+          <a:effectRef idx="0">
+            <a:schemeClr val="accent1"/>
+          </a:effectRef>
+          <a:fontRef idx="minor">
+            <a:schemeClr val="tx1"/>
+          </a:fontRef>
+        </p:style>
+      </p:cxnSp>
+      <p:cxnSp>
+        <p:nvCxnSpPr>
+          <p:cNvPr id="10" name="직선 화살표 연결선 9">
+            <a:extLst>
+              <a:ext uri="{FF2B5EF4-FFF2-40B4-BE49-F238E27FC236}">
+                <a16:creationId xmlns:a16="http://schemas.microsoft.com/office/drawing/2014/main" id="{FF72AADB-A3B2-B22C-601C-45EE03EFAAB0}"/>
+              </a:ext>
+            </a:extLst>
+          </p:cNvPr>
+          <p:cNvCxnSpPr>
+            <a:cxnSpLocks/>
+          </p:cNvCxnSpPr>
+          <p:nvPr/>
+        </p:nvCxnSpPr>
+        <p:spPr>
+          <a:xfrm>
+            <a:off x="4502022" y="3237284"/>
+            <a:ext cx="709126" cy="1026367"/>
+          </a:xfrm>
+          <a:prstGeom prst="straightConnector1">
+            <a:avLst/>
+          </a:prstGeom>
+          <a:ln w="19050">
+            <a:solidFill>
+              <a:schemeClr val="tx1"/>
+            </a:solidFill>
+            <a:tailEnd type="triangle"/>
+          </a:ln>
+        </p:spPr>
+        <p:style>
+          <a:lnRef idx="1">
+            <a:schemeClr val="accent1"/>
+          </a:lnRef>
+          <a:fillRef idx="0">
+            <a:schemeClr val="accent1"/>
+          </a:fillRef>
+          <a:effectRef idx="0">
+            <a:schemeClr val="accent1"/>
+          </a:effectRef>
+          <a:fontRef idx="minor">
+            <a:schemeClr val="tx1"/>
+          </a:fontRef>
+        </p:style>
+      </p:cxnSp>
+      <p:cxnSp>
+        <p:nvCxnSpPr>
+          <p:cNvPr id="11" name="직선 화살표 연결선 10">
+            <a:extLst>
+              <a:ext uri="{FF2B5EF4-FFF2-40B4-BE49-F238E27FC236}">
+                <a16:creationId xmlns:a16="http://schemas.microsoft.com/office/drawing/2014/main" id="{8E8A13C8-2263-FE9C-8097-FEE3CAC0D29C}"/>
+              </a:ext>
+            </a:extLst>
+          </p:cNvPr>
+          <p:cNvCxnSpPr>
+            <a:cxnSpLocks/>
+          </p:cNvCxnSpPr>
+          <p:nvPr/>
+        </p:nvCxnSpPr>
+        <p:spPr>
+          <a:xfrm flipV="1">
+            <a:off x="5211148" y="3778459"/>
+            <a:ext cx="1222310" cy="475861"/>
+          </a:xfrm>
+          <a:prstGeom prst="straightConnector1">
+            <a:avLst/>
+          </a:prstGeom>
+          <a:ln w="19050">
+            <a:solidFill>
+              <a:schemeClr val="tx1"/>
+            </a:solidFill>
+            <a:tailEnd type="triangle"/>
+          </a:ln>
+        </p:spPr>
+        <p:style>
+          <a:lnRef idx="1">
+            <a:schemeClr val="accent1"/>
+          </a:lnRef>
+          <a:fillRef idx="0">
+            <a:schemeClr val="accent1"/>
+          </a:fillRef>
+          <a:effectRef idx="0">
+            <a:schemeClr val="accent1"/>
+          </a:effectRef>
+          <a:fontRef idx="minor">
+            <a:schemeClr val="tx1"/>
+          </a:fontRef>
+        </p:style>
+      </p:cxnSp>
+      <p:cxnSp>
+        <p:nvCxnSpPr>
+          <p:cNvPr id="12" name="직선 화살표 연결선 11">
+            <a:extLst>
+              <a:ext uri="{FF2B5EF4-FFF2-40B4-BE49-F238E27FC236}">
+                <a16:creationId xmlns:a16="http://schemas.microsoft.com/office/drawing/2014/main" id="{4573CB15-8FD6-942F-0B86-C1EE75767D9C}"/>
+              </a:ext>
+            </a:extLst>
+          </p:cNvPr>
+          <p:cNvCxnSpPr>
+            <a:cxnSpLocks/>
+          </p:cNvCxnSpPr>
+          <p:nvPr/>
+        </p:nvCxnSpPr>
+        <p:spPr>
+          <a:xfrm flipV="1">
+            <a:off x="6433458" y="3461218"/>
+            <a:ext cx="1343609" cy="317241"/>
+          </a:xfrm>
+          <a:prstGeom prst="straightConnector1">
+            <a:avLst/>
+          </a:prstGeom>
+          <a:ln w="19050">
+            <a:solidFill>
+              <a:schemeClr val="tx1"/>
+            </a:solidFill>
+            <a:tailEnd type="triangle"/>
+          </a:ln>
+        </p:spPr>
+        <p:style>
+          <a:lnRef idx="1">
+            <a:schemeClr val="accent1"/>
+          </a:lnRef>
+          <a:fillRef idx="0">
+            <a:schemeClr val="accent1"/>
+          </a:fillRef>
+          <a:effectRef idx="0">
+            <a:schemeClr val="accent1"/>
+          </a:effectRef>
+          <a:fontRef idx="minor">
+            <a:schemeClr val="tx1"/>
+          </a:fontRef>
+        </p:style>
+      </p:cxnSp>
+      <p:cxnSp>
+        <p:nvCxnSpPr>
+          <p:cNvPr id="13" name="직선 화살표 연결선 12">
+            <a:extLst>
+              <a:ext uri="{FF2B5EF4-FFF2-40B4-BE49-F238E27FC236}">
+                <a16:creationId xmlns:a16="http://schemas.microsoft.com/office/drawing/2014/main" id="{654043E6-732D-2528-28F0-6DBD8CD67C1A}"/>
+              </a:ext>
+            </a:extLst>
+          </p:cNvPr>
+          <p:cNvCxnSpPr>
+            <a:cxnSpLocks/>
+          </p:cNvCxnSpPr>
+          <p:nvPr/>
+        </p:nvCxnSpPr>
+        <p:spPr>
+          <a:xfrm>
+            <a:off x="6396137" y="3778459"/>
+            <a:ext cx="1380930" cy="237167"/>
+          </a:xfrm>
+          <a:prstGeom prst="straightConnector1">
+            <a:avLst/>
+          </a:prstGeom>
+          <a:ln w="19050">
+            <a:solidFill>
+              <a:schemeClr val="tx1"/>
+            </a:solidFill>
+            <a:tailEnd type="triangle"/>
+          </a:ln>
+        </p:spPr>
+        <p:style>
+          <a:lnRef idx="1">
+            <a:schemeClr val="accent1"/>
+          </a:lnRef>
+          <a:fillRef idx="0">
+            <a:schemeClr val="accent1"/>
+          </a:fillRef>
+          <a:effectRef idx="0">
+            <a:schemeClr val="accent1"/>
+          </a:effectRef>
+          <a:fontRef idx="minor">
+            <a:schemeClr val="tx1"/>
+          </a:fontRef>
+        </p:style>
+      </p:cxnSp>
+      <p:cxnSp>
+        <p:nvCxnSpPr>
+          <p:cNvPr id="14" name="직선 화살표 연결선 13">
+            <a:extLst>
+              <a:ext uri="{FF2B5EF4-FFF2-40B4-BE49-F238E27FC236}">
+                <a16:creationId xmlns:a16="http://schemas.microsoft.com/office/drawing/2014/main" id="{E10A38BF-F9E1-C06C-05FE-4749629AE329}"/>
+              </a:ext>
+            </a:extLst>
+          </p:cNvPr>
+          <p:cNvCxnSpPr>
+            <a:cxnSpLocks/>
+          </p:cNvCxnSpPr>
+          <p:nvPr/>
+        </p:nvCxnSpPr>
+        <p:spPr>
+          <a:xfrm>
+            <a:off x="5211148" y="4254320"/>
+            <a:ext cx="1184989" cy="475861"/>
+          </a:xfrm>
+          <a:prstGeom prst="straightConnector1">
+            <a:avLst/>
+          </a:prstGeom>
+          <a:ln w="19050">
+            <a:solidFill>
+              <a:schemeClr val="tx1"/>
+            </a:solidFill>
+            <a:tailEnd type="triangle"/>
+          </a:ln>
+        </p:spPr>
+        <p:style>
+          <a:lnRef idx="1">
+            <a:schemeClr val="accent1"/>
+          </a:lnRef>
+          <a:fillRef idx="0">
+            <a:schemeClr val="accent1"/>
+          </a:fillRef>
+          <a:effectRef idx="0">
+            <a:schemeClr val="accent1"/>
+          </a:effectRef>
+          <a:fontRef idx="minor">
+            <a:schemeClr val="tx1"/>
+          </a:fontRef>
+        </p:style>
+      </p:cxnSp>
+      <p:cxnSp>
+        <p:nvCxnSpPr>
+          <p:cNvPr id="15" name="직선 화살표 연결선 14">
+            <a:extLst>
+              <a:ext uri="{FF2B5EF4-FFF2-40B4-BE49-F238E27FC236}">
+                <a16:creationId xmlns:a16="http://schemas.microsoft.com/office/drawing/2014/main" id="{AB316449-4740-D647-4273-68C4C8873875}"/>
+              </a:ext>
+            </a:extLst>
+          </p:cNvPr>
+          <p:cNvCxnSpPr>
+            <a:cxnSpLocks/>
+          </p:cNvCxnSpPr>
+          <p:nvPr/>
+        </p:nvCxnSpPr>
+        <p:spPr>
+          <a:xfrm flipV="1">
+            <a:off x="6433458" y="4571561"/>
+            <a:ext cx="1343609" cy="149290"/>
+          </a:xfrm>
+          <a:prstGeom prst="straightConnector1">
+            <a:avLst/>
+          </a:prstGeom>
+          <a:ln w="19050">
+            <a:solidFill>
+              <a:schemeClr val="tx1"/>
+            </a:solidFill>
+            <a:tailEnd type="triangle"/>
+          </a:ln>
+        </p:spPr>
+        <p:style>
+          <a:lnRef idx="1">
+            <a:schemeClr val="accent1"/>
+          </a:lnRef>
+          <a:fillRef idx="0">
+            <a:schemeClr val="accent1"/>
+          </a:fillRef>
+          <a:effectRef idx="0">
+            <a:schemeClr val="accent1"/>
+          </a:effectRef>
+          <a:fontRef idx="minor">
+            <a:schemeClr val="tx1"/>
+          </a:fontRef>
+        </p:style>
+      </p:cxnSp>
+      <p:cxnSp>
+        <p:nvCxnSpPr>
+          <p:cNvPr id="16" name="직선 화살표 연결선 15">
+            <a:extLst>
+              <a:ext uri="{FF2B5EF4-FFF2-40B4-BE49-F238E27FC236}">
+                <a16:creationId xmlns:a16="http://schemas.microsoft.com/office/drawing/2014/main" id="{7CD8FED7-9E26-366C-A0B8-E561F85F9DFE}"/>
+              </a:ext>
+            </a:extLst>
+          </p:cNvPr>
+          <p:cNvCxnSpPr>
+            <a:cxnSpLocks/>
+          </p:cNvCxnSpPr>
+          <p:nvPr/>
+        </p:nvCxnSpPr>
+        <p:spPr>
+          <a:xfrm>
+            <a:off x="6396137" y="4720851"/>
+            <a:ext cx="1380930" cy="317241"/>
+          </a:xfrm>
+          <a:prstGeom prst="straightConnector1">
+            <a:avLst/>
+          </a:prstGeom>
+          <a:ln w="19050">
+            <a:solidFill>
+              <a:schemeClr val="tx1"/>
+            </a:solidFill>
+            <a:tailEnd type="triangle"/>
+          </a:ln>
+        </p:spPr>
+        <p:style>
+          <a:lnRef idx="1">
+            <a:schemeClr val="accent1"/>
+          </a:lnRef>
+          <a:fillRef idx="0">
+            <a:schemeClr val="accent1"/>
+          </a:fillRef>
+          <a:effectRef idx="0">
+            <a:schemeClr val="accent1"/>
+          </a:effectRef>
+          <a:fontRef idx="minor">
+            <a:schemeClr val="tx1"/>
+          </a:fontRef>
+        </p:style>
+      </p:cxnSp>
+      <mc:AlternateContent xmlns:mc="http://schemas.openxmlformats.org/markup-compatibility/2006">
+        <mc:Choice xmlns:a14="http://schemas.microsoft.com/office/drawing/2010/main" Requires="a14">
+          <p:sp>
+            <p:nvSpPr>
+              <p:cNvPr id="17" name="TextBox 16">
+                <a:extLst>
+                  <a:ext uri="{FF2B5EF4-FFF2-40B4-BE49-F238E27FC236}">
+                    <a16:creationId xmlns:a16="http://schemas.microsoft.com/office/drawing/2014/main" id="{12F1CB4E-E2C2-B5EC-1834-9F994B3F4647}"/>
+                  </a:ext>
+                </a:extLst>
+              </p:cNvPr>
+              <p:cNvSpPr txBox="1"/>
+              <p:nvPr/>
+            </p:nvSpPr>
+            <p:spPr>
+              <a:xfrm>
+                <a:off x="4833256" y="1982449"/>
+                <a:ext cx="709126" cy="307777"/>
+              </a:xfrm>
+              <a:prstGeom prst="rect">
+                <a:avLst/>
+              </a:prstGeom>
+              <a:noFill/>
+            </p:spPr>
+            <p:txBody>
+              <a:bodyPr wrap="square" rtlCol="0">
+                <a:spAutoFit/>
+              </a:bodyPr>
+              <a:lstStyle/>
+              <a:p>
+                <a:pPr/>
+                <a:r>
+                  <a:rPr lang="en-US" sz="1400" b="1" dirty="0">
+                    <a:solidFill>
+                      <a:schemeClr val="tx1"/>
+                    </a:solidFill>
+                  </a:rPr>
+                  <a:t>Coin </a:t>
+                </a:r>
+                <a14:m>
+                  <m:oMath xmlns:m="http://schemas.openxmlformats.org/officeDocument/2006/math">
+                    <m:r>
+                      <a:rPr lang="en-US" sz="1400" b="1" i="1" dirty="0" smtClean="0">
+                        <a:solidFill>
+                          <a:schemeClr val="tx1"/>
+                        </a:solidFill>
+                        <a:latin typeface="Cambria Math" panose="02040503050406030204" pitchFamily="18" charset="0"/>
+                      </a:rPr>
+                      <m:t>𝑨</m:t>
+                    </m:r>
+                  </m:oMath>
+                </a14:m>
+                <a:endParaRPr lang="ar-AE" b="1" dirty="0">
+                  <a:solidFill>
+                    <a:schemeClr val="tx1"/>
+                  </a:solidFill>
+                </a:endParaRPr>
+              </a:p>
+            </p:txBody>
+          </p:sp>
+        </mc:Choice>
+        <mc:Fallback>
+          <p:sp>
+            <p:nvSpPr>
+              <p:cNvPr id="17" name="TextBox 16">
+                <a:extLst>
+                  <a:ext uri="{FF2B5EF4-FFF2-40B4-BE49-F238E27FC236}">
+                    <a16:creationId xmlns:a16="http://schemas.microsoft.com/office/drawing/2014/main" id="{12F1CB4E-E2C2-B5EC-1834-9F994B3F4647}"/>
+                  </a:ext>
+                </a:extLst>
+              </p:cNvPr>
+              <p:cNvSpPr txBox="1">
+                <a:spLocks noRot="1" noChangeAspect="1" noMove="1" noResize="1" noEditPoints="1" noAdjustHandles="1" noChangeArrowheads="1" noChangeShapeType="1" noTextEdit="1"/>
+              </p:cNvSpPr>
+              <p:nvPr/>
+            </p:nvSpPr>
+            <p:spPr>
+              <a:xfrm>
+                <a:off x="4833256" y="1982449"/>
+                <a:ext cx="709126" cy="307777"/>
+              </a:xfrm>
+              <a:prstGeom prst="rect">
+                <a:avLst/>
+              </a:prstGeom>
+              <a:blipFill>
+                <a:blip r:embed="rId3"/>
+                <a:stretch>
+                  <a:fillRect l="-2586" t="-1961" b="-21569"/>
+                </a:stretch>
+              </a:blipFill>
+            </p:spPr>
+            <p:txBody>
+              <a:bodyPr/>
+              <a:lstStyle/>
+              <a:p>
+                <a:r>
+                  <a:rPr lang="en-US">
+                    <a:noFill/>
+                  </a:rPr>
+                  <a:t> </a:t>
+                </a:r>
+              </a:p>
+            </p:txBody>
+          </p:sp>
+        </mc:Fallback>
+      </mc:AlternateContent>
+      <mc:AlternateContent xmlns:mc="http://schemas.openxmlformats.org/markup-compatibility/2006">
+        <mc:Choice xmlns:a14="http://schemas.microsoft.com/office/drawing/2010/main" Requires="a14">
+          <p:sp>
+            <p:nvSpPr>
+              <p:cNvPr id="18" name="TextBox 17">
+                <a:extLst>
+                  <a:ext uri="{FF2B5EF4-FFF2-40B4-BE49-F238E27FC236}">
+                    <a16:creationId xmlns:a16="http://schemas.microsoft.com/office/drawing/2014/main" id="{08F3E487-45E8-0AE4-77AD-5BBDC79F4415}"/>
+                  </a:ext>
+                </a:extLst>
+              </p:cNvPr>
+              <p:cNvSpPr txBox="1"/>
+              <p:nvPr/>
+            </p:nvSpPr>
+            <p:spPr>
+              <a:xfrm>
+                <a:off x="4350400" y="3741347"/>
+                <a:ext cx="709126" cy="307777"/>
+              </a:xfrm>
+              <a:prstGeom prst="rect">
+                <a:avLst/>
+              </a:prstGeom>
+              <a:noFill/>
+            </p:spPr>
+            <p:txBody>
+              <a:bodyPr wrap="square" rtlCol="0">
+                <a:spAutoFit/>
+              </a:bodyPr>
+              <a:lstStyle/>
+              <a:p>
+                <a:pPr/>
+                <a14:m>
+                  <m:oMathPara xmlns:m="http://schemas.openxmlformats.org/officeDocument/2006/math">
+                    <m:oMathParaPr>
+                      <m:jc m:val="center"/>
+                    </m:oMathParaPr>
+                    <m:oMath xmlns:m="http://schemas.openxmlformats.org/officeDocument/2006/math">
+                      <m:r>
+                        <a:rPr lang="en-US" sz="1400" b="0" i="1" dirty="0" smtClean="0">
+                          <a:solidFill>
+                            <a:schemeClr val="tx1"/>
+                          </a:solidFill>
+                          <a:latin typeface="Cambria Math" panose="02040503050406030204" pitchFamily="18" charset="0"/>
+                        </a:rPr>
+                        <m:t>0</m:t>
+                      </m:r>
+                      <m:r>
+                        <a:rPr lang="en-US" sz="1400" b="0" i="1" dirty="0" smtClean="0">
+                          <a:solidFill>
+                            <a:schemeClr val="tx1"/>
+                          </a:solidFill>
+                          <a:latin typeface="Cambria Math" panose="02040503050406030204" pitchFamily="18" charset="0"/>
+                        </a:rPr>
+                        <m:t>.</m:t>
+                      </m:r>
+                      <m:r>
+                        <a:rPr lang="en-US" sz="1400" b="0" i="1" dirty="0" smtClean="0">
+                          <a:solidFill>
+                            <a:schemeClr val="tx1"/>
+                          </a:solidFill>
+                          <a:latin typeface="Cambria Math" panose="02040503050406030204" pitchFamily="18" charset="0"/>
+                        </a:rPr>
+                        <m:t>5</m:t>
+                      </m:r>
+                    </m:oMath>
+                  </m:oMathPara>
+                </a14:m>
+                <a:endParaRPr lang="en-US" sz="1400" dirty="0">
+                  <a:solidFill>
+                    <a:schemeClr val="tx1"/>
+                  </a:solidFill>
+                </a:endParaRPr>
+              </a:p>
+            </p:txBody>
+          </p:sp>
+        </mc:Choice>
+        <mc:Fallback>
+          <p:sp>
+            <p:nvSpPr>
+              <p:cNvPr id="18" name="TextBox 17">
+                <a:extLst>
+                  <a:ext uri="{FF2B5EF4-FFF2-40B4-BE49-F238E27FC236}">
+                    <a16:creationId xmlns:a16="http://schemas.microsoft.com/office/drawing/2014/main" id="{08F3E487-45E8-0AE4-77AD-5BBDC79F4415}"/>
+                  </a:ext>
+                </a:extLst>
+              </p:cNvPr>
+              <p:cNvSpPr txBox="1">
+                <a:spLocks noRot="1" noChangeAspect="1" noMove="1" noResize="1" noEditPoints="1" noAdjustHandles="1" noChangeArrowheads="1" noChangeShapeType="1" noTextEdit="1"/>
+              </p:cNvSpPr>
+              <p:nvPr/>
+            </p:nvSpPr>
+            <p:spPr>
+              <a:xfrm>
+                <a:off x="4350400" y="3741347"/>
+                <a:ext cx="709126" cy="307777"/>
+              </a:xfrm>
+              <a:prstGeom prst="rect">
+                <a:avLst/>
+              </a:prstGeom>
+              <a:blipFill>
+                <a:blip r:embed="rId4"/>
+                <a:stretch>
+                  <a:fillRect/>
+                </a:stretch>
+              </a:blipFill>
+            </p:spPr>
+            <p:txBody>
+              <a:bodyPr/>
+              <a:lstStyle/>
+              <a:p>
+                <a:r>
+                  <a:rPr lang="en-US">
+                    <a:noFill/>
+                  </a:rPr>
+                  <a:t> </a:t>
+                </a:r>
+              </a:p>
+            </p:txBody>
+          </p:sp>
+        </mc:Fallback>
+      </mc:AlternateContent>
+      <mc:AlternateContent xmlns:mc="http://schemas.openxmlformats.org/markup-compatibility/2006">
+        <mc:Choice xmlns:a14="http://schemas.microsoft.com/office/drawing/2010/main" Requires="a14">
+          <p:sp>
+            <p:nvSpPr>
+              <p:cNvPr id="100" name="TextBox 99">
+                <a:extLst>
+                  <a:ext uri="{FF2B5EF4-FFF2-40B4-BE49-F238E27FC236}">
+                    <a16:creationId xmlns:a16="http://schemas.microsoft.com/office/drawing/2014/main" id="{BCDD7162-A841-76CB-D900-5E7BF4901CB1}"/>
+                  </a:ext>
+                </a:extLst>
+              </p:cNvPr>
+              <p:cNvSpPr txBox="1"/>
+              <p:nvPr/>
+            </p:nvSpPr>
+            <p:spPr>
+              <a:xfrm>
+                <a:off x="4833256" y="4279891"/>
+                <a:ext cx="709126" cy="307777"/>
+              </a:xfrm>
+              <a:prstGeom prst="rect">
+                <a:avLst/>
+              </a:prstGeom>
+              <a:noFill/>
+            </p:spPr>
+            <p:txBody>
+              <a:bodyPr wrap="square" rtlCol="0">
+                <a:spAutoFit/>
+              </a:bodyPr>
+              <a:lstStyle/>
+              <a:p>
+                <a:pPr/>
+                <a:r>
+                  <a:rPr lang="en-US" sz="1400" b="1" dirty="0">
+                    <a:solidFill>
+                      <a:schemeClr val="tx1"/>
+                    </a:solidFill>
+                  </a:rPr>
+                  <a:t>Coin </a:t>
+                </a:r>
+                <a14:m>
+                  <m:oMath xmlns:m="http://schemas.openxmlformats.org/officeDocument/2006/math">
+                    <m:r>
+                      <a:rPr lang="en-US" sz="1400" b="1" i="0" dirty="0" smtClean="0">
+                        <a:solidFill>
+                          <a:schemeClr val="tx1"/>
+                        </a:solidFill>
+                        <a:latin typeface="Cambria Math" panose="02040503050406030204" pitchFamily="18" charset="0"/>
+                      </a:rPr>
+                      <m:t>𝐁</m:t>
+                    </m:r>
+                  </m:oMath>
+                </a14:m>
+                <a:endParaRPr lang="ar-AE" b="1" dirty="0">
+                  <a:solidFill>
+                    <a:schemeClr val="tx1"/>
+                  </a:solidFill>
+                </a:endParaRPr>
+              </a:p>
+            </p:txBody>
+          </p:sp>
+        </mc:Choice>
+        <mc:Fallback>
+          <p:sp>
+            <p:nvSpPr>
+              <p:cNvPr id="100" name="TextBox 99">
+                <a:extLst>
+                  <a:ext uri="{FF2B5EF4-FFF2-40B4-BE49-F238E27FC236}">
+                    <a16:creationId xmlns:a16="http://schemas.microsoft.com/office/drawing/2014/main" id="{BCDD7162-A841-76CB-D900-5E7BF4901CB1}"/>
+                  </a:ext>
+                </a:extLst>
+              </p:cNvPr>
+              <p:cNvSpPr txBox="1">
+                <a:spLocks noRot="1" noChangeAspect="1" noMove="1" noResize="1" noEditPoints="1" noAdjustHandles="1" noChangeArrowheads="1" noChangeShapeType="1" noTextEdit="1"/>
+              </p:cNvSpPr>
+              <p:nvPr/>
+            </p:nvSpPr>
+            <p:spPr>
+              <a:xfrm>
+                <a:off x="4833256" y="4279891"/>
+                <a:ext cx="709126" cy="307777"/>
+              </a:xfrm>
+              <a:prstGeom prst="rect">
+                <a:avLst/>
+              </a:prstGeom>
+              <a:blipFill>
+                <a:blip r:embed="rId5"/>
+                <a:stretch>
+                  <a:fillRect l="-2586" t="-1961" b="-21569"/>
+                </a:stretch>
+              </a:blipFill>
+            </p:spPr>
+            <p:txBody>
+              <a:bodyPr/>
+              <a:lstStyle/>
+              <a:p>
+                <a:r>
+                  <a:rPr lang="en-US">
+                    <a:noFill/>
+                  </a:rPr>
+                  <a:t> </a:t>
+                </a:r>
+              </a:p>
+            </p:txBody>
+          </p:sp>
+        </mc:Fallback>
+      </mc:AlternateContent>
+      <mc:AlternateContent xmlns:mc="http://schemas.openxmlformats.org/markup-compatibility/2006">
+        <mc:Choice xmlns:a14="http://schemas.microsoft.com/office/drawing/2010/main" Requires="a14">
+          <p:sp>
+            <p:nvSpPr>
+              <p:cNvPr id="101" name="TextBox 100">
+                <a:extLst>
+                  <a:ext uri="{FF2B5EF4-FFF2-40B4-BE49-F238E27FC236}">
+                    <a16:creationId xmlns:a16="http://schemas.microsoft.com/office/drawing/2014/main" id="{C4371D61-1E80-26CD-73FD-8996AEB50B73}"/>
+                  </a:ext>
+                </a:extLst>
+              </p:cNvPr>
+              <p:cNvSpPr txBox="1"/>
+              <p:nvPr/>
+            </p:nvSpPr>
+            <p:spPr>
+              <a:xfrm>
+                <a:off x="4350400" y="2547019"/>
+                <a:ext cx="709126" cy="307777"/>
+              </a:xfrm>
+              <a:prstGeom prst="rect">
+                <a:avLst/>
+              </a:prstGeom>
+              <a:noFill/>
+            </p:spPr>
+            <p:txBody>
+              <a:bodyPr wrap="square" rtlCol="0">
+                <a:spAutoFit/>
+              </a:bodyPr>
+              <a:lstStyle/>
+              <a:p>
+                <a:pPr/>
+                <a14:m>
+                  <m:oMathPara xmlns:m="http://schemas.openxmlformats.org/officeDocument/2006/math">
+                    <m:oMathParaPr>
+                      <m:jc m:val="center"/>
+                    </m:oMathParaPr>
+                    <m:oMath xmlns:m="http://schemas.openxmlformats.org/officeDocument/2006/math">
+                      <m:r>
+                        <a:rPr lang="en-US" sz="1400" b="0" i="1" dirty="0" smtClean="0">
+                          <a:solidFill>
+                            <a:schemeClr val="tx1"/>
+                          </a:solidFill>
+                          <a:latin typeface="Cambria Math" panose="02040503050406030204" pitchFamily="18" charset="0"/>
+                        </a:rPr>
+                        <m:t>0</m:t>
+                      </m:r>
+                      <m:r>
+                        <a:rPr lang="en-US" sz="1400" b="0" i="1" dirty="0" smtClean="0">
+                          <a:solidFill>
+                            <a:schemeClr val="tx1"/>
+                          </a:solidFill>
+                          <a:latin typeface="Cambria Math" panose="02040503050406030204" pitchFamily="18" charset="0"/>
+                        </a:rPr>
+                        <m:t>.</m:t>
+                      </m:r>
+                      <m:r>
+                        <a:rPr lang="en-US" sz="1400" b="0" i="1" dirty="0" smtClean="0">
+                          <a:solidFill>
+                            <a:schemeClr val="tx1"/>
+                          </a:solidFill>
+                          <a:latin typeface="Cambria Math" panose="02040503050406030204" pitchFamily="18" charset="0"/>
+                        </a:rPr>
+                        <m:t>5</m:t>
+                      </m:r>
+                    </m:oMath>
+                  </m:oMathPara>
+                </a14:m>
+                <a:endParaRPr lang="en-US" sz="1400" dirty="0">
+                  <a:solidFill>
+                    <a:schemeClr val="tx1"/>
+                  </a:solidFill>
+                </a:endParaRPr>
+              </a:p>
+            </p:txBody>
+          </p:sp>
+        </mc:Choice>
+        <mc:Fallback>
+          <p:sp>
+            <p:nvSpPr>
+              <p:cNvPr id="101" name="TextBox 100">
+                <a:extLst>
+                  <a:ext uri="{FF2B5EF4-FFF2-40B4-BE49-F238E27FC236}">
+                    <a16:creationId xmlns:a16="http://schemas.microsoft.com/office/drawing/2014/main" id="{C4371D61-1E80-26CD-73FD-8996AEB50B73}"/>
+                  </a:ext>
+                </a:extLst>
+              </p:cNvPr>
+              <p:cNvSpPr txBox="1">
+                <a:spLocks noRot="1" noChangeAspect="1" noMove="1" noResize="1" noEditPoints="1" noAdjustHandles="1" noChangeArrowheads="1" noChangeShapeType="1" noTextEdit="1"/>
+              </p:cNvSpPr>
+              <p:nvPr/>
+            </p:nvSpPr>
+            <p:spPr>
+              <a:xfrm>
+                <a:off x="4350400" y="2547019"/>
+                <a:ext cx="709126" cy="307777"/>
+              </a:xfrm>
+              <a:prstGeom prst="rect">
+                <a:avLst/>
+              </a:prstGeom>
+              <a:blipFill>
+                <a:blip r:embed="rId4"/>
+                <a:stretch>
+                  <a:fillRect/>
+                </a:stretch>
+              </a:blipFill>
+            </p:spPr>
+            <p:txBody>
+              <a:bodyPr/>
+              <a:lstStyle/>
+              <a:p>
+                <a:r>
+                  <a:rPr lang="en-US">
+                    <a:noFill/>
+                  </a:rPr>
+                  <a:t> </a:t>
+                </a:r>
+              </a:p>
+            </p:txBody>
+          </p:sp>
+        </mc:Fallback>
+      </mc:AlternateContent>
+      <mc:AlternateContent xmlns:mc="http://schemas.openxmlformats.org/markup-compatibility/2006">
+        <mc:Choice xmlns:a14="http://schemas.microsoft.com/office/drawing/2010/main" Requires="a14">
+          <p:sp>
+            <p:nvSpPr>
+              <p:cNvPr id="102" name="TextBox 101">
+                <a:extLst>
+                  <a:ext uri="{FF2B5EF4-FFF2-40B4-BE49-F238E27FC236}">
+                    <a16:creationId xmlns:a16="http://schemas.microsoft.com/office/drawing/2014/main" id="{4380FEF6-2608-8BEF-2477-986B3BD61A50}"/>
+                  </a:ext>
+                </a:extLst>
+              </p:cNvPr>
+              <p:cNvSpPr txBox="1"/>
+              <p:nvPr/>
+            </p:nvSpPr>
+            <p:spPr>
+              <a:xfrm>
+                <a:off x="5376770" y="3755344"/>
+                <a:ext cx="709126" cy="307777"/>
+              </a:xfrm>
+              <a:prstGeom prst="rect">
+                <a:avLst/>
+              </a:prstGeom>
+              <a:noFill/>
+            </p:spPr>
+            <p:txBody>
+              <a:bodyPr wrap="square" rtlCol="0">
+                <a:spAutoFit/>
+              </a:bodyPr>
+              <a:lstStyle/>
+              <a:p>
+                <a:pPr/>
+                <a14:m>
+                  <m:oMathPara xmlns:m="http://schemas.openxmlformats.org/officeDocument/2006/math">
+                    <m:oMathParaPr>
+                      <m:jc m:val="center"/>
+                    </m:oMathParaPr>
+                    <m:oMath xmlns:m="http://schemas.openxmlformats.org/officeDocument/2006/math">
+                      <m:r>
+                        <a:rPr lang="en-US" sz="1400" b="0" i="1" dirty="0" smtClean="0">
+                          <a:solidFill>
+                            <a:schemeClr val="tx1"/>
+                          </a:solidFill>
+                          <a:latin typeface="Cambria Math" panose="02040503050406030204" pitchFamily="18" charset="0"/>
+                        </a:rPr>
+                        <m:t>0</m:t>
+                      </m:r>
+                      <m:r>
+                        <a:rPr lang="en-US" sz="1400" b="0" i="1" dirty="0" smtClean="0">
+                          <a:solidFill>
+                            <a:schemeClr val="tx1"/>
+                          </a:solidFill>
+                          <a:latin typeface="Cambria Math" panose="02040503050406030204" pitchFamily="18" charset="0"/>
+                        </a:rPr>
+                        <m:t>.</m:t>
+                      </m:r>
+                      <m:r>
+                        <a:rPr lang="en-US" sz="1400" b="0" i="1" dirty="0" smtClean="0">
+                          <a:solidFill>
+                            <a:schemeClr val="tx1"/>
+                          </a:solidFill>
+                          <a:latin typeface="Cambria Math" panose="02040503050406030204" pitchFamily="18" charset="0"/>
+                        </a:rPr>
+                        <m:t>1</m:t>
+                      </m:r>
+                    </m:oMath>
+                  </m:oMathPara>
+                </a14:m>
+                <a:endParaRPr lang="en-US" sz="1400" dirty="0">
+                  <a:solidFill>
+                    <a:schemeClr val="tx1"/>
+                  </a:solidFill>
+                </a:endParaRPr>
+              </a:p>
+            </p:txBody>
+          </p:sp>
+        </mc:Choice>
+        <mc:Fallback>
+          <p:sp>
+            <p:nvSpPr>
+              <p:cNvPr id="102" name="TextBox 101">
+                <a:extLst>
+                  <a:ext uri="{FF2B5EF4-FFF2-40B4-BE49-F238E27FC236}">
+                    <a16:creationId xmlns:a16="http://schemas.microsoft.com/office/drawing/2014/main" id="{4380FEF6-2608-8BEF-2477-986B3BD61A50}"/>
+                  </a:ext>
+                </a:extLst>
+              </p:cNvPr>
+              <p:cNvSpPr txBox="1">
+                <a:spLocks noRot="1" noChangeAspect="1" noMove="1" noResize="1" noEditPoints="1" noAdjustHandles="1" noChangeArrowheads="1" noChangeShapeType="1" noTextEdit="1"/>
+              </p:cNvSpPr>
+              <p:nvPr/>
+            </p:nvSpPr>
+            <p:spPr>
+              <a:xfrm>
+                <a:off x="5376770" y="3755344"/>
+                <a:ext cx="709126" cy="307777"/>
+              </a:xfrm>
+              <a:prstGeom prst="rect">
+                <a:avLst/>
+              </a:prstGeom>
+              <a:blipFill>
+                <a:blip r:embed="rId6"/>
+                <a:stretch>
+                  <a:fillRect/>
+                </a:stretch>
+              </a:blipFill>
+            </p:spPr>
+            <p:txBody>
+              <a:bodyPr/>
+              <a:lstStyle/>
+              <a:p>
+                <a:r>
+                  <a:rPr lang="en-US">
+                    <a:noFill/>
+                  </a:rPr>
+                  <a:t> </a:t>
+                </a:r>
+              </a:p>
+            </p:txBody>
+          </p:sp>
+        </mc:Fallback>
+      </mc:AlternateContent>
+      <mc:AlternateContent xmlns:mc="http://schemas.openxmlformats.org/markup-compatibility/2006">
+        <mc:Choice xmlns:a14="http://schemas.microsoft.com/office/drawing/2010/main" Requires="a14">
+          <p:sp>
+            <p:nvSpPr>
+              <p:cNvPr id="103" name="TextBox 102">
+                <a:extLst>
+                  <a:ext uri="{FF2B5EF4-FFF2-40B4-BE49-F238E27FC236}">
+                    <a16:creationId xmlns:a16="http://schemas.microsoft.com/office/drawing/2014/main" id="{B98C63D8-F37C-8DFE-44A2-FA6A1AAC150C}"/>
+                  </a:ext>
+                </a:extLst>
+              </p:cNvPr>
+              <p:cNvSpPr txBox="1"/>
+              <p:nvPr/>
+            </p:nvSpPr>
+            <p:spPr>
+              <a:xfrm>
+                <a:off x="5376770" y="4459350"/>
+                <a:ext cx="709126" cy="307777"/>
+              </a:xfrm>
+              <a:prstGeom prst="rect">
+                <a:avLst/>
+              </a:prstGeom>
+              <a:noFill/>
+            </p:spPr>
+            <p:txBody>
+              <a:bodyPr wrap="square" rtlCol="0">
+                <a:spAutoFit/>
+              </a:bodyPr>
+              <a:lstStyle/>
+              <a:p>
+                <a:pPr/>
+                <a14:m>
+                  <m:oMathPara xmlns:m="http://schemas.openxmlformats.org/officeDocument/2006/math">
+                    <m:oMathParaPr>
+                      <m:jc m:val="center"/>
+                    </m:oMathParaPr>
+                    <m:oMath xmlns:m="http://schemas.openxmlformats.org/officeDocument/2006/math">
+                      <m:r>
+                        <a:rPr lang="en-US" sz="1400" b="0" i="1" dirty="0" smtClean="0">
+                          <a:solidFill>
+                            <a:schemeClr val="tx1"/>
+                          </a:solidFill>
+                          <a:latin typeface="Cambria Math" panose="02040503050406030204" pitchFamily="18" charset="0"/>
+                        </a:rPr>
+                        <m:t>0</m:t>
+                      </m:r>
+                      <m:r>
+                        <a:rPr lang="en-US" sz="1400" b="0" i="1" dirty="0" smtClean="0">
+                          <a:solidFill>
+                            <a:schemeClr val="tx1"/>
+                          </a:solidFill>
+                          <a:latin typeface="Cambria Math" panose="02040503050406030204" pitchFamily="18" charset="0"/>
+                        </a:rPr>
+                        <m:t>.</m:t>
+                      </m:r>
+                      <m:r>
+                        <a:rPr lang="en-US" sz="1400" b="0" i="1" dirty="0" smtClean="0">
+                          <a:solidFill>
+                            <a:schemeClr val="tx1"/>
+                          </a:solidFill>
+                          <a:latin typeface="Cambria Math" panose="02040503050406030204" pitchFamily="18" charset="0"/>
+                        </a:rPr>
+                        <m:t>9</m:t>
+                      </m:r>
+                    </m:oMath>
+                  </m:oMathPara>
+                </a14:m>
+                <a:endParaRPr lang="en-US" sz="1400" dirty="0">
+                  <a:solidFill>
+                    <a:schemeClr val="tx1"/>
+                  </a:solidFill>
+                </a:endParaRPr>
+              </a:p>
+            </p:txBody>
+          </p:sp>
+        </mc:Choice>
+        <mc:Fallback>
+          <p:sp>
+            <p:nvSpPr>
+              <p:cNvPr id="103" name="TextBox 102">
+                <a:extLst>
+                  <a:ext uri="{FF2B5EF4-FFF2-40B4-BE49-F238E27FC236}">
+                    <a16:creationId xmlns:a16="http://schemas.microsoft.com/office/drawing/2014/main" id="{B98C63D8-F37C-8DFE-44A2-FA6A1AAC150C}"/>
+                  </a:ext>
+                </a:extLst>
+              </p:cNvPr>
+              <p:cNvSpPr txBox="1">
+                <a:spLocks noRot="1" noChangeAspect="1" noMove="1" noResize="1" noEditPoints="1" noAdjustHandles="1" noChangeArrowheads="1" noChangeShapeType="1" noTextEdit="1"/>
+              </p:cNvSpPr>
+              <p:nvPr/>
+            </p:nvSpPr>
+            <p:spPr>
+              <a:xfrm>
+                <a:off x="5376770" y="4459350"/>
+                <a:ext cx="709126" cy="307777"/>
+              </a:xfrm>
+              <a:prstGeom prst="rect">
+                <a:avLst/>
+              </a:prstGeom>
+              <a:blipFill>
+                <a:blip r:embed="rId7"/>
+                <a:stretch>
+                  <a:fillRect/>
+                </a:stretch>
+              </a:blipFill>
+            </p:spPr>
+            <p:txBody>
+              <a:bodyPr/>
+              <a:lstStyle/>
+              <a:p>
+                <a:r>
+                  <a:rPr lang="en-US">
+                    <a:noFill/>
+                  </a:rPr>
+                  <a:t> </a:t>
+                </a:r>
+              </a:p>
+            </p:txBody>
+          </p:sp>
+        </mc:Fallback>
+      </mc:AlternateContent>
+      <mc:AlternateContent xmlns:mc="http://schemas.openxmlformats.org/markup-compatibility/2006">
+        <mc:Choice xmlns:a14="http://schemas.microsoft.com/office/drawing/2010/main" Requires="a14">
+          <p:sp>
+            <p:nvSpPr>
+              <p:cNvPr id="104" name="TextBox 103">
+                <a:extLst>
+                  <a:ext uri="{FF2B5EF4-FFF2-40B4-BE49-F238E27FC236}">
+                    <a16:creationId xmlns:a16="http://schemas.microsoft.com/office/drawing/2014/main" id="{86F4DE85-A598-3C77-E6BD-6D4E6207E40D}"/>
+                  </a:ext>
+                </a:extLst>
+              </p:cNvPr>
+              <p:cNvSpPr txBox="1"/>
+              <p:nvPr/>
+            </p:nvSpPr>
+            <p:spPr>
+              <a:xfrm>
+                <a:off x="6718041" y="3311929"/>
+                <a:ext cx="709126" cy="307777"/>
+              </a:xfrm>
+              <a:prstGeom prst="rect">
+                <a:avLst/>
+              </a:prstGeom>
+              <a:noFill/>
+            </p:spPr>
+            <p:txBody>
+              <a:bodyPr wrap="square" rtlCol="0">
+                <a:spAutoFit/>
+              </a:bodyPr>
+              <a:lstStyle/>
+              <a:p>
+                <a:pPr/>
+                <a14:m>
+                  <m:oMathPara xmlns:m="http://schemas.openxmlformats.org/officeDocument/2006/math">
+                    <m:oMathParaPr>
+                      <m:jc m:val="center"/>
+                    </m:oMathParaPr>
+                    <m:oMath xmlns:m="http://schemas.openxmlformats.org/officeDocument/2006/math">
+                      <m:r>
+                        <a:rPr lang="en-US" sz="1400" b="0" i="1" dirty="0" smtClean="0">
+                          <a:solidFill>
+                            <a:schemeClr val="tx1"/>
+                          </a:solidFill>
+                          <a:latin typeface="Cambria Math" panose="02040503050406030204" pitchFamily="18" charset="0"/>
+                        </a:rPr>
+                        <m:t>0</m:t>
+                      </m:r>
+                      <m:r>
+                        <a:rPr lang="en-US" sz="1400" b="0" i="1" dirty="0" smtClean="0">
+                          <a:solidFill>
+                            <a:schemeClr val="tx1"/>
+                          </a:solidFill>
+                          <a:latin typeface="Cambria Math" panose="02040503050406030204" pitchFamily="18" charset="0"/>
+                        </a:rPr>
+                        <m:t>.</m:t>
+                      </m:r>
+                      <m:r>
+                        <a:rPr lang="en-US" sz="1400" b="0" i="1" dirty="0" smtClean="0">
+                          <a:solidFill>
+                            <a:schemeClr val="tx1"/>
+                          </a:solidFill>
+                          <a:latin typeface="Cambria Math" panose="02040503050406030204" pitchFamily="18" charset="0"/>
+                        </a:rPr>
+                        <m:t>1</m:t>
+                      </m:r>
+                    </m:oMath>
+                  </m:oMathPara>
+                </a14:m>
+                <a:endParaRPr lang="en-US" sz="1400" dirty="0">
+                  <a:solidFill>
+                    <a:schemeClr val="tx1"/>
+                  </a:solidFill>
+                </a:endParaRPr>
+              </a:p>
+            </p:txBody>
+          </p:sp>
+        </mc:Choice>
+        <mc:Fallback>
+          <p:sp>
+            <p:nvSpPr>
+              <p:cNvPr id="104" name="TextBox 103">
+                <a:extLst>
+                  <a:ext uri="{FF2B5EF4-FFF2-40B4-BE49-F238E27FC236}">
+                    <a16:creationId xmlns:a16="http://schemas.microsoft.com/office/drawing/2014/main" id="{86F4DE85-A598-3C77-E6BD-6D4E6207E40D}"/>
+                  </a:ext>
+                </a:extLst>
+              </p:cNvPr>
+              <p:cNvSpPr txBox="1">
+                <a:spLocks noRot="1" noChangeAspect="1" noMove="1" noResize="1" noEditPoints="1" noAdjustHandles="1" noChangeArrowheads="1" noChangeShapeType="1" noTextEdit="1"/>
+              </p:cNvSpPr>
+              <p:nvPr/>
+            </p:nvSpPr>
+            <p:spPr>
+              <a:xfrm>
+                <a:off x="6718041" y="3311929"/>
+                <a:ext cx="709126" cy="307777"/>
+              </a:xfrm>
+              <a:prstGeom prst="rect">
+                <a:avLst/>
+              </a:prstGeom>
+              <a:blipFill>
+                <a:blip r:embed="rId6"/>
+                <a:stretch>
+                  <a:fillRect/>
+                </a:stretch>
+              </a:blipFill>
+            </p:spPr>
+            <p:txBody>
+              <a:bodyPr/>
+              <a:lstStyle/>
+              <a:p>
+                <a:r>
+                  <a:rPr lang="en-US">
+                    <a:noFill/>
+                  </a:rPr>
+                  <a:t> </a:t>
+                </a:r>
+              </a:p>
+            </p:txBody>
+          </p:sp>
+        </mc:Fallback>
+      </mc:AlternateContent>
+      <mc:AlternateContent xmlns:mc="http://schemas.openxmlformats.org/markup-compatibility/2006">
+        <mc:Choice xmlns:a14="http://schemas.microsoft.com/office/drawing/2010/main" Requires="a14">
+          <p:sp>
+            <p:nvSpPr>
+              <p:cNvPr id="105" name="TextBox 104">
+                <a:extLst>
+                  <a:ext uri="{FF2B5EF4-FFF2-40B4-BE49-F238E27FC236}">
+                    <a16:creationId xmlns:a16="http://schemas.microsoft.com/office/drawing/2014/main" id="{E73BD37C-D90D-C745-983B-53BCDCA84B42}"/>
+                  </a:ext>
+                </a:extLst>
+              </p:cNvPr>
+              <p:cNvSpPr txBox="1"/>
+              <p:nvPr/>
+            </p:nvSpPr>
+            <p:spPr>
+              <a:xfrm>
+                <a:off x="6718041" y="4352358"/>
+                <a:ext cx="709126" cy="307777"/>
+              </a:xfrm>
+              <a:prstGeom prst="rect">
+                <a:avLst/>
+              </a:prstGeom>
+              <a:noFill/>
+            </p:spPr>
+            <p:txBody>
+              <a:bodyPr wrap="square" rtlCol="0">
+                <a:spAutoFit/>
+              </a:bodyPr>
+              <a:lstStyle/>
+              <a:p>
+                <a:pPr/>
+                <a14:m>
+                  <m:oMathPara xmlns:m="http://schemas.openxmlformats.org/officeDocument/2006/math">
+                    <m:oMathParaPr>
+                      <m:jc m:val="center"/>
+                    </m:oMathParaPr>
+                    <m:oMath xmlns:m="http://schemas.openxmlformats.org/officeDocument/2006/math">
+                      <m:r>
+                        <a:rPr lang="en-US" sz="1400" b="0" i="1" dirty="0" smtClean="0">
+                          <a:solidFill>
+                            <a:schemeClr val="tx1"/>
+                          </a:solidFill>
+                          <a:latin typeface="Cambria Math" panose="02040503050406030204" pitchFamily="18" charset="0"/>
+                        </a:rPr>
+                        <m:t>0</m:t>
+                      </m:r>
+                      <m:r>
+                        <a:rPr lang="en-US" sz="1400" b="0" i="1" dirty="0" smtClean="0">
+                          <a:solidFill>
+                            <a:schemeClr val="tx1"/>
+                          </a:solidFill>
+                          <a:latin typeface="Cambria Math" panose="02040503050406030204" pitchFamily="18" charset="0"/>
+                        </a:rPr>
+                        <m:t>.</m:t>
+                      </m:r>
+                      <m:r>
+                        <a:rPr lang="en-US" sz="1400" b="0" i="1" dirty="0" smtClean="0">
+                          <a:solidFill>
+                            <a:schemeClr val="tx1"/>
+                          </a:solidFill>
+                          <a:latin typeface="Cambria Math" panose="02040503050406030204" pitchFamily="18" charset="0"/>
+                        </a:rPr>
+                        <m:t>1</m:t>
+                      </m:r>
+                    </m:oMath>
+                  </m:oMathPara>
+                </a14:m>
+                <a:endParaRPr lang="en-US" sz="1400" dirty="0">
+                  <a:solidFill>
+                    <a:schemeClr val="tx1"/>
+                  </a:solidFill>
+                </a:endParaRPr>
+              </a:p>
+            </p:txBody>
+          </p:sp>
+        </mc:Choice>
+        <mc:Fallback>
+          <p:sp>
+            <p:nvSpPr>
+              <p:cNvPr id="105" name="TextBox 104">
+                <a:extLst>
+                  <a:ext uri="{FF2B5EF4-FFF2-40B4-BE49-F238E27FC236}">
+                    <a16:creationId xmlns:a16="http://schemas.microsoft.com/office/drawing/2014/main" id="{E73BD37C-D90D-C745-983B-53BCDCA84B42}"/>
+                  </a:ext>
+                </a:extLst>
+              </p:cNvPr>
+              <p:cNvSpPr txBox="1">
+                <a:spLocks noRot="1" noChangeAspect="1" noMove="1" noResize="1" noEditPoints="1" noAdjustHandles="1" noChangeArrowheads="1" noChangeShapeType="1" noTextEdit="1"/>
+              </p:cNvSpPr>
+              <p:nvPr/>
+            </p:nvSpPr>
+            <p:spPr>
+              <a:xfrm>
+                <a:off x="6718041" y="4352358"/>
+                <a:ext cx="709126" cy="307777"/>
+              </a:xfrm>
+              <a:prstGeom prst="rect">
+                <a:avLst/>
+              </a:prstGeom>
+              <a:blipFill>
+                <a:blip r:embed="rId8"/>
+                <a:stretch>
+                  <a:fillRect/>
+                </a:stretch>
+              </a:blipFill>
+            </p:spPr>
+            <p:txBody>
+              <a:bodyPr/>
+              <a:lstStyle/>
+              <a:p>
+                <a:r>
+                  <a:rPr lang="en-US">
+                    <a:noFill/>
+                  </a:rPr>
+                  <a:t> </a:t>
+                </a:r>
+              </a:p>
+            </p:txBody>
+          </p:sp>
+        </mc:Fallback>
+      </mc:AlternateContent>
+      <mc:AlternateContent xmlns:mc="http://schemas.openxmlformats.org/markup-compatibility/2006">
+        <mc:Choice xmlns:a14="http://schemas.microsoft.com/office/drawing/2010/main" Requires="a14">
+          <p:sp>
+            <p:nvSpPr>
+              <p:cNvPr id="106" name="TextBox 105">
+                <a:extLst>
+                  <a:ext uri="{FF2B5EF4-FFF2-40B4-BE49-F238E27FC236}">
+                    <a16:creationId xmlns:a16="http://schemas.microsoft.com/office/drawing/2014/main" id="{CE8F71E6-2591-3A6E-ECDA-ACD008D530CB}"/>
+                  </a:ext>
+                </a:extLst>
+              </p:cNvPr>
+              <p:cNvSpPr txBox="1"/>
+              <p:nvPr/>
+            </p:nvSpPr>
+            <p:spPr>
+              <a:xfrm>
+                <a:off x="6718041" y="3876630"/>
+                <a:ext cx="709126" cy="307777"/>
+              </a:xfrm>
+              <a:prstGeom prst="rect">
+                <a:avLst/>
+              </a:prstGeom>
+              <a:noFill/>
+            </p:spPr>
+            <p:txBody>
+              <a:bodyPr wrap="square" rtlCol="0">
+                <a:spAutoFit/>
+              </a:bodyPr>
+              <a:lstStyle/>
+              <a:p>
+                <a:pPr/>
+                <a14:m>
+                  <m:oMathPara xmlns:m="http://schemas.openxmlformats.org/officeDocument/2006/math">
+                    <m:oMathParaPr>
+                      <m:jc m:val="center"/>
+                    </m:oMathParaPr>
+                    <m:oMath xmlns:m="http://schemas.openxmlformats.org/officeDocument/2006/math">
+                      <m:r>
+                        <a:rPr lang="en-US" sz="1400" b="0" i="1" dirty="0" smtClean="0">
+                          <a:solidFill>
+                            <a:schemeClr val="tx1"/>
+                          </a:solidFill>
+                          <a:latin typeface="Cambria Math" panose="02040503050406030204" pitchFamily="18" charset="0"/>
+                        </a:rPr>
+                        <m:t>0</m:t>
+                      </m:r>
+                      <m:r>
+                        <a:rPr lang="en-US" sz="1400" b="0" i="1" dirty="0" smtClean="0">
+                          <a:solidFill>
+                            <a:schemeClr val="tx1"/>
+                          </a:solidFill>
+                          <a:latin typeface="Cambria Math" panose="02040503050406030204" pitchFamily="18" charset="0"/>
+                        </a:rPr>
+                        <m:t>.</m:t>
+                      </m:r>
+                      <m:r>
+                        <a:rPr lang="en-US" sz="1400" b="0" i="1" dirty="0" smtClean="0">
+                          <a:solidFill>
+                            <a:schemeClr val="tx1"/>
+                          </a:solidFill>
+                          <a:latin typeface="Cambria Math" panose="02040503050406030204" pitchFamily="18" charset="0"/>
+                        </a:rPr>
+                        <m:t>9</m:t>
+                      </m:r>
+                    </m:oMath>
+                  </m:oMathPara>
+                </a14:m>
+                <a:endParaRPr lang="en-US" sz="1400" dirty="0">
+                  <a:solidFill>
+                    <a:schemeClr val="tx1"/>
+                  </a:solidFill>
+                </a:endParaRPr>
+              </a:p>
+            </p:txBody>
+          </p:sp>
+        </mc:Choice>
+        <mc:Fallback>
+          <p:sp>
+            <p:nvSpPr>
+              <p:cNvPr id="106" name="TextBox 105">
+                <a:extLst>
+                  <a:ext uri="{FF2B5EF4-FFF2-40B4-BE49-F238E27FC236}">
+                    <a16:creationId xmlns:a16="http://schemas.microsoft.com/office/drawing/2014/main" id="{CE8F71E6-2591-3A6E-ECDA-ACD008D530CB}"/>
+                  </a:ext>
+                </a:extLst>
+              </p:cNvPr>
+              <p:cNvSpPr txBox="1">
+                <a:spLocks noRot="1" noChangeAspect="1" noMove="1" noResize="1" noEditPoints="1" noAdjustHandles="1" noChangeArrowheads="1" noChangeShapeType="1" noTextEdit="1"/>
+              </p:cNvSpPr>
+              <p:nvPr/>
+            </p:nvSpPr>
+            <p:spPr>
+              <a:xfrm>
+                <a:off x="6718041" y="3876630"/>
+                <a:ext cx="709126" cy="307777"/>
+              </a:xfrm>
+              <a:prstGeom prst="rect">
+                <a:avLst/>
+              </a:prstGeom>
+              <a:blipFill>
+                <a:blip r:embed="rId7"/>
+                <a:stretch>
+                  <a:fillRect/>
+                </a:stretch>
+              </a:blipFill>
+            </p:spPr>
+            <p:txBody>
+              <a:bodyPr/>
+              <a:lstStyle/>
+              <a:p>
+                <a:r>
+                  <a:rPr lang="en-US">
+                    <a:noFill/>
+                  </a:rPr>
+                  <a:t> </a:t>
+                </a:r>
+              </a:p>
+            </p:txBody>
+          </p:sp>
+        </mc:Fallback>
+      </mc:AlternateContent>
+      <mc:AlternateContent xmlns:mc="http://schemas.openxmlformats.org/markup-compatibility/2006">
+        <mc:Choice xmlns:a14="http://schemas.microsoft.com/office/drawing/2010/main" Requires="a14">
+          <p:sp>
+            <p:nvSpPr>
+              <p:cNvPr id="107" name="TextBox 106">
+                <a:extLst>
+                  <a:ext uri="{FF2B5EF4-FFF2-40B4-BE49-F238E27FC236}">
+                    <a16:creationId xmlns:a16="http://schemas.microsoft.com/office/drawing/2014/main" id="{57F432B3-94DD-319B-B465-8166248F8F5F}"/>
+                  </a:ext>
+                </a:extLst>
+              </p:cNvPr>
+              <p:cNvSpPr txBox="1"/>
+              <p:nvPr/>
+            </p:nvSpPr>
+            <p:spPr>
+              <a:xfrm>
+                <a:off x="6718041" y="4856211"/>
+                <a:ext cx="709126" cy="307777"/>
+              </a:xfrm>
+              <a:prstGeom prst="rect">
+                <a:avLst/>
+              </a:prstGeom>
+              <a:noFill/>
+            </p:spPr>
+            <p:txBody>
+              <a:bodyPr wrap="square" rtlCol="0">
+                <a:spAutoFit/>
+              </a:bodyPr>
+              <a:lstStyle/>
+              <a:p>
+                <a:pPr/>
+                <a14:m>
+                  <m:oMathPara xmlns:m="http://schemas.openxmlformats.org/officeDocument/2006/math">
+                    <m:oMathParaPr>
+                      <m:jc m:val="center"/>
+                    </m:oMathParaPr>
+                    <m:oMath xmlns:m="http://schemas.openxmlformats.org/officeDocument/2006/math">
+                      <m:r>
+                        <a:rPr lang="en-US" sz="1400" b="0" i="1" dirty="0" smtClean="0">
+                          <a:solidFill>
+                            <a:schemeClr val="tx1"/>
+                          </a:solidFill>
+                          <a:latin typeface="Cambria Math" panose="02040503050406030204" pitchFamily="18" charset="0"/>
+                        </a:rPr>
+                        <m:t>0</m:t>
+                      </m:r>
+                      <m:r>
+                        <a:rPr lang="en-US" sz="1400" b="0" i="1" dirty="0" smtClean="0">
+                          <a:solidFill>
+                            <a:schemeClr val="tx1"/>
+                          </a:solidFill>
+                          <a:latin typeface="Cambria Math" panose="02040503050406030204" pitchFamily="18" charset="0"/>
+                        </a:rPr>
+                        <m:t>.</m:t>
+                      </m:r>
+                      <m:r>
+                        <a:rPr lang="en-US" sz="1400" b="0" i="1" dirty="0" smtClean="0">
+                          <a:solidFill>
+                            <a:schemeClr val="tx1"/>
+                          </a:solidFill>
+                          <a:latin typeface="Cambria Math" panose="02040503050406030204" pitchFamily="18" charset="0"/>
+                        </a:rPr>
+                        <m:t>9</m:t>
+                      </m:r>
+                    </m:oMath>
+                  </m:oMathPara>
+                </a14:m>
+                <a:endParaRPr lang="en-US" sz="1400" dirty="0">
+                  <a:solidFill>
+                    <a:schemeClr val="tx1"/>
+                  </a:solidFill>
+                </a:endParaRPr>
+              </a:p>
+            </p:txBody>
+          </p:sp>
+        </mc:Choice>
+        <mc:Fallback>
+          <p:sp>
+            <p:nvSpPr>
+              <p:cNvPr id="107" name="TextBox 106">
+                <a:extLst>
+                  <a:ext uri="{FF2B5EF4-FFF2-40B4-BE49-F238E27FC236}">
+                    <a16:creationId xmlns:a16="http://schemas.microsoft.com/office/drawing/2014/main" id="{57F432B3-94DD-319B-B465-8166248F8F5F}"/>
+                  </a:ext>
+                </a:extLst>
+              </p:cNvPr>
+              <p:cNvSpPr txBox="1">
+                <a:spLocks noRot="1" noChangeAspect="1" noMove="1" noResize="1" noEditPoints="1" noAdjustHandles="1" noChangeArrowheads="1" noChangeShapeType="1" noTextEdit="1"/>
+              </p:cNvSpPr>
+              <p:nvPr/>
+            </p:nvSpPr>
+            <p:spPr>
+              <a:xfrm>
+                <a:off x="6718041" y="4856211"/>
+                <a:ext cx="709126" cy="307777"/>
+              </a:xfrm>
+              <a:prstGeom prst="rect">
+                <a:avLst/>
+              </a:prstGeom>
+              <a:blipFill>
+                <a:blip r:embed="rId7"/>
+                <a:stretch>
+                  <a:fillRect/>
+                </a:stretch>
+              </a:blipFill>
+            </p:spPr>
+            <p:txBody>
+              <a:bodyPr/>
+              <a:lstStyle/>
+              <a:p>
+                <a:r>
+                  <a:rPr lang="en-US">
+                    <a:noFill/>
+                  </a:rPr>
+                  <a:t> </a:t>
+                </a:r>
+              </a:p>
+            </p:txBody>
+          </p:sp>
+        </mc:Fallback>
+      </mc:AlternateContent>
+      <p:cxnSp>
+        <p:nvCxnSpPr>
+          <p:cNvPr id="108" name="직선 화살표 연결선 107">
+            <a:extLst>
+              <a:ext uri="{FF2B5EF4-FFF2-40B4-BE49-F238E27FC236}">
+                <a16:creationId xmlns:a16="http://schemas.microsoft.com/office/drawing/2014/main" id="{95A2BF74-FD27-DA01-3A42-09228EB46B0D}"/>
+              </a:ext>
+            </a:extLst>
+          </p:cNvPr>
+          <p:cNvCxnSpPr>
+            <a:cxnSpLocks/>
+          </p:cNvCxnSpPr>
+          <p:nvPr/>
+        </p:nvCxnSpPr>
+        <p:spPr>
+          <a:xfrm flipV="1">
+            <a:off x="5211148" y="1821586"/>
+            <a:ext cx="1222310" cy="475861"/>
+          </a:xfrm>
+          <a:prstGeom prst="straightConnector1">
+            <a:avLst/>
+          </a:prstGeom>
+          <a:ln w="19050">
+            <a:solidFill>
+              <a:schemeClr val="tx1"/>
+            </a:solidFill>
+            <a:tailEnd type="triangle"/>
+          </a:ln>
+        </p:spPr>
+        <p:style>
+          <a:lnRef idx="1">
+            <a:schemeClr val="accent1"/>
+          </a:lnRef>
+          <a:fillRef idx="0">
+            <a:schemeClr val="accent1"/>
+          </a:fillRef>
+          <a:effectRef idx="0">
+            <a:schemeClr val="accent1"/>
+          </a:effectRef>
+          <a:fontRef idx="minor">
+            <a:schemeClr val="tx1"/>
+          </a:fontRef>
+        </p:style>
+      </p:cxnSp>
+      <p:cxnSp>
+        <p:nvCxnSpPr>
+          <p:cNvPr id="113" name="직선 화살표 연결선 112">
+            <a:extLst>
+              <a:ext uri="{FF2B5EF4-FFF2-40B4-BE49-F238E27FC236}">
+                <a16:creationId xmlns:a16="http://schemas.microsoft.com/office/drawing/2014/main" id="{61D1A829-D243-90B1-1894-AA29F7EF9267}"/>
+              </a:ext>
+            </a:extLst>
+          </p:cNvPr>
+          <p:cNvCxnSpPr>
+            <a:cxnSpLocks/>
+          </p:cNvCxnSpPr>
+          <p:nvPr/>
+        </p:nvCxnSpPr>
+        <p:spPr>
+          <a:xfrm>
+            <a:off x="5211148" y="2297447"/>
+            <a:ext cx="1184989" cy="475861"/>
+          </a:xfrm>
+          <a:prstGeom prst="straightConnector1">
+            <a:avLst/>
+          </a:prstGeom>
+          <a:ln w="19050">
+            <a:solidFill>
+              <a:schemeClr val="tx1"/>
+            </a:solidFill>
+            <a:tailEnd type="triangle"/>
+          </a:ln>
+        </p:spPr>
+        <p:style>
+          <a:lnRef idx="1">
+            <a:schemeClr val="accent1"/>
+          </a:lnRef>
+          <a:fillRef idx="0">
+            <a:schemeClr val="accent1"/>
+          </a:fillRef>
+          <a:effectRef idx="0">
+            <a:schemeClr val="accent1"/>
+          </a:effectRef>
+          <a:fontRef idx="minor">
+            <a:schemeClr val="tx1"/>
+          </a:fontRef>
+        </p:style>
+      </p:cxnSp>
+      <mc:AlternateContent xmlns:mc="http://schemas.openxmlformats.org/markup-compatibility/2006">
+        <mc:Choice xmlns:a14="http://schemas.microsoft.com/office/drawing/2010/main" Requires="a14">
+          <p:sp>
+            <p:nvSpPr>
+              <p:cNvPr id="115" name="TextBox 114">
+                <a:extLst>
+                  <a:ext uri="{FF2B5EF4-FFF2-40B4-BE49-F238E27FC236}">
+                    <a16:creationId xmlns:a16="http://schemas.microsoft.com/office/drawing/2014/main" id="{5BBB0D72-449E-9435-2AE1-716081BE20EC}"/>
+                  </a:ext>
+                </a:extLst>
+              </p:cNvPr>
+              <p:cNvSpPr txBox="1"/>
+              <p:nvPr/>
+            </p:nvSpPr>
+            <p:spPr>
+              <a:xfrm>
+                <a:off x="5376770" y="1798471"/>
+                <a:ext cx="709126" cy="307777"/>
+              </a:xfrm>
+              <a:prstGeom prst="rect">
+                <a:avLst/>
+              </a:prstGeom>
+              <a:noFill/>
+            </p:spPr>
+            <p:txBody>
+              <a:bodyPr wrap="square" rtlCol="0">
+                <a:spAutoFit/>
+              </a:bodyPr>
+              <a:lstStyle/>
+              <a:p>
+                <a:pPr/>
+                <a14:m>
+                  <m:oMathPara xmlns:m="http://schemas.openxmlformats.org/officeDocument/2006/math">
+                    <m:oMathParaPr>
+                      <m:jc m:val="center"/>
+                    </m:oMathParaPr>
+                    <m:oMath xmlns:m="http://schemas.openxmlformats.org/officeDocument/2006/math">
+                      <m:r>
+                        <a:rPr lang="en-US" sz="1400" b="0" i="1" dirty="0" smtClean="0">
+                          <a:solidFill>
+                            <a:schemeClr val="tx1"/>
+                          </a:solidFill>
+                          <a:latin typeface="Cambria Math" panose="02040503050406030204" pitchFamily="18" charset="0"/>
+                        </a:rPr>
+                        <m:t>0</m:t>
+                      </m:r>
+                      <m:r>
+                        <a:rPr lang="en-US" sz="1400" b="0" i="1" dirty="0" smtClean="0">
+                          <a:solidFill>
+                            <a:schemeClr val="tx1"/>
+                          </a:solidFill>
+                          <a:latin typeface="Cambria Math" panose="02040503050406030204" pitchFamily="18" charset="0"/>
+                        </a:rPr>
+                        <m:t>.</m:t>
+                      </m:r>
+                      <m:r>
+                        <a:rPr lang="en-US" sz="1400" b="0" i="1" dirty="0" smtClean="0">
+                          <a:solidFill>
+                            <a:schemeClr val="tx1"/>
+                          </a:solidFill>
+                          <a:latin typeface="Cambria Math" panose="02040503050406030204" pitchFamily="18" charset="0"/>
+                        </a:rPr>
+                        <m:t>9</m:t>
+                      </m:r>
+                    </m:oMath>
+                  </m:oMathPara>
+                </a14:m>
+                <a:endParaRPr lang="en-US" sz="1400" dirty="0">
+                  <a:solidFill>
+                    <a:schemeClr val="tx1"/>
+                  </a:solidFill>
+                </a:endParaRPr>
+              </a:p>
+            </p:txBody>
+          </p:sp>
+        </mc:Choice>
+        <mc:Fallback>
+          <p:sp>
+            <p:nvSpPr>
+              <p:cNvPr id="115" name="TextBox 114">
+                <a:extLst>
+                  <a:ext uri="{FF2B5EF4-FFF2-40B4-BE49-F238E27FC236}">
+                    <a16:creationId xmlns:a16="http://schemas.microsoft.com/office/drawing/2014/main" id="{5BBB0D72-449E-9435-2AE1-716081BE20EC}"/>
+                  </a:ext>
+                </a:extLst>
+              </p:cNvPr>
+              <p:cNvSpPr txBox="1">
+                <a:spLocks noRot="1" noChangeAspect="1" noMove="1" noResize="1" noEditPoints="1" noAdjustHandles="1" noChangeArrowheads="1" noChangeShapeType="1" noTextEdit="1"/>
+              </p:cNvSpPr>
+              <p:nvPr/>
+            </p:nvSpPr>
+            <p:spPr>
+              <a:xfrm>
+                <a:off x="5376770" y="1798471"/>
+                <a:ext cx="709126" cy="307777"/>
+              </a:xfrm>
+              <a:prstGeom prst="rect">
+                <a:avLst/>
+              </a:prstGeom>
+              <a:blipFill>
+                <a:blip r:embed="rId9"/>
+                <a:stretch>
+                  <a:fillRect/>
+                </a:stretch>
+              </a:blipFill>
+            </p:spPr>
+            <p:txBody>
+              <a:bodyPr/>
+              <a:lstStyle/>
+              <a:p>
+                <a:r>
+                  <a:rPr lang="en-US">
+                    <a:noFill/>
+                  </a:rPr>
+                  <a:t> </a:t>
+                </a:r>
+              </a:p>
+            </p:txBody>
+          </p:sp>
+        </mc:Fallback>
+      </mc:AlternateContent>
+      <mc:AlternateContent xmlns:mc="http://schemas.openxmlformats.org/markup-compatibility/2006">
+        <mc:Choice xmlns:a14="http://schemas.microsoft.com/office/drawing/2010/main" Requires="a14">
+          <p:sp>
+            <p:nvSpPr>
+              <p:cNvPr id="116" name="TextBox 115">
+                <a:extLst>
+                  <a:ext uri="{FF2B5EF4-FFF2-40B4-BE49-F238E27FC236}">
+                    <a16:creationId xmlns:a16="http://schemas.microsoft.com/office/drawing/2014/main" id="{661AA3B2-CB48-6AC6-51C9-330EB38934AA}"/>
+                  </a:ext>
+                </a:extLst>
+              </p:cNvPr>
+              <p:cNvSpPr txBox="1"/>
+              <p:nvPr/>
+            </p:nvSpPr>
+            <p:spPr>
+              <a:xfrm>
+                <a:off x="5376770" y="2502477"/>
+                <a:ext cx="709126" cy="307777"/>
+              </a:xfrm>
+              <a:prstGeom prst="rect">
+                <a:avLst/>
+              </a:prstGeom>
+              <a:noFill/>
+            </p:spPr>
+            <p:txBody>
+              <a:bodyPr wrap="square" rtlCol="0">
+                <a:spAutoFit/>
+              </a:bodyPr>
+              <a:lstStyle/>
+              <a:p>
+                <a:pPr/>
+                <a14:m>
+                  <m:oMathPara xmlns:m="http://schemas.openxmlformats.org/officeDocument/2006/math">
+                    <m:oMathParaPr>
+                      <m:jc m:val="center"/>
+                    </m:oMathParaPr>
+                    <m:oMath xmlns:m="http://schemas.openxmlformats.org/officeDocument/2006/math">
+                      <m:r>
+                        <a:rPr lang="en-US" sz="1400" b="0" i="1" dirty="0" smtClean="0">
+                          <a:solidFill>
+                            <a:schemeClr val="tx1"/>
+                          </a:solidFill>
+                          <a:latin typeface="Cambria Math" panose="02040503050406030204" pitchFamily="18" charset="0"/>
+                        </a:rPr>
+                        <m:t>0</m:t>
+                      </m:r>
+                      <m:r>
+                        <a:rPr lang="en-US" sz="1400" b="0" i="1" dirty="0" smtClean="0">
+                          <a:solidFill>
+                            <a:schemeClr val="tx1"/>
+                          </a:solidFill>
+                          <a:latin typeface="Cambria Math" panose="02040503050406030204" pitchFamily="18" charset="0"/>
+                        </a:rPr>
+                        <m:t>.</m:t>
+                      </m:r>
+                      <m:r>
+                        <a:rPr lang="en-US" sz="1400" b="0" i="1" dirty="0" smtClean="0">
+                          <a:solidFill>
+                            <a:schemeClr val="tx1"/>
+                          </a:solidFill>
+                          <a:latin typeface="Cambria Math" panose="02040503050406030204" pitchFamily="18" charset="0"/>
+                        </a:rPr>
+                        <m:t>1</m:t>
+                      </m:r>
+                    </m:oMath>
+                  </m:oMathPara>
+                </a14:m>
+                <a:endParaRPr lang="en-US" sz="1400" dirty="0">
+                  <a:solidFill>
+                    <a:schemeClr val="tx1"/>
+                  </a:solidFill>
+                </a:endParaRPr>
+              </a:p>
+            </p:txBody>
+          </p:sp>
+        </mc:Choice>
+        <mc:Fallback>
+          <p:sp>
+            <p:nvSpPr>
+              <p:cNvPr id="116" name="TextBox 115">
+                <a:extLst>
+                  <a:ext uri="{FF2B5EF4-FFF2-40B4-BE49-F238E27FC236}">
+                    <a16:creationId xmlns:a16="http://schemas.microsoft.com/office/drawing/2014/main" id="{661AA3B2-CB48-6AC6-51C9-330EB38934AA}"/>
+                  </a:ext>
+                </a:extLst>
+              </p:cNvPr>
+              <p:cNvSpPr txBox="1">
+                <a:spLocks noRot="1" noChangeAspect="1" noMove="1" noResize="1" noEditPoints="1" noAdjustHandles="1" noChangeArrowheads="1" noChangeShapeType="1" noTextEdit="1"/>
+              </p:cNvSpPr>
+              <p:nvPr/>
+            </p:nvSpPr>
+            <p:spPr>
+              <a:xfrm>
+                <a:off x="5376770" y="2502477"/>
+                <a:ext cx="709126" cy="307777"/>
+              </a:xfrm>
+              <a:prstGeom prst="rect">
+                <a:avLst/>
+              </a:prstGeom>
+              <a:blipFill>
+                <a:blip r:embed="rId10"/>
+                <a:stretch>
+                  <a:fillRect/>
+                </a:stretch>
+              </a:blipFill>
+            </p:spPr>
+            <p:txBody>
+              <a:bodyPr/>
+              <a:lstStyle/>
+              <a:p>
+                <a:r>
+                  <a:rPr lang="en-US">
+                    <a:noFill/>
+                  </a:rPr>
+                  <a:t> </a:t>
+                </a:r>
+              </a:p>
+            </p:txBody>
+          </p:sp>
+        </mc:Fallback>
+      </mc:AlternateContent>
+      <mc:AlternateContent xmlns:mc="http://schemas.openxmlformats.org/markup-compatibility/2006">
+        <mc:Choice xmlns:a14="http://schemas.microsoft.com/office/drawing/2010/main" Requires="a14">
+          <p:sp>
+            <p:nvSpPr>
+              <p:cNvPr id="118" name="TextBox 117">
+                <a:extLst>
+                  <a:ext uri="{FF2B5EF4-FFF2-40B4-BE49-F238E27FC236}">
+                    <a16:creationId xmlns:a16="http://schemas.microsoft.com/office/drawing/2014/main" id="{EA24814E-24A8-F410-6DA7-CEF25A1C1BAF}"/>
+                  </a:ext>
+                </a:extLst>
+              </p:cNvPr>
+              <p:cNvSpPr txBox="1"/>
+              <p:nvPr/>
+            </p:nvSpPr>
+            <p:spPr>
+              <a:xfrm>
+                <a:off x="6718041" y="1355056"/>
+                <a:ext cx="709126" cy="307777"/>
+              </a:xfrm>
+              <a:prstGeom prst="rect">
+                <a:avLst/>
+              </a:prstGeom>
+              <a:noFill/>
+            </p:spPr>
+            <p:txBody>
+              <a:bodyPr wrap="square" rtlCol="0">
+                <a:spAutoFit/>
+              </a:bodyPr>
+              <a:lstStyle/>
+              <a:p>
+                <a:pPr/>
+                <a14:m>
+                  <m:oMathPara xmlns:m="http://schemas.openxmlformats.org/officeDocument/2006/math">
+                    <m:oMathParaPr>
+                      <m:jc m:val="center"/>
+                    </m:oMathParaPr>
+                    <m:oMath xmlns:m="http://schemas.openxmlformats.org/officeDocument/2006/math">
+                      <m:r>
+                        <a:rPr lang="en-US" sz="1400" b="0" i="1" dirty="0" smtClean="0">
+                          <a:solidFill>
+                            <a:schemeClr val="tx1"/>
+                          </a:solidFill>
+                          <a:latin typeface="Cambria Math" panose="02040503050406030204" pitchFamily="18" charset="0"/>
+                        </a:rPr>
+                        <m:t>0</m:t>
+                      </m:r>
+                      <m:r>
+                        <a:rPr lang="en-US" sz="1400" b="0" i="1" dirty="0" smtClean="0">
+                          <a:solidFill>
+                            <a:schemeClr val="tx1"/>
+                          </a:solidFill>
+                          <a:latin typeface="Cambria Math" panose="02040503050406030204" pitchFamily="18" charset="0"/>
+                        </a:rPr>
+                        <m:t>.</m:t>
+                      </m:r>
+                      <m:r>
+                        <a:rPr lang="en-US" sz="1400" b="0" i="1" dirty="0" smtClean="0">
+                          <a:solidFill>
+                            <a:schemeClr val="tx1"/>
+                          </a:solidFill>
+                          <a:latin typeface="Cambria Math" panose="02040503050406030204" pitchFamily="18" charset="0"/>
+                        </a:rPr>
+                        <m:t>9</m:t>
+                      </m:r>
+                    </m:oMath>
+                  </m:oMathPara>
+                </a14:m>
+                <a:endParaRPr lang="en-US" sz="1400" dirty="0">
+                  <a:solidFill>
+                    <a:schemeClr val="tx1"/>
+                  </a:solidFill>
+                </a:endParaRPr>
+              </a:p>
+            </p:txBody>
+          </p:sp>
+        </mc:Choice>
+        <mc:Fallback>
+          <p:sp>
+            <p:nvSpPr>
+              <p:cNvPr id="118" name="TextBox 117">
+                <a:extLst>
+                  <a:ext uri="{FF2B5EF4-FFF2-40B4-BE49-F238E27FC236}">
+                    <a16:creationId xmlns:a16="http://schemas.microsoft.com/office/drawing/2014/main" id="{EA24814E-24A8-F410-6DA7-CEF25A1C1BAF}"/>
+                  </a:ext>
+                </a:extLst>
+              </p:cNvPr>
+              <p:cNvSpPr txBox="1">
+                <a:spLocks noRot="1" noChangeAspect="1" noMove="1" noResize="1" noEditPoints="1" noAdjustHandles="1" noChangeArrowheads="1" noChangeShapeType="1" noTextEdit="1"/>
+              </p:cNvSpPr>
+              <p:nvPr/>
+            </p:nvSpPr>
+            <p:spPr>
+              <a:xfrm>
+                <a:off x="6718041" y="1355056"/>
+                <a:ext cx="709126" cy="307777"/>
+              </a:xfrm>
+              <a:prstGeom prst="rect">
+                <a:avLst/>
+              </a:prstGeom>
+              <a:blipFill>
+                <a:blip r:embed="rId9"/>
+                <a:stretch>
+                  <a:fillRect/>
+                </a:stretch>
+              </a:blipFill>
+            </p:spPr>
+            <p:txBody>
+              <a:bodyPr/>
+              <a:lstStyle/>
+              <a:p>
+                <a:r>
+                  <a:rPr lang="en-US">
+                    <a:noFill/>
+                  </a:rPr>
+                  <a:t> </a:t>
+                </a:r>
+              </a:p>
+            </p:txBody>
+          </p:sp>
+        </mc:Fallback>
+      </mc:AlternateContent>
+      <mc:AlternateContent xmlns:mc="http://schemas.openxmlformats.org/markup-compatibility/2006">
+        <mc:Choice xmlns:a14="http://schemas.microsoft.com/office/drawing/2010/main" Requires="a14">
+          <p:sp>
+            <p:nvSpPr>
+              <p:cNvPr id="119" name="TextBox 118">
+                <a:extLst>
+                  <a:ext uri="{FF2B5EF4-FFF2-40B4-BE49-F238E27FC236}">
+                    <a16:creationId xmlns:a16="http://schemas.microsoft.com/office/drawing/2014/main" id="{DFC92EA3-47C5-6198-0F7C-745D74D4173F}"/>
+                  </a:ext>
+                </a:extLst>
+              </p:cNvPr>
+              <p:cNvSpPr txBox="1"/>
+              <p:nvPr/>
+            </p:nvSpPr>
+            <p:spPr>
+              <a:xfrm>
+                <a:off x="6718041" y="2395485"/>
+                <a:ext cx="709126" cy="307777"/>
+              </a:xfrm>
+              <a:prstGeom prst="rect">
+                <a:avLst/>
+              </a:prstGeom>
+              <a:noFill/>
+            </p:spPr>
+            <p:txBody>
+              <a:bodyPr wrap="square" rtlCol="0">
+                <a:spAutoFit/>
+              </a:bodyPr>
+              <a:lstStyle/>
+              <a:p>
+                <a:pPr/>
+                <a14:m>
+                  <m:oMathPara xmlns:m="http://schemas.openxmlformats.org/officeDocument/2006/math">
+                    <m:oMathParaPr>
+                      <m:jc m:val="center"/>
+                    </m:oMathParaPr>
+                    <m:oMath xmlns:m="http://schemas.openxmlformats.org/officeDocument/2006/math">
+                      <m:r>
+                        <a:rPr lang="en-US" sz="1400" b="0" i="1" dirty="0" smtClean="0">
+                          <a:solidFill>
+                            <a:schemeClr val="tx1"/>
+                          </a:solidFill>
+                          <a:latin typeface="Cambria Math" panose="02040503050406030204" pitchFamily="18" charset="0"/>
+                        </a:rPr>
+                        <m:t>0</m:t>
+                      </m:r>
+                      <m:r>
+                        <a:rPr lang="en-US" sz="1400" b="0" i="1" dirty="0" smtClean="0">
+                          <a:solidFill>
+                            <a:schemeClr val="tx1"/>
+                          </a:solidFill>
+                          <a:latin typeface="Cambria Math" panose="02040503050406030204" pitchFamily="18" charset="0"/>
+                        </a:rPr>
+                        <m:t>.</m:t>
+                      </m:r>
+                      <m:r>
+                        <a:rPr lang="en-US" sz="1400" b="0" i="1" dirty="0" smtClean="0">
+                          <a:solidFill>
+                            <a:schemeClr val="tx1"/>
+                          </a:solidFill>
+                          <a:latin typeface="Cambria Math" panose="02040503050406030204" pitchFamily="18" charset="0"/>
+                        </a:rPr>
+                        <m:t>9</m:t>
+                      </m:r>
+                    </m:oMath>
+                  </m:oMathPara>
+                </a14:m>
+                <a:endParaRPr lang="en-US" sz="1400" dirty="0">
+                  <a:solidFill>
+                    <a:schemeClr val="tx1"/>
+                  </a:solidFill>
+                </a:endParaRPr>
+              </a:p>
+            </p:txBody>
+          </p:sp>
+        </mc:Choice>
+        <mc:Fallback>
+          <p:sp>
+            <p:nvSpPr>
+              <p:cNvPr id="119" name="TextBox 118">
+                <a:extLst>
+                  <a:ext uri="{FF2B5EF4-FFF2-40B4-BE49-F238E27FC236}">
+                    <a16:creationId xmlns:a16="http://schemas.microsoft.com/office/drawing/2014/main" id="{DFC92EA3-47C5-6198-0F7C-745D74D4173F}"/>
+                  </a:ext>
+                </a:extLst>
+              </p:cNvPr>
+              <p:cNvSpPr txBox="1">
+                <a:spLocks noRot="1" noChangeAspect="1" noMove="1" noResize="1" noEditPoints="1" noAdjustHandles="1" noChangeArrowheads="1" noChangeShapeType="1" noTextEdit="1"/>
+              </p:cNvSpPr>
+              <p:nvPr/>
+            </p:nvSpPr>
+            <p:spPr>
+              <a:xfrm>
+                <a:off x="6718041" y="2395485"/>
+                <a:ext cx="709126" cy="307777"/>
+              </a:xfrm>
+              <a:prstGeom prst="rect">
+                <a:avLst/>
+              </a:prstGeom>
+              <a:blipFill>
+                <a:blip r:embed="rId7"/>
+                <a:stretch>
+                  <a:fillRect/>
+                </a:stretch>
+              </a:blipFill>
+            </p:spPr>
+            <p:txBody>
+              <a:bodyPr/>
+              <a:lstStyle/>
+              <a:p>
+                <a:r>
+                  <a:rPr lang="en-US">
+                    <a:noFill/>
+                  </a:rPr>
+                  <a:t> </a:t>
+                </a:r>
+              </a:p>
+            </p:txBody>
+          </p:sp>
+        </mc:Fallback>
+      </mc:AlternateContent>
+      <mc:AlternateContent xmlns:mc="http://schemas.openxmlformats.org/markup-compatibility/2006">
+        <mc:Choice xmlns:a14="http://schemas.microsoft.com/office/drawing/2010/main" Requires="a14">
+          <p:sp>
+            <p:nvSpPr>
+              <p:cNvPr id="121" name="TextBox 120">
+                <a:extLst>
+                  <a:ext uri="{FF2B5EF4-FFF2-40B4-BE49-F238E27FC236}">
+                    <a16:creationId xmlns:a16="http://schemas.microsoft.com/office/drawing/2014/main" id="{D5043DB4-A8F5-3B25-FC41-2C935E782113}"/>
+                  </a:ext>
+                </a:extLst>
+              </p:cNvPr>
+              <p:cNvSpPr txBox="1"/>
+              <p:nvPr/>
+            </p:nvSpPr>
+            <p:spPr>
+              <a:xfrm>
+                <a:off x="6718041" y="1919757"/>
+                <a:ext cx="709126" cy="307777"/>
+              </a:xfrm>
+              <a:prstGeom prst="rect">
+                <a:avLst/>
+              </a:prstGeom>
+              <a:noFill/>
+            </p:spPr>
+            <p:txBody>
+              <a:bodyPr wrap="square" rtlCol="0">
+                <a:spAutoFit/>
+              </a:bodyPr>
+              <a:lstStyle/>
+              <a:p>
+                <a:pPr/>
+                <a14:m>
+                  <m:oMathPara xmlns:m="http://schemas.openxmlformats.org/officeDocument/2006/math">
+                    <m:oMathParaPr>
+                      <m:jc m:val="center"/>
+                    </m:oMathParaPr>
+                    <m:oMath xmlns:m="http://schemas.openxmlformats.org/officeDocument/2006/math">
+                      <m:r>
+                        <a:rPr lang="en-US" sz="1400" b="0" i="1" dirty="0" smtClean="0">
+                          <a:solidFill>
+                            <a:schemeClr val="tx1"/>
+                          </a:solidFill>
+                          <a:latin typeface="Cambria Math" panose="02040503050406030204" pitchFamily="18" charset="0"/>
+                        </a:rPr>
+                        <m:t>0</m:t>
+                      </m:r>
+                      <m:r>
+                        <a:rPr lang="en-US" sz="1400" b="0" i="1" dirty="0" smtClean="0">
+                          <a:solidFill>
+                            <a:schemeClr val="tx1"/>
+                          </a:solidFill>
+                          <a:latin typeface="Cambria Math" panose="02040503050406030204" pitchFamily="18" charset="0"/>
+                        </a:rPr>
+                        <m:t>.</m:t>
+                      </m:r>
+                      <m:r>
+                        <a:rPr lang="en-US" sz="1400" b="0" i="1" dirty="0" smtClean="0">
+                          <a:solidFill>
+                            <a:schemeClr val="tx1"/>
+                          </a:solidFill>
+                          <a:latin typeface="Cambria Math" panose="02040503050406030204" pitchFamily="18" charset="0"/>
+                        </a:rPr>
+                        <m:t>1</m:t>
+                      </m:r>
+                    </m:oMath>
+                  </m:oMathPara>
+                </a14:m>
+                <a:endParaRPr lang="en-US" sz="1400" dirty="0">
+                  <a:solidFill>
+                    <a:schemeClr val="tx1"/>
+                  </a:solidFill>
+                </a:endParaRPr>
+              </a:p>
+            </p:txBody>
+          </p:sp>
+        </mc:Choice>
+        <mc:Fallback>
+          <p:sp>
+            <p:nvSpPr>
+              <p:cNvPr id="121" name="TextBox 120">
+                <a:extLst>
+                  <a:ext uri="{FF2B5EF4-FFF2-40B4-BE49-F238E27FC236}">
+                    <a16:creationId xmlns:a16="http://schemas.microsoft.com/office/drawing/2014/main" id="{D5043DB4-A8F5-3B25-FC41-2C935E782113}"/>
+                  </a:ext>
+                </a:extLst>
+              </p:cNvPr>
+              <p:cNvSpPr txBox="1">
+                <a:spLocks noRot="1" noChangeAspect="1" noMove="1" noResize="1" noEditPoints="1" noAdjustHandles="1" noChangeArrowheads="1" noChangeShapeType="1" noTextEdit="1"/>
+              </p:cNvSpPr>
+              <p:nvPr/>
+            </p:nvSpPr>
+            <p:spPr>
+              <a:xfrm>
+                <a:off x="6718041" y="1919757"/>
+                <a:ext cx="709126" cy="307777"/>
+              </a:xfrm>
+              <a:prstGeom prst="rect">
+                <a:avLst/>
+              </a:prstGeom>
+              <a:blipFill>
+                <a:blip r:embed="rId10"/>
+                <a:stretch>
+                  <a:fillRect/>
+                </a:stretch>
+              </a:blipFill>
+            </p:spPr>
+            <p:txBody>
+              <a:bodyPr/>
+              <a:lstStyle/>
+              <a:p>
+                <a:r>
+                  <a:rPr lang="en-US">
+                    <a:noFill/>
+                  </a:rPr>
+                  <a:t> </a:t>
+                </a:r>
+              </a:p>
+            </p:txBody>
+          </p:sp>
+        </mc:Fallback>
+      </mc:AlternateContent>
+      <mc:AlternateContent xmlns:mc="http://schemas.openxmlformats.org/markup-compatibility/2006">
+        <mc:Choice xmlns:a14="http://schemas.microsoft.com/office/drawing/2010/main" Requires="a14">
+          <p:sp>
+            <p:nvSpPr>
+              <p:cNvPr id="122" name="TextBox 121">
+                <a:extLst>
+                  <a:ext uri="{FF2B5EF4-FFF2-40B4-BE49-F238E27FC236}">
+                    <a16:creationId xmlns:a16="http://schemas.microsoft.com/office/drawing/2014/main" id="{887F02DC-E3E0-3346-70F4-8A6D165ECEDB}"/>
+                  </a:ext>
+                </a:extLst>
+              </p:cNvPr>
+              <p:cNvSpPr txBox="1"/>
+              <p:nvPr/>
+            </p:nvSpPr>
+            <p:spPr>
+              <a:xfrm>
+                <a:off x="6718041" y="2899338"/>
+                <a:ext cx="709126" cy="307777"/>
+              </a:xfrm>
+              <a:prstGeom prst="rect">
+                <a:avLst/>
+              </a:prstGeom>
+              <a:noFill/>
+            </p:spPr>
+            <p:txBody>
+              <a:bodyPr wrap="square" rtlCol="0">
+                <a:spAutoFit/>
+              </a:bodyPr>
+              <a:lstStyle/>
+              <a:p>
+                <a:pPr/>
+                <a14:m>
+                  <m:oMathPara xmlns:m="http://schemas.openxmlformats.org/officeDocument/2006/math">
+                    <m:oMathParaPr>
+                      <m:jc m:val="center"/>
+                    </m:oMathParaPr>
+                    <m:oMath xmlns:m="http://schemas.openxmlformats.org/officeDocument/2006/math">
+                      <m:r>
+                        <a:rPr lang="en-US" sz="1400" b="0" i="1" dirty="0" smtClean="0">
+                          <a:solidFill>
+                            <a:schemeClr val="tx1"/>
+                          </a:solidFill>
+                          <a:latin typeface="Cambria Math" panose="02040503050406030204" pitchFamily="18" charset="0"/>
+                        </a:rPr>
+                        <m:t>0</m:t>
+                      </m:r>
+                      <m:r>
+                        <a:rPr lang="en-US" sz="1400" b="0" i="1" dirty="0" smtClean="0">
+                          <a:solidFill>
+                            <a:schemeClr val="tx1"/>
+                          </a:solidFill>
+                          <a:latin typeface="Cambria Math" panose="02040503050406030204" pitchFamily="18" charset="0"/>
+                        </a:rPr>
+                        <m:t>.</m:t>
+                      </m:r>
+                      <m:r>
+                        <a:rPr lang="en-US" sz="1400" b="0" i="1" dirty="0" smtClean="0">
+                          <a:solidFill>
+                            <a:schemeClr val="tx1"/>
+                          </a:solidFill>
+                          <a:latin typeface="Cambria Math" panose="02040503050406030204" pitchFamily="18" charset="0"/>
+                        </a:rPr>
+                        <m:t>1</m:t>
+                      </m:r>
+                    </m:oMath>
+                  </m:oMathPara>
+                </a14:m>
+                <a:endParaRPr lang="en-US" sz="1400" dirty="0">
+                  <a:solidFill>
+                    <a:schemeClr val="tx1"/>
+                  </a:solidFill>
+                </a:endParaRPr>
+              </a:p>
+            </p:txBody>
+          </p:sp>
+        </mc:Choice>
+        <mc:Fallback>
+          <p:sp>
+            <p:nvSpPr>
+              <p:cNvPr id="122" name="TextBox 121">
+                <a:extLst>
+                  <a:ext uri="{FF2B5EF4-FFF2-40B4-BE49-F238E27FC236}">
+                    <a16:creationId xmlns:a16="http://schemas.microsoft.com/office/drawing/2014/main" id="{887F02DC-E3E0-3346-70F4-8A6D165ECEDB}"/>
+                  </a:ext>
+                </a:extLst>
+              </p:cNvPr>
+              <p:cNvSpPr txBox="1">
+                <a:spLocks noRot="1" noChangeAspect="1" noMove="1" noResize="1" noEditPoints="1" noAdjustHandles="1" noChangeArrowheads="1" noChangeShapeType="1" noTextEdit="1"/>
+              </p:cNvSpPr>
+              <p:nvPr/>
+            </p:nvSpPr>
+            <p:spPr>
+              <a:xfrm>
+                <a:off x="6718041" y="2899338"/>
+                <a:ext cx="709126" cy="307777"/>
+              </a:xfrm>
+              <a:prstGeom prst="rect">
+                <a:avLst/>
+              </a:prstGeom>
+              <a:blipFill>
+                <a:blip r:embed="rId10"/>
+                <a:stretch>
+                  <a:fillRect/>
+                </a:stretch>
+              </a:blipFill>
+            </p:spPr>
+            <p:txBody>
+              <a:bodyPr/>
+              <a:lstStyle/>
+              <a:p>
+                <a:r>
+                  <a:rPr lang="en-US">
+                    <a:noFill/>
+                  </a:rPr>
+                  <a:t> </a:t>
+                </a:r>
+              </a:p>
+            </p:txBody>
+          </p:sp>
+        </mc:Fallback>
+      </mc:AlternateContent>
+      <mc:AlternateContent xmlns:mc="http://schemas.openxmlformats.org/markup-compatibility/2006">
+        <mc:Choice xmlns:a14="http://schemas.microsoft.com/office/drawing/2010/main" Requires="a14">
+          <p:sp>
+            <p:nvSpPr>
+              <p:cNvPr id="123" name="TextBox 122">
+                <a:extLst>
+                  <a:ext uri="{FF2B5EF4-FFF2-40B4-BE49-F238E27FC236}">
+                    <a16:creationId xmlns:a16="http://schemas.microsoft.com/office/drawing/2014/main" id="{10B7D3D1-6037-ADD6-F8B3-E3B3D81118CC}"/>
+                  </a:ext>
+                </a:extLst>
+              </p:cNvPr>
+              <p:cNvSpPr txBox="1"/>
+              <p:nvPr/>
+            </p:nvSpPr>
+            <p:spPr>
+              <a:xfrm>
+                <a:off x="1808583" y="2546174"/>
+                <a:ext cx="2100946" cy="400110"/>
+              </a:xfrm>
+              <a:prstGeom prst="rect">
+                <a:avLst/>
+              </a:prstGeom>
+              <a:noFill/>
+            </p:spPr>
+            <p:txBody>
+              <a:bodyPr wrap="square" rtlCol="0">
+                <a:spAutoFit/>
+              </a:bodyPr>
+              <a:lstStyle/>
+              <a:p>
+                <a:pPr/>
+                <a14:m>
+                  <m:oMath xmlns:m="http://schemas.openxmlformats.org/officeDocument/2006/math">
+                    <m:r>
+                      <a:rPr lang="en-US" sz="1600" b="0" i="1" dirty="0" smtClean="0">
+                        <a:solidFill>
+                          <a:schemeClr val="tx1"/>
+                        </a:solidFill>
+                        <a:latin typeface="Cambria Math" panose="02040503050406030204" pitchFamily="18" charset="0"/>
+                      </a:rPr>
+                      <m:t>𝑃</m:t>
+                    </m:r>
+                    <m:d>
+                      <m:dPr>
+                        <m:endChr m:val="|"/>
+                        <m:ctrlPr>
+                          <a:rPr lang="en-US" sz="1600" i="1" dirty="0" smtClean="0">
+                            <a:solidFill>
+                              <a:schemeClr val="tx1"/>
+                            </a:solidFill>
+                            <a:latin typeface="Cambria Math" panose="02040503050406030204" pitchFamily="18" charset="0"/>
+                          </a:rPr>
+                        </m:ctrlPr>
+                      </m:dPr>
+                      <m:e>
+                        <m:r>
+                          <a:rPr lang="en-US" sz="1600" b="0" i="1" dirty="0" smtClean="0">
+                            <a:solidFill>
+                              <a:schemeClr val="tx1"/>
+                            </a:solidFill>
+                            <a:latin typeface="Cambria Math" panose="02040503050406030204" pitchFamily="18" charset="0"/>
+                          </a:rPr>
+                          <m:t>𝐻</m:t>
+                        </m:r>
+                        <m:r>
+                          <a:rPr lang="en-US" sz="1600" b="0" i="1" dirty="0" smtClean="0">
+                            <a:solidFill>
+                              <a:schemeClr val="tx1"/>
+                            </a:solidFill>
+                            <a:latin typeface="Cambria Math" panose="02040503050406030204" pitchFamily="18" charset="0"/>
+                          </a:rPr>
+                          <m:t> </m:t>
+                        </m:r>
+                      </m:e>
+                    </m:d>
+                  </m:oMath>
+                </a14:m>
+                <a:r>
+                  <a:rPr lang="en-US" sz="1600" dirty="0">
+                    <a:solidFill>
+                      <a:schemeClr val="tx1"/>
+                    </a:solidFill>
+                  </a:rPr>
+                  <a:t> coin</a:t>
+                </a:r>
+                <a:r>
+                  <a:rPr lang="en-US" sz="2000" dirty="0">
+                    <a:solidFill>
+                      <a:schemeClr val="tx1"/>
+                    </a:solidFill>
+                  </a:rPr>
+                  <a:t> </a:t>
+                </a:r>
+                <a14:m>
+                  <m:oMath xmlns:m="http://schemas.openxmlformats.org/officeDocument/2006/math">
+                    <m:r>
+                      <a:rPr lang="en-US" sz="1600" b="0" i="1" dirty="0">
+                        <a:latin typeface="Cambria Math" panose="02040503050406030204" pitchFamily="18" charset="0"/>
+                      </a:rPr>
+                      <m:t>𝐴</m:t>
+                    </m:r>
+                    <m:r>
+                      <a:rPr lang="en-US" sz="1600" b="0" i="1" dirty="0" smtClean="0">
+                        <a:latin typeface="Cambria Math" panose="02040503050406030204" pitchFamily="18" charset="0"/>
+                      </a:rPr>
+                      <m:t>)=</m:t>
+                    </m:r>
+                    <m:r>
+                      <a:rPr lang="en-US" sz="1600" b="0" i="1" dirty="0" smtClean="0">
+                        <a:latin typeface="Cambria Math" panose="02040503050406030204" pitchFamily="18" charset="0"/>
+                      </a:rPr>
+                      <m:t>0</m:t>
+                    </m:r>
+                    <m:r>
+                      <a:rPr lang="en-US" sz="1600" b="0" i="1" dirty="0" smtClean="0">
+                        <a:latin typeface="Cambria Math" panose="02040503050406030204" pitchFamily="18" charset="0"/>
+                      </a:rPr>
+                      <m:t>.</m:t>
+                    </m:r>
+                    <m:r>
+                      <a:rPr lang="en-US" sz="1600" b="0" i="1" dirty="0" smtClean="0">
+                        <a:latin typeface="Cambria Math" panose="02040503050406030204" pitchFamily="18" charset="0"/>
+                      </a:rPr>
+                      <m:t>9</m:t>
+                    </m:r>
+                  </m:oMath>
+                </a14:m>
+                <a:endParaRPr lang="ar-AE" sz="1600" dirty="0">
+                  <a:solidFill>
+                    <a:schemeClr val="tx1"/>
+                  </a:solidFill>
+                </a:endParaRPr>
+              </a:p>
+            </p:txBody>
+          </p:sp>
+        </mc:Choice>
+        <mc:Fallback>
+          <p:sp>
+            <p:nvSpPr>
+              <p:cNvPr id="123" name="TextBox 122">
+                <a:extLst>
+                  <a:ext uri="{FF2B5EF4-FFF2-40B4-BE49-F238E27FC236}">
+                    <a16:creationId xmlns:a16="http://schemas.microsoft.com/office/drawing/2014/main" id="{10B7D3D1-6037-ADD6-F8B3-E3B3D81118CC}"/>
+                  </a:ext>
+                </a:extLst>
+              </p:cNvPr>
+              <p:cNvSpPr txBox="1">
+                <a:spLocks noRot="1" noChangeAspect="1" noMove="1" noResize="1" noEditPoints="1" noAdjustHandles="1" noChangeArrowheads="1" noChangeShapeType="1" noTextEdit="1"/>
+              </p:cNvSpPr>
+              <p:nvPr/>
+            </p:nvSpPr>
+            <p:spPr>
+              <a:xfrm>
+                <a:off x="1808583" y="2546174"/>
+                <a:ext cx="2100946" cy="400110"/>
+              </a:xfrm>
+              <a:prstGeom prst="rect">
+                <a:avLst/>
+              </a:prstGeom>
+              <a:blipFill>
+                <a:blip r:embed="rId11"/>
+                <a:stretch>
+                  <a:fillRect b="-16923"/>
+                </a:stretch>
+              </a:blipFill>
+            </p:spPr>
+            <p:txBody>
+              <a:bodyPr/>
+              <a:lstStyle/>
+              <a:p>
+                <a:r>
+                  <a:rPr lang="en-US">
+                    <a:noFill/>
+                  </a:rPr>
+                  <a:t> </a:t>
+                </a:r>
+              </a:p>
+            </p:txBody>
+          </p:sp>
+        </mc:Fallback>
+      </mc:AlternateContent>
+      <mc:AlternateContent xmlns:mc="http://schemas.openxmlformats.org/markup-compatibility/2006">
+        <mc:Choice xmlns:a14="http://schemas.microsoft.com/office/drawing/2010/main" Requires="a14">
+          <p:sp>
+            <p:nvSpPr>
+              <p:cNvPr id="124" name="TextBox 123">
+                <a:extLst>
+                  <a:ext uri="{FF2B5EF4-FFF2-40B4-BE49-F238E27FC236}">
+                    <a16:creationId xmlns:a16="http://schemas.microsoft.com/office/drawing/2014/main" id="{7A4B1107-76CE-3191-1EEC-38148F129033}"/>
+                  </a:ext>
+                </a:extLst>
+              </p:cNvPr>
+              <p:cNvSpPr txBox="1"/>
+              <p:nvPr/>
+            </p:nvSpPr>
+            <p:spPr>
+              <a:xfrm>
+                <a:off x="1808582" y="2946284"/>
+                <a:ext cx="2100946" cy="400110"/>
+              </a:xfrm>
+              <a:prstGeom prst="rect">
+                <a:avLst/>
+              </a:prstGeom>
+              <a:noFill/>
+            </p:spPr>
+            <p:txBody>
+              <a:bodyPr wrap="square" rtlCol="0">
+                <a:spAutoFit/>
+              </a:bodyPr>
+              <a:lstStyle/>
+              <a:p>
+                <a:pPr/>
+                <a14:m>
+                  <m:oMath xmlns:m="http://schemas.openxmlformats.org/officeDocument/2006/math">
+                    <m:r>
+                      <a:rPr lang="en-US" sz="1600" b="0" i="1" dirty="0" smtClean="0">
+                        <a:solidFill>
+                          <a:schemeClr val="tx1"/>
+                        </a:solidFill>
+                        <a:latin typeface="Cambria Math" panose="02040503050406030204" pitchFamily="18" charset="0"/>
+                      </a:rPr>
+                      <m:t>𝑃</m:t>
+                    </m:r>
+                    <m:d>
+                      <m:dPr>
+                        <m:endChr m:val="|"/>
+                        <m:ctrlPr>
+                          <a:rPr lang="en-US" sz="1600" i="1" dirty="0" smtClean="0">
+                            <a:solidFill>
+                              <a:schemeClr val="tx1"/>
+                            </a:solidFill>
+                            <a:latin typeface="Cambria Math" panose="02040503050406030204" pitchFamily="18" charset="0"/>
+                          </a:rPr>
+                        </m:ctrlPr>
+                      </m:dPr>
+                      <m:e>
+                        <m:r>
+                          <a:rPr lang="en-US" sz="1600" b="0" i="1" dirty="0" smtClean="0">
+                            <a:solidFill>
+                              <a:schemeClr val="tx1"/>
+                            </a:solidFill>
+                            <a:latin typeface="Cambria Math" panose="02040503050406030204" pitchFamily="18" charset="0"/>
+                          </a:rPr>
+                          <m:t>𝐻</m:t>
+                        </m:r>
+                        <m:r>
+                          <a:rPr lang="en-US" sz="1600" b="0" i="1" dirty="0" smtClean="0">
+                            <a:solidFill>
+                              <a:schemeClr val="tx1"/>
+                            </a:solidFill>
+                            <a:latin typeface="Cambria Math" panose="02040503050406030204" pitchFamily="18" charset="0"/>
+                          </a:rPr>
+                          <m:t> </m:t>
+                        </m:r>
+                      </m:e>
+                    </m:d>
+                  </m:oMath>
+                </a14:m>
+                <a:r>
+                  <a:rPr lang="en-US" sz="1600" dirty="0">
+                    <a:solidFill>
+                      <a:schemeClr val="tx1"/>
+                    </a:solidFill>
+                  </a:rPr>
+                  <a:t> coin</a:t>
+                </a:r>
+                <a:r>
+                  <a:rPr lang="en-US" sz="2000" dirty="0">
+                    <a:solidFill>
+                      <a:schemeClr val="tx1"/>
+                    </a:solidFill>
+                  </a:rPr>
+                  <a:t> </a:t>
+                </a:r>
+                <a14:m>
+                  <m:oMath xmlns:m="http://schemas.openxmlformats.org/officeDocument/2006/math">
+                    <m:r>
+                      <a:rPr lang="en-US" sz="1600" b="0" i="1" dirty="0" smtClean="0">
+                        <a:latin typeface="Cambria Math" panose="02040503050406030204" pitchFamily="18" charset="0"/>
+                      </a:rPr>
+                      <m:t>𝐵</m:t>
+                    </m:r>
+                    <m:r>
+                      <a:rPr lang="en-US" sz="1600" b="0" i="1" dirty="0" smtClean="0">
+                        <a:latin typeface="Cambria Math" panose="02040503050406030204" pitchFamily="18" charset="0"/>
+                      </a:rPr>
+                      <m:t>)=</m:t>
+                    </m:r>
+                    <m:r>
+                      <a:rPr lang="en-US" sz="1600" b="0" i="1" dirty="0" smtClean="0">
+                        <a:latin typeface="Cambria Math" panose="02040503050406030204" pitchFamily="18" charset="0"/>
+                      </a:rPr>
+                      <m:t>0</m:t>
+                    </m:r>
+                    <m:r>
+                      <a:rPr lang="en-US" sz="1600" b="0" i="1" dirty="0" smtClean="0">
+                        <a:latin typeface="Cambria Math" panose="02040503050406030204" pitchFamily="18" charset="0"/>
+                      </a:rPr>
+                      <m:t>.</m:t>
+                    </m:r>
+                    <m:r>
+                      <a:rPr lang="en-US" sz="1600" b="0" i="1" dirty="0" smtClean="0">
+                        <a:latin typeface="Cambria Math" panose="02040503050406030204" pitchFamily="18" charset="0"/>
+                      </a:rPr>
+                      <m:t>1</m:t>
+                    </m:r>
+                  </m:oMath>
+                </a14:m>
+                <a:endParaRPr lang="ar-AE" sz="1600" dirty="0">
+                  <a:solidFill>
+                    <a:schemeClr val="tx1"/>
+                  </a:solidFill>
+                </a:endParaRPr>
+              </a:p>
+            </p:txBody>
+          </p:sp>
+        </mc:Choice>
+        <mc:Fallback>
+          <p:sp>
+            <p:nvSpPr>
+              <p:cNvPr id="124" name="TextBox 123">
+                <a:extLst>
+                  <a:ext uri="{FF2B5EF4-FFF2-40B4-BE49-F238E27FC236}">
+                    <a16:creationId xmlns:a16="http://schemas.microsoft.com/office/drawing/2014/main" id="{7A4B1107-76CE-3191-1EEC-38148F129033}"/>
+                  </a:ext>
+                </a:extLst>
+              </p:cNvPr>
+              <p:cNvSpPr txBox="1">
+                <a:spLocks noRot="1" noChangeAspect="1" noMove="1" noResize="1" noEditPoints="1" noAdjustHandles="1" noChangeArrowheads="1" noChangeShapeType="1" noTextEdit="1"/>
+              </p:cNvSpPr>
+              <p:nvPr/>
+            </p:nvSpPr>
+            <p:spPr>
+              <a:xfrm>
+                <a:off x="1808582" y="2946284"/>
+                <a:ext cx="2100946" cy="400110"/>
+              </a:xfrm>
+              <a:prstGeom prst="rect">
+                <a:avLst/>
+              </a:prstGeom>
+              <a:blipFill>
+                <a:blip r:embed="rId12"/>
+                <a:stretch>
+                  <a:fillRect b="-15152"/>
+                </a:stretch>
+              </a:blipFill>
+            </p:spPr>
+            <p:txBody>
+              <a:bodyPr/>
+              <a:lstStyle/>
+              <a:p>
+                <a:r>
+                  <a:rPr lang="en-US">
+                    <a:noFill/>
+                  </a:rPr>
+                  <a:t> </a:t>
+                </a:r>
+              </a:p>
+            </p:txBody>
+          </p:sp>
+        </mc:Fallback>
+      </mc:AlternateContent>
+      <mc:AlternateContent xmlns:mc="http://schemas.openxmlformats.org/markup-compatibility/2006">
+        <mc:Choice xmlns:a14="http://schemas.microsoft.com/office/drawing/2010/main" Requires="a14">
+          <p:sp>
+            <p:nvSpPr>
+              <p:cNvPr id="125" name="TextBox 124">
+                <a:extLst>
+                  <a:ext uri="{FF2B5EF4-FFF2-40B4-BE49-F238E27FC236}">
+                    <a16:creationId xmlns:a16="http://schemas.microsoft.com/office/drawing/2014/main" id="{CD1E18B6-8188-3572-0985-C43A67079721}"/>
+                  </a:ext>
+                </a:extLst>
+              </p:cNvPr>
+              <p:cNvSpPr txBox="1"/>
+              <p:nvPr/>
+            </p:nvSpPr>
+            <p:spPr>
+              <a:xfrm>
+                <a:off x="1450898" y="2134946"/>
+                <a:ext cx="2838844" cy="338554"/>
+              </a:xfrm>
+              <a:prstGeom prst="rect">
+                <a:avLst/>
+              </a:prstGeom>
+              <a:noFill/>
+            </p:spPr>
+            <p:txBody>
+              <a:bodyPr wrap="square" rtlCol="0">
+                <a:spAutoFit/>
+              </a:bodyPr>
+              <a:lstStyle/>
+              <a:p>
+                <a:r>
+                  <a:rPr lang="en-US" sz="1600" dirty="0">
+                    <a:latin typeface="Georgia" panose="02040502050405020303" pitchFamily="18" charset="0"/>
+                  </a:rPr>
+                  <a:t>Two unfair coins, </a:t>
+                </a:r>
+                <a14:m>
+                  <m:oMath xmlns:m="http://schemas.openxmlformats.org/officeDocument/2006/math">
+                    <m:r>
+                      <a:rPr lang="en-US" sz="1600" i="1" dirty="0">
+                        <a:latin typeface="Cambria Math" panose="02040503050406030204" pitchFamily="18" charset="0"/>
+                      </a:rPr>
+                      <m:t>𝐴</m:t>
+                    </m:r>
+                  </m:oMath>
+                </a14:m>
+                <a:r>
+                  <a:rPr lang="en-US" sz="1600" dirty="0">
+                    <a:latin typeface="Georgia" panose="02040502050405020303" pitchFamily="18" charset="0"/>
+                  </a:rPr>
+                  <a:t> and </a:t>
+                </a:r>
+                <a14:m>
+                  <m:oMath xmlns:m="http://schemas.openxmlformats.org/officeDocument/2006/math">
+                    <m:r>
+                      <a:rPr lang="en-US" sz="1600" b="0" i="1" dirty="0" smtClean="0">
+                        <a:latin typeface="Cambria Math" panose="02040503050406030204" pitchFamily="18" charset="0"/>
+                      </a:rPr>
+                      <m:t>𝐵</m:t>
+                    </m:r>
+                  </m:oMath>
+                </a14:m>
+                <a:endParaRPr lang="en-US" sz="1600" dirty="0">
+                  <a:latin typeface="Georgia" panose="02040502050405020303" pitchFamily="18" charset="0"/>
+                </a:endParaRPr>
+              </a:p>
+            </p:txBody>
+          </p:sp>
+        </mc:Choice>
+        <mc:Fallback>
+          <p:sp>
+            <p:nvSpPr>
+              <p:cNvPr id="125" name="TextBox 124">
+                <a:extLst>
+                  <a:ext uri="{FF2B5EF4-FFF2-40B4-BE49-F238E27FC236}">
+                    <a16:creationId xmlns:a16="http://schemas.microsoft.com/office/drawing/2014/main" id="{CD1E18B6-8188-3572-0985-C43A67079721}"/>
+                  </a:ext>
+                </a:extLst>
+              </p:cNvPr>
+              <p:cNvSpPr txBox="1">
+                <a:spLocks noRot="1" noChangeAspect="1" noMove="1" noResize="1" noEditPoints="1" noAdjustHandles="1" noChangeArrowheads="1" noChangeShapeType="1" noTextEdit="1"/>
+              </p:cNvSpPr>
+              <p:nvPr/>
+            </p:nvSpPr>
+            <p:spPr>
+              <a:xfrm>
+                <a:off x="1450898" y="2134946"/>
+                <a:ext cx="2838844" cy="338554"/>
+              </a:xfrm>
+              <a:prstGeom prst="rect">
+                <a:avLst/>
+              </a:prstGeom>
+              <a:blipFill>
+                <a:blip r:embed="rId13"/>
+                <a:stretch>
+                  <a:fillRect l="-1073" t="-5357" b="-21429"/>
+                </a:stretch>
+              </a:blipFill>
+            </p:spPr>
+            <p:txBody>
+              <a:bodyPr/>
+              <a:lstStyle/>
+              <a:p>
+                <a:r>
+                  <a:rPr lang="en-US">
+                    <a:noFill/>
+                  </a:rPr>
+                  <a:t> </a:t>
+                </a:r>
+              </a:p>
+            </p:txBody>
+          </p:sp>
+        </mc:Fallback>
+      </mc:AlternateContent>
+      <p:sp>
+        <p:nvSpPr>
+          <p:cNvPr id="126" name="왼쪽 중괄호 125">
+            <a:extLst>
+              <a:ext uri="{FF2B5EF4-FFF2-40B4-BE49-F238E27FC236}">
+                <a16:creationId xmlns:a16="http://schemas.microsoft.com/office/drawing/2014/main" id="{3D71E1A4-17BF-A7D3-A5D2-37451B84B76B}"/>
+              </a:ext>
+            </a:extLst>
+          </p:cNvPr>
+          <p:cNvSpPr/>
+          <p:nvPr/>
+        </p:nvSpPr>
+        <p:spPr>
+          <a:xfrm>
+            <a:off x="1632857" y="2588787"/>
+            <a:ext cx="146177" cy="723142"/>
+          </a:xfrm>
+          <a:prstGeom prst="leftBrace">
+            <a:avLst/>
+          </a:prstGeom>
+          <a:ln>
+            <a:solidFill>
+              <a:schemeClr val="tx1"/>
+            </a:solidFill>
+          </a:ln>
+        </p:spPr>
+        <p:style>
+          <a:lnRef idx="1">
+            <a:schemeClr val="accent1"/>
+          </a:lnRef>
+          <a:fillRef idx="0">
+            <a:schemeClr val="accent1"/>
+          </a:fillRef>
+          <a:effectRef idx="0">
+            <a:schemeClr val="accent1"/>
+          </a:effectRef>
+          <a:fontRef idx="minor">
+            <a:schemeClr val="tx1"/>
+          </a:fontRef>
+        </p:style>
+        <p:txBody>
+          <a:bodyPr rtlCol="0" anchor="ctr"/>
+          <a:lstStyle/>
+          <a:p>
+            <a:pPr algn="ctr"/>
+            <a:endParaRPr lang="en-US"/>
+          </a:p>
+        </p:txBody>
+      </p:sp>
+      <p:cxnSp>
+        <p:nvCxnSpPr>
+          <p:cNvPr id="128" name="연결선: 꺾임 127">
+            <a:extLst>
+              <a:ext uri="{FF2B5EF4-FFF2-40B4-BE49-F238E27FC236}">
+                <a16:creationId xmlns:a16="http://schemas.microsoft.com/office/drawing/2014/main" id="{DC836399-EC8B-79EE-9756-2D923C5C55A4}"/>
+              </a:ext>
+            </a:extLst>
+          </p:cNvPr>
+          <p:cNvCxnSpPr>
+            <a:stCxn id="18" idx="2"/>
+          </p:cNvCxnSpPr>
+          <p:nvPr/>
+        </p:nvCxnSpPr>
+        <p:spPr>
+          <a:xfrm rot="5400000">
+            <a:off x="4037273" y="4099436"/>
+            <a:ext cx="718003" cy="617379"/>
+          </a:xfrm>
+          <a:prstGeom prst="bentConnector3">
+            <a:avLst>
+              <a:gd name="adj1" fmla="val 99382"/>
+            </a:avLst>
+          </a:prstGeom>
+          <a:ln>
+            <a:solidFill>
+              <a:schemeClr val="tx1"/>
+            </a:solidFill>
+            <a:tailEnd type="triangle"/>
+          </a:ln>
+        </p:spPr>
+        <p:style>
+          <a:lnRef idx="1">
+            <a:schemeClr val="accent1"/>
+          </a:lnRef>
+          <a:fillRef idx="0">
+            <a:schemeClr val="accent1"/>
+          </a:fillRef>
+          <a:effectRef idx="0">
+            <a:schemeClr val="accent1"/>
+          </a:effectRef>
+          <a:fontRef idx="minor">
+            <a:schemeClr val="tx1"/>
+          </a:fontRef>
+        </p:style>
+      </p:cxnSp>
+      <p:sp>
+        <p:nvSpPr>
+          <p:cNvPr id="138" name="TextBox 137">
+            <a:extLst>
+              <a:ext uri="{FF2B5EF4-FFF2-40B4-BE49-F238E27FC236}">
+                <a16:creationId xmlns:a16="http://schemas.microsoft.com/office/drawing/2014/main" id="{3F2FADA6-3AE3-1226-6698-0FF96A75DC16}"/>
+              </a:ext>
+            </a:extLst>
+          </p:cNvPr>
+          <p:cNvSpPr txBox="1"/>
+          <p:nvPr/>
+        </p:nvSpPr>
+        <p:spPr>
+          <a:xfrm>
+            <a:off x="2098589" y="4492250"/>
+            <a:ext cx="1988995" cy="523220"/>
+          </a:xfrm>
+          <a:prstGeom prst="rect">
+            <a:avLst/>
+          </a:prstGeom>
+          <a:noFill/>
+        </p:spPr>
+        <p:txBody>
+          <a:bodyPr wrap="square" rtlCol="0">
+            <a:spAutoFit/>
+          </a:bodyPr>
+          <a:lstStyle/>
+          <a:p>
+            <a:r>
+              <a:rPr lang="en-US" sz="1400" dirty="0">
+                <a:latin typeface="Georgia" panose="02040502050405020303" pitchFamily="18" charset="0"/>
+              </a:rPr>
+              <a:t>Choose either coin</a:t>
+            </a:r>
+          </a:p>
+          <a:p>
+            <a:r>
+              <a:rPr lang="en-US" sz="1400" dirty="0">
+                <a:latin typeface="Georgia" panose="02040502050405020303" pitchFamily="18" charset="0"/>
+              </a:rPr>
+              <a:t>with equal probability</a:t>
+            </a:r>
+          </a:p>
+        </p:txBody>
+      </p:sp>
+    </p:spTree>
+    <p:extLst>
+      <p:ext uri="{BB962C8B-B14F-4D97-AF65-F5344CB8AC3E}">
+        <p14:creationId xmlns:p14="http://schemas.microsoft.com/office/powerpoint/2010/main" val="350900275"/>
+      </p:ext>
+    </p:extLst>
+  </p:cSld>
+  <p:clrMapOvr>
+    <a:masterClrMapping/>
+  </p:clrMapOvr>
+</p:sld>
+</file>
+
+<file path=ppt/slides/slide7.xml><?xml version="1.0" encoding="utf-8"?>
+<p:sld xmlns:a="http://schemas.openxmlformats.org/drawingml/2006/main" xmlns:r="http://schemas.openxmlformats.org/officeDocument/2006/relationships" xmlns:p="http://schemas.openxmlformats.org/presentationml/2006/main">
+  <p:cSld>
+    <p:spTree>
+      <p:nvGrpSpPr>
+        <p:cNvPr id="1" name="">
+          <a:extLst>
+            <a:ext uri="{FF2B5EF4-FFF2-40B4-BE49-F238E27FC236}">
+              <a16:creationId xmlns:a16="http://schemas.microsoft.com/office/drawing/2014/main" id="{65646588-DFDE-F63C-1B53-FC49A23C6D0E}"/>
+            </a:ext>
+          </a:extLst>
+        </p:cNvPr>
+        <p:cNvGrpSpPr/>
+        <p:nvPr/>
+      </p:nvGrpSpPr>
+      <p:grpSpPr>
+        <a:xfrm>
+          <a:off x="0" y="0"/>
+          <a:ext cx="0" cy="0"/>
+          <a:chOff x="0" y="0"/>
+          <a:chExt cx="0" cy="0"/>
+        </a:xfrm>
+      </p:grpSpPr>
+      <p:sp>
+        <p:nvSpPr>
+          <p:cNvPr id="13" name="직사각형 12">
+            <a:extLst>
+              <a:ext uri="{FF2B5EF4-FFF2-40B4-BE49-F238E27FC236}">
+                <a16:creationId xmlns:a16="http://schemas.microsoft.com/office/drawing/2014/main" id="{8F006D8E-EEC6-AD34-A5E4-B7C66FE6F323}"/>
+              </a:ext>
+            </a:extLst>
+          </p:cNvPr>
+          <p:cNvSpPr/>
+          <p:nvPr/>
+        </p:nvSpPr>
+        <p:spPr>
+          <a:xfrm>
+            <a:off x="5842519" y="763891"/>
+            <a:ext cx="3589172" cy="4004051"/>
+          </a:xfrm>
+          <a:prstGeom prst="rect">
+            <a:avLst/>
+          </a:prstGeom>
+          <a:solidFill>
+            <a:schemeClr val="accent2">
+              <a:lumMod val="20000"/>
+              <a:lumOff val="80000"/>
+            </a:schemeClr>
+          </a:solidFill>
+          <a:ln>
+            <a:solidFill>
+              <a:schemeClr val="tx1"/>
+            </a:solidFill>
+          </a:ln>
+        </p:spPr>
+        <p:style>
+          <a:lnRef idx="2">
+            <a:schemeClr val="accent1">
+              <a:shade val="15000"/>
+            </a:schemeClr>
+          </a:lnRef>
+          <a:fillRef idx="1">
+            <a:schemeClr val="accent1"/>
+          </a:fillRef>
+          <a:effectRef idx="0">
+            <a:schemeClr val="accent1"/>
+          </a:effectRef>
+          <a:fontRef idx="minor">
+            <a:schemeClr val="lt1"/>
+          </a:fontRef>
+        </p:style>
+        <p:txBody>
+          <a:bodyPr rtlCol="0" anchor="ctr"/>
+          <a:lstStyle/>
+          <a:p>
+            <a:pPr algn="ctr"/>
+            <a:endParaRPr lang="en-US"/>
+          </a:p>
+        </p:txBody>
+      </p:sp>
+      <p:sp>
+        <p:nvSpPr>
+          <p:cNvPr id="97" name="직사각형 96">
+            <a:extLst>
+              <a:ext uri="{FF2B5EF4-FFF2-40B4-BE49-F238E27FC236}">
+                <a16:creationId xmlns:a16="http://schemas.microsoft.com/office/drawing/2014/main" id="{F248D320-625F-CCA8-BE19-AD3507FE3303}"/>
+              </a:ext>
+            </a:extLst>
+          </p:cNvPr>
+          <p:cNvSpPr/>
+          <p:nvPr/>
+        </p:nvSpPr>
+        <p:spPr>
+          <a:xfrm>
+            <a:off x="2251792" y="763891"/>
+            <a:ext cx="3589172" cy="4004051"/>
+          </a:xfrm>
+          <a:prstGeom prst="rect">
+            <a:avLst/>
+          </a:prstGeom>
+          <a:solidFill>
+            <a:schemeClr val="accent5">
+              <a:lumMod val="20000"/>
+              <a:lumOff val="80000"/>
+            </a:schemeClr>
+          </a:solidFill>
+          <a:ln>
+            <a:solidFill>
+              <a:schemeClr val="tx1"/>
+            </a:solidFill>
+          </a:ln>
+        </p:spPr>
+        <p:style>
+          <a:lnRef idx="2">
+            <a:schemeClr val="accent1">
+              <a:shade val="15000"/>
+            </a:schemeClr>
+          </a:lnRef>
+          <a:fillRef idx="1">
+            <a:schemeClr val="accent1"/>
+          </a:fillRef>
+          <a:effectRef idx="0">
+            <a:schemeClr val="accent1"/>
+          </a:effectRef>
+          <a:fontRef idx="minor">
+            <a:schemeClr val="lt1"/>
+          </a:fontRef>
+        </p:style>
+        <p:txBody>
+          <a:bodyPr rtlCol="0" anchor="ctr"/>
+          <a:lstStyle/>
+          <a:p>
+            <a:pPr algn="ctr"/>
+            <a:endParaRPr lang="en-US"/>
+          </a:p>
+        </p:txBody>
+      </p:sp>
+      <p:sp>
+        <p:nvSpPr>
+          <p:cNvPr id="111" name="TextBox 110">
+            <a:extLst>
+              <a:ext uri="{FF2B5EF4-FFF2-40B4-BE49-F238E27FC236}">
+                <a16:creationId xmlns:a16="http://schemas.microsoft.com/office/drawing/2014/main" id="{84A47059-EBEA-DABD-2F5E-5A0AB02EDADE}"/>
+              </a:ext>
+            </a:extLst>
+          </p:cNvPr>
+          <p:cNvSpPr txBox="1"/>
+          <p:nvPr/>
+        </p:nvSpPr>
+        <p:spPr>
+          <a:xfrm>
+            <a:off x="8022060" y="758071"/>
+            <a:ext cx="1260159" cy="307777"/>
+          </a:xfrm>
+          <a:prstGeom prst="rect">
+            <a:avLst/>
+          </a:prstGeom>
+          <a:noFill/>
+        </p:spPr>
+        <p:txBody>
+          <a:bodyPr wrap="square" rtlCol="0">
+            <a:spAutoFit/>
+          </a:bodyPr>
+          <a:lstStyle/>
+          <a:p>
+            <a:r>
+              <a:rPr lang="en-US" sz="1400" dirty="0">
+                <a:latin typeface="Georgia" panose="02040502050405020303" pitchFamily="18" charset="0"/>
+              </a:rPr>
+              <a:t>Sample space</a:t>
+            </a:r>
+          </a:p>
+        </p:txBody>
+      </p:sp>
+      <p:cxnSp>
+        <p:nvCxnSpPr>
+          <p:cNvPr id="120" name="직선 연결선 119">
+            <a:extLst>
+              <a:ext uri="{FF2B5EF4-FFF2-40B4-BE49-F238E27FC236}">
+                <a16:creationId xmlns:a16="http://schemas.microsoft.com/office/drawing/2014/main" id="{60B914EA-4C23-7D3C-F2E0-42B2A6EE1D1D}"/>
+              </a:ext>
+            </a:extLst>
+          </p:cNvPr>
+          <p:cNvCxnSpPr>
+            <a:cxnSpLocks/>
+          </p:cNvCxnSpPr>
+          <p:nvPr/>
+        </p:nvCxnSpPr>
+        <p:spPr>
+          <a:xfrm flipV="1">
+            <a:off x="5840964" y="615820"/>
+            <a:ext cx="0" cy="4366727"/>
+          </a:xfrm>
+          <a:prstGeom prst="line">
+            <a:avLst/>
+          </a:prstGeom>
+          <a:ln w="19050">
+            <a:solidFill>
+              <a:schemeClr val="tx1"/>
+            </a:solidFill>
+            <a:prstDash val="sysDot"/>
+          </a:ln>
+        </p:spPr>
+        <p:style>
+          <a:lnRef idx="1">
+            <a:schemeClr val="accent1"/>
+          </a:lnRef>
+          <a:fillRef idx="0">
+            <a:schemeClr val="accent1"/>
+          </a:fillRef>
+          <a:effectRef idx="0">
+            <a:schemeClr val="accent1"/>
+          </a:effectRef>
+          <a:fontRef idx="minor">
+            <a:schemeClr val="tx1"/>
+          </a:fontRef>
+        </p:style>
+      </p:cxnSp>
+      <mc:AlternateContent xmlns:mc="http://schemas.openxmlformats.org/markup-compatibility/2006">
+        <mc:Choice xmlns:a14="http://schemas.microsoft.com/office/drawing/2010/main" Requires="a14">
+          <p:sp>
+            <p:nvSpPr>
+              <p:cNvPr id="16" name="TextBox 15">
+                <a:extLst>
+                  <a:ext uri="{FF2B5EF4-FFF2-40B4-BE49-F238E27FC236}">
+                    <a16:creationId xmlns:a16="http://schemas.microsoft.com/office/drawing/2014/main" id="{D9151347-AB6A-4025-517C-BFFA807D4292}"/>
+                  </a:ext>
+                </a:extLst>
+              </p:cNvPr>
+              <p:cNvSpPr txBox="1"/>
+              <p:nvPr/>
+            </p:nvSpPr>
+            <p:spPr>
+              <a:xfrm>
+                <a:off x="7355184" y="2703583"/>
+                <a:ext cx="560732" cy="523220"/>
+              </a:xfrm>
+              <a:prstGeom prst="rect">
+                <a:avLst/>
+              </a:prstGeom>
+              <a:noFill/>
+            </p:spPr>
+            <p:txBody>
+              <a:bodyPr wrap="square" rtlCol="0">
+                <a:spAutoFit/>
+              </a:bodyPr>
+              <a:lstStyle/>
+              <a:p>
+                <a:pPr/>
+                <a14:m>
+                  <m:oMathPara xmlns:m="http://schemas.openxmlformats.org/officeDocument/2006/math">
+                    <m:oMathParaPr>
+                      <m:jc m:val="centerGroup"/>
+                    </m:oMathParaPr>
+                    <m:oMath xmlns:m="http://schemas.openxmlformats.org/officeDocument/2006/math">
+                      <m:sSub>
+                        <m:sSubPr>
+                          <m:ctrlPr>
+                            <a:rPr lang="en-US" sz="2800" b="1" i="1" dirty="0" smtClean="0">
+                              <a:solidFill>
+                                <a:schemeClr val="accent2">
+                                  <a:lumMod val="75000"/>
+                                </a:schemeClr>
+                              </a:solidFill>
+                              <a:latin typeface="Cambria Math" panose="02040503050406030204" pitchFamily="18" charset="0"/>
+                            </a:rPr>
+                          </m:ctrlPr>
+                        </m:sSubPr>
+                        <m:e>
+                          <m:r>
+                            <a:rPr lang="en-US" sz="2800" b="1" i="1" dirty="0" smtClean="0">
+                              <a:solidFill>
+                                <a:schemeClr val="accent2">
+                                  <a:lumMod val="75000"/>
+                                </a:schemeClr>
+                              </a:solidFill>
+                              <a:latin typeface="Cambria Math" panose="02040503050406030204" pitchFamily="18" charset="0"/>
+                            </a:rPr>
+                            <m:t>𝑻</m:t>
+                          </m:r>
+                        </m:e>
+                        <m:sub>
+                          <m:r>
+                            <a:rPr lang="en-US" sz="2800" b="1" i="1" dirty="0" smtClean="0">
+                              <a:solidFill>
+                                <a:schemeClr val="accent2">
+                                  <a:lumMod val="75000"/>
+                                </a:schemeClr>
+                              </a:solidFill>
+                              <a:latin typeface="Cambria Math" panose="02040503050406030204" pitchFamily="18" charset="0"/>
+                            </a:rPr>
+                            <m:t>𝟏𝟏</m:t>
+                          </m:r>
+                        </m:sub>
+                      </m:sSub>
+                    </m:oMath>
+                  </m:oMathPara>
+                </a14:m>
+                <a:endParaRPr lang="en-US" sz="2800" b="1" dirty="0">
+                  <a:solidFill>
+                    <a:schemeClr val="accent2">
+                      <a:lumMod val="75000"/>
+                    </a:schemeClr>
+                  </a:solidFill>
+                </a:endParaRPr>
+              </a:p>
+            </p:txBody>
+          </p:sp>
+        </mc:Choice>
+        <mc:Fallback>
+          <p:sp>
+            <p:nvSpPr>
+              <p:cNvPr id="16" name="TextBox 15">
+                <a:extLst>
+                  <a:ext uri="{FF2B5EF4-FFF2-40B4-BE49-F238E27FC236}">
+                    <a16:creationId xmlns:a16="http://schemas.microsoft.com/office/drawing/2014/main" id="{D9151347-AB6A-4025-517C-BFFA807D4292}"/>
+                  </a:ext>
+                </a:extLst>
+              </p:cNvPr>
+              <p:cNvSpPr txBox="1">
+                <a:spLocks noRot="1" noChangeAspect="1" noMove="1" noResize="1" noEditPoints="1" noAdjustHandles="1" noChangeArrowheads="1" noChangeShapeType="1" noTextEdit="1"/>
+              </p:cNvSpPr>
+              <p:nvPr/>
+            </p:nvSpPr>
+            <p:spPr>
+              <a:xfrm>
+                <a:off x="7355184" y="2703583"/>
+                <a:ext cx="560732" cy="523220"/>
+              </a:xfrm>
+              <a:prstGeom prst="rect">
+                <a:avLst/>
+              </a:prstGeom>
+              <a:blipFill>
+                <a:blip r:embed="rId3"/>
+                <a:stretch>
+                  <a:fillRect r="-8696"/>
+                </a:stretch>
+              </a:blipFill>
+            </p:spPr>
+            <p:txBody>
+              <a:bodyPr/>
+              <a:lstStyle/>
+              <a:p>
+                <a:r>
+                  <a:rPr lang="en-US">
+                    <a:noFill/>
+                  </a:rPr>
+                  <a:t> </a:t>
+                </a:r>
+              </a:p>
+            </p:txBody>
+          </p:sp>
+        </mc:Fallback>
+      </mc:AlternateContent>
+      <mc:AlternateContent xmlns:mc="http://schemas.openxmlformats.org/markup-compatibility/2006">
+        <mc:Choice xmlns:a14="http://schemas.microsoft.com/office/drawing/2010/main" Requires="a14">
+          <p:sp>
+            <p:nvSpPr>
+              <p:cNvPr id="109" name="TextBox 108">
+                <a:extLst>
+                  <a:ext uri="{FF2B5EF4-FFF2-40B4-BE49-F238E27FC236}">
+                    <a16:creationId xmlns:a16="http://schemas.microsoft.com/office/drawing/2014/main" id="{ED4DB4BE-D86E-DC42-E7A3-81CB8BD7A998}"/>
+                  </a:ext>
+                </a:extLst>
+              </p:cNvPr>
+              <p:cNvSpPr txBox="1"/>
+              <p:nvPr/>
+            </p:nvSpPr>
+            <p:spPr>
+              <a:xfrm>
+                <a:off x="3763631" y="2703583"/>
+                <a:ext cx="560732" cy="523220"/>
+              </a:xfrm>
+              <a:prstGeom prst="rect">
+                <a:avLst/>
+              </a:prstGeom>
+              <a:noFill/>
+            </p:spPr>
+            <p:txBody>
+              <a:bodyPr wrap="square" rtlCol="0">
+                <a:spAutoFit/>
+              </a:bodyPr>
+              <a:lstStyle/>
+              <a:p>
+                <a:pPr/>
+                <a14:m>
+                  <m:oMathPara xmlns:m="http://schemas.openxmlformats.org/officeDocument/2006/math">
+                    <m:oMathParaPr>
+                      <m:jc m:val="centerGroup"/>
+                    </m:oMathParaPr>
+                    <m:oMath xmlns:m="http://schemas.openxmlformats.org/officeDocument/2006/math">
+                      <m:sSub>
+                        <m:sSubPr>
+                          <m:ctrlPr>
+                            <a:rPr lang="en-US" sz="2800" b="1" i="1" dirty="0" smtClean="0">
+                              <a:solidFill>
+                                <a:srgbClr val="0070C0"/>
+                              </a:solidFill>
+                              <a:latin typeface="Cambria Math" panose="02040503050406030204" pitchFamily="18" charset="0"/>
+                            </a:rPr>
+                          </m:ctrlPr>
+                        </m:sSubPr>
+                        <m:e>
+                          <m:r>
+                            <a:rPr lang="en-US" sz="2800" b="1" i="1" dirty="0" smtClean="0">
+                              <a:solidFill>
+                                <a:srgbClr val="0070C0"/>
+                              </a:solidFill>
+                              <a:latin typeface="Cambria Math" panose="02040503050406030204" pitchFamily="18" charset="0"/>
+                            </a:rPr>
+                            <m:t>𝑯</m:t>
+                          </m:r>
+                        </m:e>
+                        <m:sub>
+                          <m:r>
+                            <a:rPr lang="en-US" sz="2800" b="1" i="1" dirty="0" smtClean="0">
+                              <a:solidFill>
+                                <a:srgbClr val="0070C0"/>
+                              </a:solidFill>
+                              <a:latin typeface="Cambria Math" panose="02040503050406030204" pitchFamily="18" charset="0"/>
+                            </a:rPr>
+                            <m:t>𝟏𝟏</m:t>
+                          </m:r>
+                        </m:sub>
+                      </m:sSub>
+                    </m:oMath>
+                  </m:oMathPara>
+                </a14:m>
+                <a:endParaRPr lang="en-US" sz="2800" b="1" dirty="0">
+                  <a:solidFill>
+                    <a:srgbClr val="0070C0"/>
+                  </a:solidFill>
+                </a:endParaRPr>
+              </a:p>
+            </p:txBody>
+          </p:sp>
+        </mc:Choice>
+        <mc:Fallback>
+          <p:sp>
+            <p:nvSpPr>
+              <p:cNvPr id="109" name="TextBox 108">
+                <a:extLst>
+                  <a:ext uri="{FF2B5EF4-FFF2-40B4-BE49-F238E27FC236}">
+                    <a16:creationId xmlns:a16="http://schemas.microsoft.com/office/drawing/2014/main" id="{ED4DB4BE-D86E-DC42-E7A3-81CB8BD7A998}"/>
+                  </a:ext>
+                </a:extLst>
+              </p:cNvPr>
+              <p:cNvSpPr txBox="1">
+                <a:spLocks noRot="1" noChangeAspect="1" noMove="1" noResize="1" noEditPoints="1" noAdjustHandles="1" noChangeArrowheads="1" noChangeShapeType="1" noTextEdit="1"/>
+              </p:cNvSpPr>
+              <p:nvPr/>
+            </p:nvSpPr>
+            <p:spPr>
+              <a:xfrm>
+                <a:off x="3763631" y="2703583"/>
+                <a:ext cx="560732" cy="523220"/>
+              </a:xfrm>
+              <a:prstGeom prst="rect">
+                <a:avLst/>
+              </a:prstGeom>
+              <a:blipFill>
+                <a:blip r:embed="rId4"/>
+                <a:stretch>
+                  <a:fillRect r="-20652"/>
+                </a:stretch>
+              </a:blipFill>
+            </p:spPr>
+            <p:txBody>
+              <a:bodyPr/>
+              <a:lstStyle/>
+              <a:p>
+                <a:r>
+                  <a:rPr lang="en-US">
+                    <a:noFill/>
+                  </a:rPr>
+                  <a:t> </a:t>
+                </a:r>
+              </a:p>
+            </p:txBody>
+          </p:sp>
+        </mc:Fallback>
+      </mc:AlternateContent>
+      <p:grpSp>
+        <p:nvGrpSpPr>
+          <p:cNvPr id="79" name="그룹 78">
+            <a:extLst>
+              <a:ext uri="{FF2B5EF4-FFF2-40B4-BE49-F238E27FC236}">
+                <a16:creationId xmlns:a16="http://schemas.microsoft.com/office/drawing/2014/main" id="{777239B0-BDE7-D76D-CB3B-3B1620DC35BE}"/>
+              </a:ext>
+            </a:extLst>
+          </p:cNvPr>
+          <p:cNvGrpSpPr/>
+          <p:nvPr/>
+        </p:nvGrpSpPr>
+        <p:grpSpPr>
+          <a:xfrm>
+            <a:off x="2247857" y="758071"/>
+            <a:ext cx="4563490" cy="4009871"/>
+            <a:chOff x="2247857" y="758071"/>
+            <a:chExt cx="4563490" cy="4009871"/>
+          </a:xfrm>
+        </p:grpSpPr>
+        <p:cxnSp>
+          <p:nvCxnSpPr>
+            <p:cNvPr id="114" name="직선 연결선 113">
+              <a:extLst>
+                <a:ext uri="{FF2B5EF4-FFF2-40B4-BE49-F238E27FC236}">
+                  <a16:creationId xmlns:a16="http://schemas.microsoft.com/office/drawing/2014/main" id="{7523F21C-D217-462D-96E0-0E7AE028D299}"/>
+                </a:ext>
+              </a:extLst>
+            </p:cNvPr>
+            <p:cNvCxnSpPr>
+              <a:cxnSpLocks/>
+            </p:cNvCxnSpPr>
+            <p:nvPr/>
+          </p:nvCxnSpPr>
+          <p:spPr>
+            <a:xfrm flipH="1">
+              <a:off x="4926563" y="758071"/>
+              <a:ext cx="1884784" cy="4009871"/>
+            </a:xfrm>
+            <a:prstGeom prst="line">
+              <a:avLst/>
+            </a:prstGeom>
+            <a:ln w="57150">
+              <a:solidFill>
+                <a:schemeClr val="accent6">
+                  <a:lumMod val="75000"/>
+                </a:schemeClr>
+              </a:solidFill>
+            </a:ln>
+          </p:spPr>
+          <p:style>
+            <a:lnRef idx="1">
+              <a:schemeClr val="accent1"/>
+            </a:lnRef>
+            <a:fillRef idx="0">
+              <a:schemeClr val="accent1"/>
+            </a:fillRef>
+            <a:effectRef idx="0">
+              <a:schemeClr val="accent1"/>
+            </a:effectRef>
+            <a:fontRef idx="minor">
+              <a:schemeClr val="tx1"/>
+            </a:fontRef>
+          </p:style>
+        </p:cxnSp>
+        <p:cxnSp>
+          <p:nvCxnSpPr>
+            <p:cNvPr id="46" name="직선 연결선 45">
+              <a:extLst>
+                <a:ext uri="{FF2B5EF4-FFF2-40B4-BE49-F238E27FC236}">
+                  <a16:creationId xmlns:a16="http://schemas.microsoft.com/office/drawing/2014/main" id="{34FCF35E-0E78-FA07-60E8-C31D12B56434}"/>
+                </a:ext>
+              </a:extLst>
+            </p:cNvPr>
+            <p:cNvCxnSpPr>
+              <a:cxnSpLocks/>
+            </p:cNvCxnSpPr>
+            <p:nvPr/>
+          </p:nvCxnSpPr>
+          <p:spPr>
+            <a:xfrm flipH="1">
+              <a:off x="2249411" y="758072"/>
+              <a:ext cx="4561936" cy="5819"/>
+            </a:xfrm>
+            <a:prstGeom prst="line">
+              <a:avLst/>
+            </a:prstGeom>
+            <a:ln w="57150">
+              <a:solidFill>
+                <a:schemeClr val="accent6">
+                  <a:lumMod val="75000"/>
+                </a:schemeClr>
+              </a:solidFill>
+            </a:ln>
+          </p:spPr>
+          <p:style>
+            <a:lnRef idx="1">
+              <a:schemeClr val="accent1"/>
+            </a:lnRef>
+            <a:fillRef idx="0">
+              <a:schemeClr val="accent1"/>
+            </a:fillRef>
+            <a:effectRef idx="0">
+              <a:schemeClr val="accent1"/>
+            </a:effectRef>
+            <a:fontRef idx="minor">
+              <a:schemeClr val="tx1"/>
+            </a:fontRef>
+          </p:style>
+        </p:cxnSp>
+        <p:cxnSp>
+          <p:nvCxnSpPr>
+            <p:cNvPr id="47" name="직선 연결선 46">
+              <a:extLst>
+                <a:ext uri="{FF2B5EF4-FFF2-40B4-BE49-F238E27FC236}">
+                  <a16:creationId xmlns:a16="http://schemas.microsoft.com/office/drawing/2014/main" id="{7E8C4200-D7B2-6B1E-657D-E83DFB3FCC46}"/>
+                </a:ext>
+              </a:extLst>
+            </p:cNvPr>
+            <p:cNvCxnSpPr>
+              <a:cxnSpLocks/>
+            </p:cNvCxnSpPr>
+            <p:nvPr/>
+          </p:nvCxnSpPr>
+          <p:spPr>
+            <a:xfrm flipH="1">
+              <a:off x="2249411" y="4767942"/>
+              <a:ext cx="2677152" cy="0"/>
+            </a:xfrm>
+            <a:prstGeom prst="line">
+              <a:avLst/>
+            </a:prstGeom>
+            <a:ln w="57150">
+              <a:solidFill>
+                <a:schemeClr val="accent6">
+                  <a:lumMod val="75000"/>
+                </a:schemeClr>
+              </a:solidFill>
+            </a:ln>
+          </p:spPr>
+          <p:style>
+            <a:lnRef idx="1">
+              <a:schemeClr val="accent1"/>
+            </a:lnRef>
+            <a:fillRef idx="0">
+              <a:schemeClr val="accent1"/>
+            </a:fillRef>
+            <a:effectRef idx="0">
+              <a:schemeClr val="accent1"/>
+            </a:effectRef>
+            <a:fontRef idx="minor">
+              <a:schemeClr val="tx1"/>
+            </a:fontRef>
+          </p:style>
+        </p:cxnSp>
+        <p:cxnSp>
+          <p:nvCxnSpPr>
+            <p:cNvPr id="49" name="직선 연결선 48">
+              <a:extLst>
+                <a:ext uri="{FF2B5EF4-FFF2-40B4-BE49-F238E27FC236}">
+                  <a16:creationId xmlns:a16="http://schemas.microsoft.com/office/drawing/2014/main" id="{2B70E739-C86B-4FDB-3B85-CC884B081561}"/>
+                </a:ext>
+              </a:extLst>
+            </p:cNvPr>
+            <p:cNvCxnSpPr>
+              <a:cxnSpLocks/>
+            </p:cNvCxnSpPr>
+            <p:nvPr/>
+          </p:nvCxnSpPr>
+          <p:spPr>
+            <a:xfrm flipH="1">
+              <a:off x="2247857" y="763891"/>
+              <a:ext cx="1554" cy="4004051"/>
+            </a:xfrm>
+            <a:prstGeom prst="line">
+              <a:avLst/>
+            </a:prstGeom>
+            <a:ln w="57150">
+              <a:solidFill>
+                <a:schemeClr val="accent6">
+                  <a:lumMod val="75000"/>
+                </a:schemeClr>
+              </a:solidFill>
+            </a:ln>
+          </p:spPr>
+          <p:style>
+            <a:lnRef idx="1">
+              <a:schemeClr val="accent1"/>
+            </a:lnRef>
+            <a:fillRef idx="0">
+              <a:schemeClr val="accent1"/>
+            </a:fillRef>
+            <a:effectRef idx="0">
+              <a:schemeClr val="accent1"/>
+            </a:effectRef>
+            <a:fontRef idx="minor">
+              <a:schemeClr val="tx1"/>
+            </a:fontRef>
+          </p:style>
+        </p:cxnSp>
+      </p:grpSp>
+      <mc:AlternateContent xmlns:mc="http://schemas.openxmlformats.org/markup-compatibility/2006">
+        <mc:Choice xmlns:a14="http://schemas.microsoft.com/office/drawing/2010/main" Requires="a14">
+          <p:sp>
+            <p:nvSpPr>
+              <p:cNvPr id="64" name="TextBox 63">
+                <a:extLst>
+                  <a:ext uri="{FF2B5EF4-FFF2-40B4-BE49-F238E27FC236}">
+                    <a16:creationId xmlns:a16="http://schemas.microsoft.com/office/drawing/2014/main" id="{BC55B5A5-F459-34B2-56F3-7A60792E70B5}"/>
+                  </a:ext>
+                </a:extLst>
+              </p:cNvPr>
+              <p:cNvSpPr txBox="1"/>
+              <p:nvPr/>
+            </p:nvSpPr>
+            <p:spPr>
+              <a:xfrm>
+                <a:off x="2247857" y="685390"/>
+                <a:ext cx="4561116" cy="954107"/>
+              </a:xfrm>
+              <a:prstGeom prst="rect">
+                <a:avLst/>
+              </a:prstGeom>
+              <a:noFill/>
+            </p:spPr>
+            <p:txBody>
+              <a:bodyPr wrap="square" rtlCol="0">
+                <a:spAutoFit/>
+              </a:bodyPr>
+              <a:lstStyle/>
+              <a:p>
+                <a:pPr/>
+                <a:r>
+                  <a:rPr lang="en-US" sz="2400" b="1" dirty="0">
+                    <a:solidFill>
+                      <a:schemeClr val="accent6">
+                        <a:lumMod val="50000"/>
+                      </a:schemeClr>
+                    </a:solidFill>
+                  </a:rPr>
+                  <a:t>First 10 tosses are heads </a:t>
+                </a:r>
+                <a14:m>
+                  <m:oMath xmlns:m="http://schemas.openxmlformats.org/officeDocument/2006/math">
+                    <m:r>
+                      <a:rPr lang="en-US" sz="2400" b="1" i="1" dirty="0" smtClean="0">
+                        <a:solidFill>
+                          <a:schemeClr val="accent6">
+                            <a:lumMod val="50000"/>
+                          </a:schemeClr>
+                        </a:solidFill>
+                        <a:latin typeface="Cambria Math" panose="02040503050406030204" pitchFamily="18" charset="0"/>
+                      </a:rPr>
+                      <m:t>≈</m:t>
+                    </m:r>
+                  </m:oMath>
+                </a14:m>
+                <a:r>
+                  <a:rPr lang="en-US" sz="2400" b="1" dirty="0">
+                    <a:solidFill>
+                      <a:schemeClr val="accent6">
+                        <a:lumMod val="50000"/>
+                      </a:schemeClr>
+                    </a:solidFill>
+                  </a:rPr>
+                  <a:t> coin</a:t>
+                </a:r>
+                <a:r>
+                  <a:rPr lang="en-US" sz="3200" b="1" dirty="0">
+                    <a:solidFill>
+                      <a:schemeClr val="accent6">
+                        <a:lumMod val="50000"/>
+                      </a:schemeClr>
+                    </a:solidFill>
+                  </a:rPr>
+                  <a:t> </a:t>
+                </a:r>
+                <a14:m>
+                  <m:oMath xmlns:m="http://schemas.openxmlformats.org/officeDocument/2006/math">
+                    <m:r>
+                      <a:rPr lang="en-US" sz="2400" b="1" i="1" dirty="0">
+                        <a:solidFill>
+                          <a:schemeClr val="accent6">
+                            <a:lumMod val="50000"/>
+                          </a:schemeClr>
+                        </a:solidFill>
+                        <a:latin typeface="Cambria Math" panose="02040503050406030204" pitchFamily="18" charset="0"/>
+                      </a:rPr>
+                      <m:t>𝑨</m:t>
+                    </m:r>
+                  </m:oMath>
+                </a14:m>
+                <a:endParaRPr lang="en-US" sz="2400" b="1" dirty="0">
+                  <a:solidFill>
+                    <a:schemeClr val="accent6">
+                      <a:lumMod val="50000"/>
+                    </a:schemeClr>
+                  </a:solidFill>
+                </a:endParaRPr>
+              </a:p>
+              <a:p>
+                <a:pPr/>
+                <a:r>
+                  <a:rPr lang="en-US" sz="2400" b="1" dirty="0">
+                    <a:solidFill>
+                      <a:schemeClr val="accent6">
+                        <a:lumMod val="50000"/>
+                      </a:schemeClr>
+                    </a:solidFill>
+                  </a:rPr>
+                  <a:t>(almost equal)</a:t>
+                </a:r>
+              </a:p>
+            </p:txBody>
+          </p:sp>
+        </mc:Choice>
+        <mc:Fallback>
+          <p:sp>
+            <p:nvSpPr>
+              <p:cNvPr id="64" name="TextBox 63">
+                <a:extLst>
+                  <a:ext uri="{FF2B5EF4-FFF2-40B4-BE49-F238E27FC236}">
+                    <a16:creationId xmlns:a16="http://schemas.microsoft.com/office/drawing/2014/main" id="{BC55B5A5-F459-34B2-56F3-7A60792E70B5}"/>
+                  </a:ext>
+                </a:extLst>
+              </p:cNvPr>
+              <p:cNvSpPr txBox="1">
+                <a:spLocks noRot="1" noChangeAspect="1" noMove="1" noResize="1" noEditPoints="1" noAdjustHandles="1" noChangeArrowheads="1" noChangeShapeType="1" noTextEdit="1"/>
+              </p:cNvSpPr>
+              <p:nvPr/>
+            </p:nvSpPr>
+            <p:spPr>
+              <a:xfrm>
+                <a:off x="2247857" y="685390"/>
+                <a:ext cx="4561116" cy="954107"/>
+              </a:xfrm>
+              <a:prstGeom prst="rect">
+                <a:avLst/>
+              </a:prstGeom>
+              <a:blipFill>
+                <a:blip r:embed="rId5"/>
+                <a:stretch>
+                  <a:fillRect l="-2139" b="-13376"/>
+                </a:stretch>
+              </a:blipFill>
+            </p:spPr>
+            <p:txBody>
+              <a:bodyPr/>
+              <a:lstStyle/>
+              <a:p>
+                <a:r>
+                  <a:rPr lang="en-US">
+                    <a:noFill/>
+                  </a:rPr>
+                  <a:t> </a:t>
+                </a:r>
+              </a:p>
+            </p:txBody>
+          </p:sp>
+        </mc:Fallback>
+      </mc:AlternateContent>
+      <mc:AlternateContent xmlns:mc="http://schemas.openxmlformats.org/markup-compatibility/2006">
+        <mc:Choice xmlns:a14="http://schemas.microsoft.com/office/drawing/2010/main" Requires="a14">
+          <p:sp>
+            <p:nvSpPr>
+              <p:cNvPr id="67" name="TextBox 66">
+                <a:extLst>
+                  <a:ext uri="{FF2B5EF4-FFF2-40B4-BE49-F238E27FC236}">
+                    <a16:creationId xmlns:a16="http://schemas.microsoft.com/office/drawing/2014/main" id="{EEC4AD4D-0AB3-9EC6-4531-FB6199100B29}"/>
+                  </a:ext>
+                </a:extLst>
+              </p:cNvPr>
+              <p:cNvSpPr txBox="1"/>
+              <p:nvPr/>
+            </p:nvSpPr>
+            <p:spPr>
+              <a:xfrm>
+                <a:off x="9197701" y="758070"/>
+                <a:ext cx="232435" cy="307777"/>
+              </a:xfrm>
+              <a:prstGeom prst="rect">
+                <a:avLst/>
+              </a:prstGeom>
+              <a:noFill/>
+            </p:spPr>
+            <p:txBody>
+              <a:bodyPr wrap="none" lIns="0" tIns="0" rIns="0" bIns="0" rtlCol="0">
+                <a:spAutoFit/>
+              </a:bodyPr>
+              <a:lstStyle/>
+              <a:p>
+                <a:pPr/>
+                <a14:m>
+                  <m:oMathPara xmlns:m="http://schemas.openxmlformats.org/officeDocument/2006/math">
+                    <m:oMathParaPr>
+                      <m:jc m:val="centerGroup"/>
+                    </m:oMathParaPr>
+                    <m:oMath xmlns:m="http://schemas.openxmlformats.org/officeDocument/2006/math">
+                      <m:r>
+                        <m:rPr>
+                          <m:sty m:val="p"/>
+                        </m:rPr>
+                        <a:rPr lang="el-GR" sz="2000" i="1" smtClean="0">
+                          <a:latin typeface="Cambria Math" panose="02040503050406030204" pitchFamily="18" charset="0"/>
+                        </a:rPr>
+                        <m:t>Ω</m:t>
+                      </m:r>
+                    </m:oMath>
+                  </m:oMathPara>
+                </a14:m>
+                <a:endParaRPr lang="en-US" sz="2000" dirty="0"/>
+              </a:p>
+            </p:txBody>
+          </p:sp>
+        </mc:Choice>
+        <mc:Fallback>
+          <p:sp>
+            <p:nvSpPr>
+              <p:cNvPr id="67" name="TextBox 66">
+                <a:extLst>
+                  <a:ext uri="{FF2B5EF4-FFF2-40B4-BE49-F238E27FC236}">
+                    <a16:creationId xmlns:a16="http://schemas.microsoft.com/office/drawing/2014/main" id="{EEC4AD4D-0AB3-9EC6-4531-FB6199100B29}"/>
+                  </a:ext>
+                </a:extLst>
+              </p:cNvPr>
+              <p:cNvSpPr txBox="1">
+                <a:spLocks noRot="1" noChangeAspect="1" noMove="1" noResize="1" noEditPoints="1" noAdjustHandles="1" noChangeArrowheads="1" noChangeShapeType="1" noTextEdit="1"/>
+              </p:cNvSpPr>
+              <p:nvPr/>
+            </p:nvSpPr>
+            <p:spPr>
+              <a:xfrm>
+                <a:off x="9197701" y="758070"/>
+                <a:ext cx="232435" cy="307777"/>
+              </a:xfrm>
+              <a:prstGeom prst="rect">
+                <a:avLst/>
+              </a:prstGeom>
+              <a:blipFill>
+                <a:blip r:embed="rId6"/>
+                <a:stretch>
+                  <a:fillRect l="-26316" r="-26316" b="-5882"/>
+                </a:stretch>
+              </a:blipFill>
+            </p:spPr>
+            <p:txBody>
+              <a:bodyPr/>
+              <a:lstStyle/>
+              <a:p>
+                <a:r>
+                  <a:rPr lang="en-US">
+                    <a:noFill/>
+                  </a:rPr>
+                  <a:t> </a:t>
+                </a:r>
+              </a:p>
+            </p:txBody>
+          </p:sp>
+        </mc:Fallback>
+      </mc:AlternateContent>
+    </p:spTree>
+    <p:extLst>
+      <p:ext uri="{BB962C8B-B14F-4D97-AF65-F5344CB8AC3E}">
+        <p14:creationId xmlns:p14="http://schemas.microsoft.com/office/powerpoint/2010/main" val="895399908"/>
       </p:ext>
     </p:extLst>
   </p:cSld>

--- a/01_Foundational_Concepts/Drawings.pptx
+++ b/01_Foundational_Concepts/Drawings.pptx
@@ -5,7 +5,7 @@
     <p:sldMasterId id="2147483648" r:id="rId1"/>
   </p:sldMasterIdLst>
   <p:notesMasterIdLst>
-    <p:notesMasterId r:id="rId9"/>
+    <p:notesMasterId r:id="rId10"/>
   </p:notesMasterIdLst>
   <p:sldIdLst>
     <p:sldId id="256" r:id="rId2"/>
@@ -15,6 +15,7 @@
     <p:sldId id="260" r:id="rId6"/>
     <p:sldId id="261" r:id="rId7"/>
     <p:sldId id="262" r:id="rId8"/>
+    <p:sldId id="263" r:id="rId9"/>
   </p:sldIdLst>
   <p:sldSz cx="12192000" cy="6858000"/>
   <p:notesSz cx="6858000" cy="9144000"/>
@@ -203,7 +204,7 @@
           <a:p>
             <a:fld id="{91EB33D0-185C-4380-8DA6-9AF9060E860B}" type="datetimeFigureOut">
               <a:rPr lang="en-US" smtClean="0"/>
-              <a:t>3/8/2026</a:t>
+              <a:t>3/15/2026</a:t>
             </a:fld>
             <a:endParaRPr lang="en-US"/>
           </a:p>
@@ -1002,6 +1003,117 @@
 </p:notes>
 </file>
 
+<file path=ppt/notesSlides/notesSlide6.xml><?xml version="1.0" encoding="utf-8"?>
+<p:notes xmlns:a="http://schemas.openxmlformats.org/drawingml/2006/main" xmlns:r="http://schemas.openxmlformats.org/officeDocument/2006/relationships" xmlns:p="http://schemas.openxmlformats.org/presentationml/2006/main">
+  <p:cSld>
+    <p:spTree>
+      <p:nvGrpSpPr>
+        <p:cNvPr id="1" name="">
+          <a:extLst>
+            <a:ext uri="{FF2B5EF4-FFF2-40B4-BE49-F238E27FC236}">
+              <a16:creationId xmlns:a16="http://schemas.microsoft.com/office/drawing/2014/main" id="{628BECF3-8308-034A-AEFE-28280B8EEC9E}"/>
+            </a:ext>
+          </a:extLst>
+        </p:cNvPr>
+        <p:cNvGrpSpPr/>
+        <p:nvPr/>
+      </p:nvGrpSpPr>
+      <p:grpSpPr>
+        <a:xfrm>
+          <a:off x="0" y="0"/>
+          <a:ext cx="0" cy="0"/>
+          <a:chOff x="0" y="0"/>
+          <a:chExt cx="0" cy="0"/>
+        </a:xfrm>
+      </p:grpSpPr>
+      <p:sp>
+        <p:nvSpPr>
+          <p:cNvPr id="2" name="슬라이드 이미지 개체 틀 1">
+            <a:extLst>
+              <a:ext uri="{FF2B5EF4-FFF2-40B4-BE49-F238E27FC236}">
+                <a16:creationId xmlns:a16="http://schemas.microsoft.com/office/drawing/2014/main" id="{9D8C0965-343C-4382-D704-92EC17A24E7D}"/>
+              </a:ext>
+            </a:extLst>
+          </p:cNvPr>
+          <p:cNvSpPr>
+            <a:spLocks noGrp="1" noRot="1" noChangeAspect="1"/>
+          </p:cNvSpPr>
+          <p:nvPr>
+            <p:ph type="sldImg"/>
+          </p:nvPr>
+        </p:nvSpPr>
+        <p:spPr/>
+      </p:sp>
+      <p:sp>
+        <p:nvSpPr>
+          <p:cNvPr id="3" name="슬라이드 노트 개체 틀 2">
+            <a:extLst>
+              <a:ext uri="{FF2B5EF4-FFF2-40B4-BE49-F238E27FC236}">
+                <a16:creationId xmlns:a16="http://schemas.microsoft.com/office/drawing/2014/main" id="{49F08928-1C94-C064-BFDA-A689E56C78FF}"/>
+              </a:ext>
+            </a:extLst>
+          </p:cNvPr>
+          <p:cNvSpPr>
+            <a:spLocks noGrp="1"/>
+          </p:cNvSpPr>
+          <p:nvPr>
+            <p:ph type="body" idx="1"/>
+          </p:nvPr>
+        </p:nvSpPr>
+        <p:spPr/>
+        <p:txBody>
+          <a:bodyPr/>
+          <a:lstStyle/>
+          <a:p>
+            <a:r>
+              <a:rPr lang="en-US" dirty="0"/>
+              <a:t>Sample space</a:t>
+            </a:r>
+          </a:p>
+        </p:txBody>
+      </p:sp>
+      <p:sp>
+        <p:nvSpPr>
+          <p:cNvPr id="4" name="슬라이드 번호 개체 틀 3">
+            <a:extLst>
+              <a:ext uri="{FF2B5EF4-FFF2-40B4-BE49-F238E27FC236}">
+                <a16:creationId xmlns:a16="http://schemas.microsoft.com/office/drawing/2014/main" id="{3421D0BA-371E-8AEA-FF13-509CF298D7B8}"/>
+              </a:ext>
+            </a:extLst>
+          </p:cNvPr>
+          <p:cNvSpPr>
+            <a:spLocks noGrp="1"/>
+          </p:cNvSpPr>
+          <p:nvPr>
+            <p:ph type="sldNum" sz="quarter" idx="5"/>
+          </p:nvPr>
+        </p:nvSpPr>
+        <p:spPr/>
+        <p:txBody>
+          <a:bodyPr/>
+          <a:lstStyle/>
+          <a:p>
+            <a:fld id="{A7360639-163A-4450-8FAE-C19D9D8590D4}" type="slidenum">
+              <a:rPr lang="en-US" smtClean="0"/>
+              <a:t>8</a:t>
+            </a:fld>
+            <a:endParaRPr lang="en-US"/>
+          </a:p>
+        </p:txBody>
+      </p:sp>
+    </p:spTree>
+    <p:extLst>
+      <p:ext uri="{BB962C8B-B14F-4D97-AF65-F5344CB8AC3E}">
+        <p14:creationId xmlns:p14="http://schemas.microsoft.com/office/powerpoint/2010/main" val="1438635498"/>
+      </p:ext>
+    </p:extLst>
+  </p:cSld>
+  <p:clrMapOvr>
+    <a:masterClrMapping/>
+  </p:clrMapOvr>
+</p:notes>
+</file>
+
 <file path=ppt/slideLayouts/slideLayout1.xml><?xml version="1.0" encoding="utf-8"?>
 <p:sldLayout xmlns:a="http://schemas.openxmlformats.org/drawingml/2006/main" xmlns:r="http://schemas.openxmlformats.org/officeDocument/2006/relationships" xmlns:p="http://schemas.openxmlformats.org/presentationml/2006/main" type="title" preserve="1">
   <p:cSld name="제목 슬라이드">
@@ -1151,7 +1263,7 @@
           <a:p>
             <a:fld id="{E76E12A1-65CB-470B-BF0A-B1C5B1B67D68}" type="datetimeFigureOut">
               <a:rPr lang="en-US" smtClean="0"/>
-              <a:t>3/8/2026</a:t>
+              <a:t>3/15/2026</a:t>
             </a:fld>
             <a:endParaRPr lang="en-US"/>
           </a:p>
@@ -1351,7 +1463,7 @@
           <a:p>
             <a:fld id="{E76E12A1-65CB-470B-BF0A-B1C5B1B67D68}" type="datetimeFigureOut">
               <a:rPr lang="en-US" smtClean="0"/>
-              <a:t>3/8/2026</a:t>
+              <a:t>3/15/2026</a:t>
             </a:fld>
             <a:endParaRPr lang="en-US"/>
           </a:p>
@@ -1561,7 +1673,7 @@
           <a:p>
             <a:fld id="{E76E12A1-65CB-470B-BF0A-B1C5B1B67D68}" type="datetimeFigureOut">
               <a:rPr lang="en-US" smtClean="0"/>
-              <a:t>3/8/2026</a:t>
+              <a:t>3/15/2026</a:t>
             </a:fld>
             <a:endParaRPr lang="en-US"/>
           </a:p>
@@ -1761,7 +1873,7 @@
           <a:p>
             <a:fld id="{E76E12A1-65CB-470B-BF0A-B1C5B1B67D68}" type="datetimeFigureOut">
               <a:rPr lang="en-US" smtClean="0"/>
-              <a:t>3/8/2026</a:t>
+              <a:t>3/15/2026</a:t>
             </a:fld>
             <a:endParaRPr lang="en-US"/>
           </a:p>
@@ -2037,7 +2149,7 @@
           <a:p>
             <a:fld id="{E76E12A1-65CB-470B-BF0A-B1C5B1B67D68}" type="datetimeFigureOut">
               <a:rPr lang="en-US" smtClean="0"/>
-              <a:t>3/8/2026</a:t>
+              <a:t>3/15/2026</a:t>
             </a:fld>
             <a:endParaRPr lang="en-US"/>
           </a:p>
@@ -2305,7 +2417,7 @@
           <a:p>
             <a:fld id="{E76E12A1-65CB-470B-BF0A-B1C5B1B67D68}" type="datetimeFigureOut">
               <a:rPr lang="en-US" smtClean="0"/>
-              <a:t>3/8/2026</a:t>
+              <a:t>3/15/2026</a:t>
             </a:fld>
             <a:endParaRPr lang="en-US"/>
           </a:p>
@@ -2720,7 +2832,7 @@
           <a:p>
             <a:fld id="{E76E12A1-65CB-470B-BF0A-B1C5B1B67D68}" type="datetimeFigureOut">
               <a:rPr lang="en-US" smtClean="0"/>
-              <a:t>3/8/2026</a:t>
+              <a:t>3/15/2026</a:t>
             </a:fld>
             <a:endParaRPr lang="en-US"/>
           </a:p>
@@ -2862,7 +2974,7 @@
           <a:p>
             <a:fld id="{E76E12A1-65CB-470B-BF0A-B1C5B1B67D68}" type="datetimeFigureOut">
               <a:rPr lang="en-US" smtClean="0"/>
-              <a:t>3/8/2026</a:t>
+              <a:t>3/15/2026</a:t>
             </a:fld>
             <a:endParaRPr lang="en-US"/>
           </a:p>
@@ -2975,7 +3087,7 @@
           <a:p>
             <a:fld id="{E76E12A1-65CB-470B-BF0A-B1C5B1B67D68}" type="datetimeFigureOut">
               <a:rPr lang="en-US" smtClean="0"/>
-              <a:t>3/8/2026</a:t>
+              <a:t>3/15/2026</a:t>
             </a:fld>
             <a:endParaRPr lang="en-US"/>
           </a:p>
@@ -3288,7 +3400,7 @@
           <a:p>
             <a:fld id="{E76E12A1-65CB-470B-BF0A-B1C5B1B67D68}" type="datetimeFigureOut">
               <a:rPr lang="en-US" smtClean="0"/>
-              <a:t>3/8/2026</a:t>
+              <a:t>3/15/2026</a:t>
             </a:fld>
             <a:endParaRPr lang="en-US"/>
           </a:p>
@@ -3577,7 +3689,7 @@
           <a:p>
             <a:fld id="{E76E12A1-65CB-470B-BF0A-B1C5B1B67D68}" type="datetimeFigureOut">
               <a:rPr lang="en-US" smtClean="0"/>
-              <a:t>3/8/2026</a:t>
+              <a:t>3/15/2026</a:t>
             </a:fld>
             <a:endParaRPr lang="en-US"/>
           </a:p>
@@ -3820,7 +3932,7 @@
           <a:p>
             <a:fld id="{E76E12A1-65CB-470B-BF0A-B1C5B1B67D68}" type="datetimeFigureOut">
               <a:rPr lang="en-US" smtClean="0"/>
-              <a:t>3/8/2026</a:t>
+              <a:t>3/15/2026</a:t>
             </a:fld>
             <a:endParaRPr lang="en-US"/>
           </a:p>
@@ -8809,13 +8921,7 @@
                         <a:rPr lang="en-US" sz="1400" b="0" i="1" dirty="0" smtClean="0">
                           <a:latin typeface="Cambria Math" panose="02040503050406030204" pitchFamily="18" charset="0"/>
                         </a:rPr>
-                        <m:t>≤</m:t>
-                      </m:r>
-                      <m:r>
-                        <a:rPr lang="en-US" sz="1400" b="0" i="1" dirty="0" smtClean="0">
-                          <a:latin typeface="Cambria Math" panose="02040503050406030204" pitchFamily="18" charset="0"/>
-                        </a:rPr>
-                        <m:t>1</m:t>
+                        <m:t>≤1</m:t>
                       </m:r>
                     </m:oMath>
                   </m:oMathPara>
@@ -11711,13 +11817,7 @@
                         <a:rPr lang="en-US" sz="1400" b="0" i="1" dirty="0" smtClean="0">
                           <a:latin typeface="Cambria Math" panose="02040503050406030204" pitchFamily="18" charset="0"/>
                         </a:rPr>
-                        <m:t>=</m:t>
-                      </m:r>
-                      <m:r>
-                        <a:rPr lang="en-US" sz="1400" b="0" i="1" dirty="0" smtClean="0">
-                          <a:latin typeface="Cambria Math" panose="02040503050406030204" pitchFamily="18" charset="0"/>
-                        </a:rPr>
-                        <m:t>4</m:t>
+                        <m:t>=4</m:t>
                       </m:r>
                     </m:oMath>
                   </m:oMathPara>
@@ -11824,13 +11924,7 @@
                         <a:rPr lang="en-US" sz="1400" b="0" i="1" dirty="0" smtClean="0">
                           <a:latin typeface="Cambria Math" panose="02040503050406030204" pitchFamily="18" charset="0"/>
                         </a:rPr>
-                        <m:t>=</m:t>
-                      </m:r>
-                      <m:r>
-                        <a:rPr lang="en-US" sz="1400" b="0" i="1" dirty="0" smtClean="0">
-                          <a:latin typeface="Cambria Math" panose="02040503050406030204" pitchFamily="18" charset="0"/>
-                        </a:rPr>
-                        <m:t>3</m:t>
+                        <m:t>=3</m:t>
                       </m:r>
                     </m:oMath>
                   </m:oMathPara>
@@ -11937,13 +12031,7 @@
                         <a:rPr lang="en-US" sz="1400" b="0" i="1" dirty="0" smtClean="0">
                           <a:latin typeface="Cambria Math" panose="02040503050406030204" pitchFamily="18" charset="0"/>
                         </a:rPr>
-                        <m:t>=</m:t>
-                      </m:r>
-                      <m:r>
-                        <a:rPr lang="en-US" sz="1400" b="0" i="1" dirty="0" smtClean="0">
-                          <a:latin typeface="Cambria Math" panose="02040503050406030204" pitchFamily="18" charset="0"/>
-                        </a:rPr>
-                        <m:t>2</m:t>
+                        <m:t>=2</m:t>
                       </m:r>
                     </m:oMath>
                   </m:oMathPara>
@@ -12050,13 +12138,7 @@
                         <a:rPr lang="en-US" sz="1400" b="0" i="1" dirty="0" smtClean="0">
                           <a:latin typeface="Cambria Math" panose="02040503050406030204" pitchFamily="18" charset="0"/>
                         </a:rPr>
-                        <m:t>=</m:t>
-                      </m:r>
-                      <m:r>
-                        <a:rPr lang="en-US" sz="1400" b="0" i="1" dirty="0" smtClean="0">
-                          <a:latin typeface="Cambria Math" panose="02040503050406030204" pitchFamily="18" charset="0"/>
-                        </a:rPr>
-                        <m:t>1</m:t>
+                        <m:t>=1</m:t>
                       </m:r>
                     </m:oMath>
                   </m:oMathPara>
@@ -13648,13 +13730,7 @@
                         <a:rPr lang="en-US" sz="1400" b="0" i="1" dirty="0" smtClean="0">
                           <a:latin typeface="Cambria Math" panose="02040503050406030204" pitchFamily="18" charset="0"/>
                         </a:rPr>
-                        <m:t>≤</m:t>
-                      </m:r>
-                      <m:r>
-                        <a:rPr lang="en-US" sz="1400" b="0" i="1" dirty="0" smtClean="0">
-                          <a:latin typeface="Cambria Math" panose="02040503050406030204" pitchFamily="18" charset="0"/>
-                        </a:rPr>
-                        <m:t>1</m:t>
+                        <m:t>≤1</m:t>
                       </m:r>
                     </m:oMath>
                   </m:oMathPara>
@@ -23115,8 +23191,8 @@
           </p:sp>
         </mc:Fallback>
       </mc:AlternateContent>
-      <mc:AlternateContent xmlns:mc="http://schemas.openxmlformats.org/markup-compatibility/2006">
-        <mc:Choice xmlns:a14="http://schemas.microsoft.com/office/drawing/2010/main" Requires="a14">
+      <mc:AlternateContent xmlns:mc="http://schemas.openxmlformats.org/markup-compatibility/2006" xmlns:a14="http://schemas.microsoft.com/office/drawing/2010/main">
+        <mc:Choice Requires="a14">
           <p:sp>
             <p:nvSpPr>
               <p:cNvPr id="109" name="TextBox 108">
@@ -23198,7 +23274,7 @@
             </p:txBody>
           </p:sp>
         </mc:Choice>
-        <mc:Fallback>
+        <mc:Fallback xmlns="">
           <p:sp>
             <p:nvSpPr>
               <p:cNvPr id="109" name="TextBox 108">
@@ -23320,8 +23396,8 @@
           </a:p>
         </p:txBody>
       </p:sp>
-      <mc:AlternateContent xmlns:mc="http://schemas.openxmlformats.org/markup-compatibility/2006">
-        <mc:Choice xmlns:a14="http://schemas.microsoft.com/office/drawing/2010/main" Requires="a14">
+      <mc:AlternateContent xmlns:mc="http://schemas.openxmlformats.org/markup-compatibility/2006" xmlns:a14="http://schemas.microsoft.com/office/drawing/2010/main">
+        <mc:Choice Requires="a14">
           <p:sp>
             <p:nvSpPr>
               <p:cNvPr id="112" name="TextBox 111">
@@ -23374,7 +23450,7 @@
             </p:txBody>
           </p:sp>
         </mc:Choice>
-        <mc:Fallback>
+        <mc:Fallback xmlns="">
           <p:sp>
             <p:nvSpPr>
               <p:cNvPr id="112" name="TextBox 111">
@@ -23548,8 +23624,8 @@
           </a:fontRef>
         </p:style>
       </p:cxnSp>
-      <mc:AlternateContent xmlns:mc="http://schemas.openxmlformats.org/markup-compatibility/2006">
-        <mc:Choice xmlns:a14="http://schemas.microsoft.com/office/drawing/2010/main" Requires="a14">
+      <mc:AlternateContent xmlns:mc="http://schemas.openxmlformats.org/markup-compatibility/2006" xmlns:a14="http://schemas.microsoft.com/office/drawing/2010/main">
+        <mc:Choice Requires="a14">
           <p:sp>
             <p:nvSpPr>
               <p:cNvPr id="129" name="TextBox 128">
@@ -23631,7 +23707,7 @@
             </p:txBody>
           </p:sp>
         </mc:Choice>
-        <mc:Fallback>
+        <mc:Fallback xmlns="">
           <p:sp>
             <p:nvSpPr>
               <p:cNvPr id="129" name="TextBox 128">
@@ -23716,8 +23792,8 @@
           </a:p>
         </p:txBody>
       </p:sp>
-      <mc:AlternateContent xmlns:mc="http://schemas.openxmlformats.org/markup-compatibility/2006">
-        <mc:Choice xmlns:a14="http://schemas.microsoft.com/office/drawing/2010/main" Requires="a14">
+      <mc:AlternateContent xmlns:mc="http://schemas.openxmlformats.org/markup-compatibility/2006" xmlns:a14="http://schemas.microsoft.com/office/drawing/2010/main">
+        <mc:Choice Requires="a14">
           <p:sp>
             <p:nvSpPr>
               <p:cNvPr id="131" name="TextBox 130">
@@ -23799,7 +23875,7 @@
             </p:txBody>
           </p:sp>
         </mc:Choice>
-        <mc:Fallback>
+        <mc:Fallback xmlns="">
           <p:sp>
             <p:nvSpPr>
               <p:cNvPr id="131" name="TextBox 130">
@@ -23884,8 +23960,8 @@
           </a:p>
         </p:txBody>
       </p:sp>
-      <mc:AlternateContent xmlns:mc="http://schemas.openxmlformats.org/markup-compatibility/2006">
-        <mc:Choice xmlns:a14="http://schemas.microsoft.com/office/drawing/2010/main" Requires="a14">
+      <mc:AlternateContent xmlns:mc="http://schemas.openxmlformats.org/markup-compatibility/2006" xmlns:a14="http://schemas.microsoft.com/office/drawing/2010/main">
+        <mc:Choice Requires="a14">
           <p:sp>
             <p:nvSpPr>
               <p:cNvPr id="134" name="TextBox 133">
@@ -23987,7 +24063,7 @@
             </p:txBody>
           </p:sp>
         </mc:Choice>
-        <mc:Fallback>
+        <mc:Fallback xmlns="">
           <p:sp>
             <p:nvSpPr>
               <p:cNvPr id="134" name="TextBox 133">
@@ -24032,8 +24108,8 @@
           </p:sp>
         </mc:Fallback>
       </mc:AlternateContent>
-      <mc:AlternateContent xmlns:mc="http://schemas.openxmlformats.org/markup-compatibility/2006">
-        <mc:Choice xmlns:a14="http://schemas.microsoft.com/office/drawing/2010/main" Requires="a14">
+      <mc:AlternateContent xmlns:mc="http://schemas.openxmlformats.org/markup-compatibility/2006" xmlns:a14="http://schemas.microsoft.com/office/drawing/2010/main">
+        <mc:Choice Requires="a14">
           <p:sp>
             <p:nvSpPr>
               <p:cNvPr id="136" name="TextBox 135">
@@ -24135,7 +24211,7 @@
             </p:txBody>
           </p:sp>
         </mc:Choice>
-        <mc:Fallback>
+        <mc:Fallback xmlns="">
           <p:sp>
             <p:nvSpPr>
               <p:cNvPr id="136" name="TextBox 135">
@@ -24180,8 +24256,8 @@
           </p:sp>
         </mc:Fallback>
       </mc:AlternateContent>
-      <mc:AlternateContent xmlns:mc="http://schemas.openxmlformats.org/markup-compatibility/2006">
-        <mc:Choice xmlns:a14="http://schemas.microsoft.com/office/drawing/2010/main" Requires="a14">
+      <mc:AlternateContent xmlns:mc="http://schemas.openxmlformats.org/markup-compatibility/2006" xmlns:a14="http://schemas.microsoft.com/office/drawing/2010/main">
+        <mc:Choice Requires="a14">
           <p:sp>
             <p:nvSpPr>
               <p:cNvPr id="137" name="TextBox 136">
@@ -24283,7 +24359,7 @@
             </p:txBody>
           </p:sp>
         </mc:Choice>
-        <mc:Fallback>
+        <mc:Fallback xmlns="">
           <p:sp>
             <p:nvSpPr>
               <p:cNvPr id="137" name="TextBox 136">
@@ -24486,8 +24562,8 @@
           </a:p>
         </p:txBody>
       </p:sp>
-      <mc:AlternateContent xmlns:mc="http://schemas.openxmlformats.org/markup-compatibility/2006">
-        <mc:Choice xmlns:a14="http://schemas.microsoft.com/office/drawing/2010/main" Requires="a14">
+      <mc:AlternateContent xmlns:mc="http://schemas.openxmlformats.org/markup-compatibility/2006" xmlns:a14="http://schemas.microsoft.com/office/drawing/2010/main">
+        <mc:Choice Requires="a14">
           <p:sp>
             <p:nvSpPr>
               <p:cNvPr id="5" name="TextBox 4">
@@ -24540,7 +24616,7 @@
             </p:txBody>
           </p:sp>
         </mc:Choice>
-        <mc:Fallback>
+        <mc:Fallback xmlns="">
           <p:sp>
             <p:nvSpPr>
               <p:cNvPr id="5" name="TextBox 4">
@@ -24648,8 +24724,8 @@
           </a:p>
         </p:txBody>
       </p:sp>
-      <mc:AlternateContent xmlns:mc="http://schemas.openxmlformats.org/markup-compatibility/2006">
-        <mc:Choice xmlns:a14="http://schemas.microsoft.com/office/drawing/2010/main" Requires="a14">
+      <mc:AlternateContent xmlns:mc="http://schemas.openxmlformats.org/markup-compatibility/2006" xmlns:a14="http://schemas.microsoft.com/office/drawing/2010/main">
+        <mc:Choice Requires="a14">
           <p:sp>
             <p:nvSpPr>
               <p:cNvPr id="7" name="TextBox 6">
@@ -24710,7 +24786,7 @@
             </p:txBody>
           </p:sp>
         </mc:Choice>
-        <mc:Fallback>
+        <mc:Fallback xmlns="">
           <p:sp>
             <p:nvSpPr>
               <p:cNvPr id="7" name="TextBox 6">
@@ -24797,8 +24873,8 @@
           </a:p>
         </p:txBody>
       </p:sp>
-      <mc:AlternateContent xmlns:mc="http://schemas.openxmlformats.org/markup-compatibility/2006">
-        <mc:Choice xmlns:a14="http://schemas.microsoft.com/office/drawing/2010/main" Requires="a14">
+      <mc:AlternateContent xmlns:mc="http://schemas.openxmlformats.org/markup-compatibility/2006" xmlns:a14="http://schemas.microsoft.com/office/drawing/2010/main">
+        <mc:Choice Requires="a14">
           <p:sp>
             <p:nvSpPr>
               <p:cNvPr id="9" name="TextBox 8">
@@ -24855,7 +24931,7 @@
             </p:txBody>
           </p:sp>
         </mc:Choice>
-        <mc:Fallback>
+        <mc:Fallback xmlns="">
           <p:sp>
             <p:nvSpPr>
               <p:cNvPr id="9" name="TextBox 8">
@@ -25098,8 +25174,8 @@
           </a:p>
         </p:txBody>
       </p:sp>
-      <mc:AlternateContent xmlns:mc="http://schemas.openxmlformats.org/markup-compatibility/2006">
-        <mc:Choice xmlns:a14="http://schemas.microsoft.com/office/drawing/2010/main" Requires="a14">
+      <mc:AlternateContent xmlns:mc="http://schemas.openxmlformats.org/markup-compatibility/2006" xmlns:a14="http://schemas.microsoft.com/office/drawing/2010/main">
+        <mc:Choice Requires="a14">
           <p:sp>
             <p:nvSpPr>
               <p:cNvPr id="25" name="TextBox 24">
@@ -25152,7 +25228,7 @@
             </p:txBody>
           </p:sp>
         </mc:Choice>
-        <mc:Fallback>
+        <mc:Fallback xmlns="">
           <p:sp>
             <p:nvSpPr>
               <p:cNvPr id="25" name="TextBox 24">
@@ -25261,8 +25337,8 @@
           </a:p>
         </p:txBody>
       </p:sp>
-      <mc:AlternateContent xmlns:mc="http://schemas.openxmlformats.org/markup-compatibility/2006">
-        <mc:Choice xmlns:a14="http://schemas.microsoft.com/office/drawing/2010/main" Requires="a14">
+      <mc:AlternateContent xmlns:mc="http://schemas.openxmlformats.org/markup-compatibility/2006" xmlns:a14="http://schemas.microsoft.com/office/drawing/2010/main">
+        <mc:Choice Requires="a14">
           <p:sp>
             <p:nvSpPr>
               <p:cNvPr id="27" name="TextBox 26">
@@ -25323,7 +25399,7 @@
             </p:txBody>
           </p:sp>
         </mc:Choice>
-        <mc:Fallback>
+        <mc:Fallback xmlns="">
           <p:sp>
             <p:nvSpPr>
               <p:cNvPr id="27" name="TextBox 26">
@@ -25410,8 +25486,8 @@
           </a:p>
         </p:txBody>
       </p:sp>
-      <mc:AlternateContent xmlns:mc="http://schemas.openxmlformats.org/markup-compatibility/2006">
-        <mc:Choice xmlns:a14="http://schemas.microsoft.com/office/drawing/2010/main" Requires="a14">
+      <mc:AlternateContent xmlns:mc="http://schemas.openxmlformats.org/markup-compatibility/2006" xmlns:a14="http://schemas.microsoft.com/office/drawing/2010/main">
+        <mc:Choice Requires="a14">
           <p:sp>
             <p:nvSpPr>
               <p:cNvPr id="29" name="TextBox 28">
@@ -25468,7 +25544,7 @@
             </p:txBody>
           </p:sp>
         </mc:Choice>
-        <mc:Fallback>
+        <mc:Fallback xmlns="">
           <p:sp>
             <p:nvSpPr>
               <p:cNvPr id="29" name="TextBox 28">
@@ -25611,8 +25687,8 @@
           </a:p>
         </p:txBody>
       </p:sp>
-      <mc:AlternateContent xmlns:mc="http://schemas.openxmlformats.org/markup-compatibility/2006">
-        <mc:Choice xmlns:a14="http://schemas.microsoft.com/office/drawing/2010/main" Requires="a14">
+      <mc:AlternateContent xmlns:mc="http://schemas.openxmlformats.org/markup-compatibility/2006" xmlns:a14="http://schemas.microsoft.com/office/drawing/2010/main">
+        <mc:Choice Requires="a14">
           <p:sp>
             <p:nvSpPr>
               <p:cNvPr id="32" name="TextBox 31">
@@ -25673,7 +25749,7 @@
             </p:txBody>
           </p:sp>
         </mc:Choice>
-        <mc:Fallback>
+        <mc:Fallback xmlns="">
           <p:sp>
             <p:nvSpPr>
               <p:cNvPr id="32" name="TextBox 31">
@@ -26412,8 +26488,8 @@
           </a:fontRef>
         </p:style>
       </p:cxnSp>
-      <mc:AlternateContent xmlns:mc="http://schemas.openxmlformats.org/markup-compatibility/2006">
-        <mc:Choice xmlns:a14="http://schemas.microsoft.com/office/drawing/2010/main" Requires="a14">
+      <mc:AlternateContent xmlns:mc="http://schemas.openxmlformats.org/markup-compatibility/2006" xmlns:a14="http://schemas.microsoft.com/office/drawing/2010/main">
+        <mc:Choice Requires="a14">
           <p:sp>
             <p:nvSpPr>
               <p:cNvPr id="17" name="TextBox 16">
@@ -26442,7 +26518,6 @@
               </a:bodyPr>
               <a:lstStyle/>
               <a:p>
-                <a:pPr/>
                 <a:r>
                   <a:rPr lang="en-US" sz="1400" b="1" dirty="0">
                     <a:solidFill>
@@ -26473,7 +26548,7 @@
             </p:txBody>
           </p:sp>
         </mc:Choice>
-        <mc:Fallback>
+        <mc:Fallback xmlns="">
           <p:sp>
             <p:nvSpPr>
               <p:cNvPr id="17" name="TextBox 16">
@@ -26518,8 +26593,8 @@
           </p:sp>
         </mc:Fallback>
       </mc:AlternateContent>
-      <mc:AlternateContent xmlns:mc="http://schemas.openxmlformats.org/markup-compatibility/2006">
-        <mc:Choice xmlns:a14="http://schemas.microsoft.com/office/drawing/2010/main" Requires="a14">
+      <mc:AlternateContent xmlns:mc="http://schemas.openxmlformats.org/markup-compatibility/2006" xmlns:a14="http://schemas.microsoft.com/office/drawing/2010/main">
+        <mc:Choice Requires="a14">
           <p:sp>
             <p:nvSpPr>
               <p:cNvPr id="18" name="TextBox 17">
@@ -26594,7 +26669,7 @@
             </p:txBody>
           </p:sp>
         </mc:Choice>
-        <mc:Fallback>
+        <mc:Fallback xmlns="">
           <p:sp>
             <p:nvSpPr>
               <p:cNvPr id="18" name="TextBox 17">
@@ -26639,8 +26714,8 @@
           </p:sp>
         </mc:Fallback>
       </mc:AlternateContent>
-      <mc:AlternateContent xmlns:mc="http://schemas.openxmlformats.org/markup-compatibility/2006">
-        <mc:Choice xmlns:a14="http://schemas.microsoft.com/office/drawing/2010/main" Requires="a14">
+      <mc:AlternateContent xmlns:mc="http://schemas.openxmlformats.org/markup-compatibility/2006" xmlns:a14="http://schemas.microsoft.com/office/drawing/2010/main">
+        <mc:Choice Requires="a14">
           <p:sp>
             <p:nvSpPr>
               <p:cNvPr id="100" name="TextBox 99">
@@ -26669,7 +26744,6 @@
               </a:bodyPr>
               <a:lstStyle/>
               <a:p>
-                <a:pPr/>
                 <a:r>
                   <a:rPr lang="en-US" sz="1400" b="1" dirty="0">
                     <a:solidFill>
@@ -26700,7 +26774,7 @@
             </p:txBody>
           </p:sp>
         </mc:Choice>
-        <mc:Fallback>
+        <mc:Fallback xmlns="">
           <p:sp>
             <p:nvSpPr>
               <p:cNvPr id="100" name="TextBox 99">
@@ -26745,8 +26819,8 @@
           </p:sp>
         </mc:Fallback>
       </mc:AlternateContent>
-      <mc:AlternateContent xmlns:mc="http://schemas.openxmlformats.org/markup-compatibility/2006">
-        <mc:Choice xmlns:a14="http://schemas.microsoft.com/office/drawing/2010/main" Requires="a14">
+      <mc:AlternateContent xmlns:mc="http://schemas.openxmlformats.org/markup-compatibility/2006" xmlns:a14="http://schemas.microsoft.com/office/drawing/2010/main">
+        <mc:Choice Requires="a14">
           <p:sp>
             <p:nvSpPr>
               <p:cNvPr id="101" name="TextBox 100">
@@ -26821,7 +26895,7 @@
             </p:txBody>
           </p:sp>
         </mc:Choice>
-        <mc:Fallback>
+        <mc:Fallback xmlns="">
           <p:sp>
             <p:nvSpPr>
               <p:cNvPr id="101" name="TextBox 100">
@@ -26866,8 +26940,8 @@
           </p:sp>
         </mc:Fallback>
       </mc:AlternateContent>
-      <mc:AlternateContent xmlns:mc="http://schemas.openxmlformats.org/markup-compatibility/2006">
-        <mc:Choice xmlns:a14="http://schemas.microsoft.com/office/drawing/2010/main" Requires="a14">
+      <mc:AlternateContent xmlns:mc="http://schemas.openxmlformats.org/markup-compatibility/2006" xmlns:a14="http://schemas.microsoft.com/office/drawing/2010/main">
+        <mc:Choice Requires="a14">
           <p:sp>
             <p:nvSpPr>
               <p:cNvPr id="102" name="TextBox 101">
@@ -26942,7 +27016,7 @@
             </p:txBody>
           </p:sp>
         </mc:Choice>
-        <mc:Fallback>
+        <mc:Fallback xmlns="">
           <p:sp>
             <p:nvSpPr>
               <p:cNvPr id="102" name="TextBox 101">
@@ -26987,8 +27061,8 @@
           </p:sp>
         </mc:Fallback>
       </mc:AlternateContent>
-      <mc:AlternateContent xmlns:mc="http://schemas.openxmlformats.org/markup-compatibility/2006">
-        <mc:Choice xmlns:a14="http://schemas.microsoft.com/office/drawing/2010/main" Requires="a14">
+      <mc:AlternateContent xmlns:mc="http://schemas.openxmlformats.org/markup-compatibility/2006" xmlns:a14="http://schemas.microsoft.com/office/drawing/2010/main">
+        <mc:Choice Requires="a14">
           <p:sp>
             <p:nvSpPr>
               <p:cNvPr id="103" name="TextBox 102">
@@ -27063,7 +27137,7 @@
             </p:txBody>
           </p:sp>
         </mc:Choice>
-        <mc:Fallback>
+        <mc:Fallback xmlns="">
           <p:sp>
             <p:nvSpPr>
               <p:cNvPr id="103" name="TextBox 102">
@@ -27108,8 +27182,8 @@
           </p:sp>
         </mc:Fallback>
       </mc:AlternateContent>
-      <mc:AlternateContent xmlns:mc="http://schemas.openxmlformats.org/markup-compatibility/2006">
-        <mc:Choice xmlns:a14="http://schemas.microsoft.com/office/drawing/2010/main" Requires="a14">
+      <mc:AlternateContent xmlns:mc="http://schemas.openxmlformats.org/markup-compatibility/2006" xmlns:a14="http://schemas.microsoft.com/office/drawing/2010/main">
+        <mc:Choice Requires="a14">
           <p:sp>
             <p:nvSpPr>
               <p:cNvPr id="104" name="TextBox 103">
@@ -27184,7 +27258,7 @@
             </p:txBody>
           </p:sp>
         </mc:Choice>
-        <mc:Fallback>
+        <mc:Fallback xmlns="">
           <p:sp>
             <p:nvSpPr>
               <p:cNvPr id="104" name="TextBox 103">
@@ -27229,8 +27303,8 @@
           </p:sp>
         </mc:Fallback>
       </mc:AlternateContent>
-      <mc:AlternateContent xmlns:mc="http://schemas.openxmlformats.org/markup-compatibility/2006">
-        <mc:Choice xmlns:a14="http://schemas.microsoft.com/office/drawing/2010/main" Requires="a14">
+      <mc:AlternateContent xmlns:mc="http://schemas.openxmlformats.org/markup-compatibility/2006" xmlns:a14="http://schemas.microsoft.com/office/drawing/2010/main">
+        <mc:Choice Requires="a14">
           <p:sp>
             <p:nvSpPr>
               <p:cNvPr id="105" name="TextBox 104">
@@ -27305,7 +27379,7 @@
             </p:txBody>
           </p:sp>
         </mc:Choice>
-        <mc:Fallback>
+        <mc:Fallback xmlns="">
           <p:sp>
             <p:nvSpPr>
               <p:cNvPr id="105" name="TextBox 104">
@@ -27350,8 +27424,8 @@
           </p:sp>
         </mc:Fallback>
       </mc:AlternateContent>
-      <mc:AlternateContent xmlns:mc="http://schemas.openxmlformats.org/markup-compatibility/2006">
-        <mc:Choice xmlns:a14="http://schemas.microsoft.com/office/drawing/2010/main" Requires="a14">
+      <mc:AlternateContent xmlns:mc="http://schemas.openxmlformats.org/markup-compatibility/2006" xmlns:a14="http://schemas.microsoft.com/office/drawing/2010/main">
+        <mc:Choice Requires="a14">
           <p:sp>
             <p:nvSpPr>
               <p:cNvPr id="106" name="TextBox 105">
@@ -27426,7 +27500,7 @@
             </p:txBody>
           </p:sp>
         </mc:Choice>
-        <mc:Fallback>
+        <mc:Fallback xmlns="">
           <p:sp>
             <p:nvSpPr>
               <p:cNvPr id="106" name="TextBox 105">
@@ -27471,8 +27545,8 @@
           </p:sp>
         </mc:Fallback>
       </mc:AlternateContent>
-      <mc:AlternateContent xmlns:mc="http://schemas.openxmlformats.org/markup-compatibility/2006">
-        <mc:Choice xmlns:a14="http://schemas.microsoft.com/office/drawing/2010/main" Requires="a14">
+      <mc:AlternateContent xmlns:mc="http://schemas.openxmlformats.org/markup-compatibility/2006" xmlns:a14="http://schemas.microsoft.com/office/drawing/2010/main">
+        <mc:Choice Requires="a14">
           <p:sp>
             <p:nvSpPr>
               <p:cNvPr id="107" name="TextBox 106">
@@ -27547,7 +27621,7 @@
             </p:txBody>
           </p:sp>
         </mc:Choice>
-        <mc:Fallback>
+        <mc:Fallback xmlns="">
           <p:sp>
             <p:nvSpPr>
               <p:cNvPr id="107" name="TextBox 106">
@@ -27680,8 +27754,8 @@
           </a:fontRef>
         </p:style>
       </p:cxnSp>
-      <mc:AlternateContent xmlns:mc="http://schemas.openxmlformats.org/markup-compatibility/2006">
-        <mc:Choice xmlns:a14="http://schemas.microsoft.com/office/drawing/2010/main" Requires="a14">
+      <mc:AlternateContent xmlns:mc="http://schemas.openxmlformats.org/markup-compatibility/2006" xmlns:a14="http://schemas.microsoft.com/office/drawing/2010/main">
+        <mc:Choice Requires="a14">
           <p:sp>
             <p:nvSpPr>
               <p:cNvPr id="115" name="TextBox 114">
@@ -27756,7 +27830,7 @@
             </p:txBody>
           </p:sp>
         </mc:Choice>
-        <mc:Fallback>
+        <mc:Fallback xmlns="">
           <p:sp>
             <p:nvSpPr>
               <p:cNvPr id="115" name="TextBox 114">
@@ -27801,8 +27875,8 @@
           </p:sp>
         </mc:Fallback>
       </mc:AlternateContent>
-      <mc:AlternateContent xmlns:mc="http://schemas.openxmlformats.org/markup-compatibility/2006">
-        <mc:Choice xmlns:a14="http://schemas.microsoft.com/office/drawing/2010/main" Requires="a14">
+      <mc:AlternateContent xmlns:mc="http://schemas.openxmlformats.org/markup-compatibility/2006" xmlns:a14="http://schemas.microsoft.com/office/drawing/2010/main">
+        <mc:Choice Requires="a14">
           <p:sp>
             <p:nvSpPr>
               <p:cNvPr id="116" name="TextBox 115">
@@ -27877,7 +27951,7 @@
             </p:txBody>
           </p:sp>
         </mc:Choice>
-        <mc:Fallback>
+        <mc:Fallback xmlns="">
           <p:sp>
             <p:nvSpPr>
               <p:cNvPr id="116" name="TextBox 115">
@@ -27922,8 +27996,8 @@
           </p:sp>
         </mc:Fallback>
       </mc:AlternateContent>
-      <mc:AlternateContent xmlns:mc="http://schemas.openxmlformats.org/markup-compatibility/2006">
-        <mc:Choice xmlns:a14="http://schemas.microsoft.com/office/drawing/2010/main" Requires="a14">
+      <mc:AlternateContent xmlns:mc="http://schemas.openxmlformats.org/markup-compatibility/2006" xmlns:a14="http://schemas.microsoft.com/office/drawing/2010/main">
+        <mc:Choice Requires="a14">
           <p:sp>
             <p:nvSpPr>
               <p:cNvPr id="118" name="TextBox 117">
@@ -27998,7 +28072,7 @@
             </p:txBody>
           </p:sp>
         </mc:Choice>
-        <mc:Fallback>
+        <mc:Fallback xmlns="">
           <p:sp>
             <p:nvSpPr>
               <p:cNvPr id="118" name="TextBox 117">
@@ -28043,8 +28117,8 @@
           </p:sp>
         </mc:Fallback>
       </mc:AlternateContent>
-      <mc:AlternateContent xmlns:mc="http://schemas.openxmlformats.org/markup-compatibility/2006">
-        <mc:Choice xmlns:a14="http://schemas.microsoft.com/office/drawing/2010/main" Requires="a14">
+      <mc:AlternateContent xmlns:mc="http://schemas.openxmlformats.org/markup-compatibility/2006" xmlns:a14="http://schemas.microsoft.com/office/drawing/2010/main">
+        <mc:Choice Requires="a14">
           <p:sp>
             <p:nvSpPr>
               <p:cNvPr id="119" name="TextBox 118">
@@ -28119,7 +28193,7 @@
             </p:txBody>
           </p:sp>
         </mc:Choice>
-        <mc:Fallback>
+        <mc:Fallback xmlns="">
           <p:sp>
             <p:nvSpPr>
               <p:cNvPr id="119" name="TextBox 118">
@@ -28164,8 +28238,8 @@
           </p:sp>
         </mc:Fallback>
       </mc:AlternateContent>
-      <mc:AlternateContent xmlns:mc="http://schemas.openxmlformats.org/markup-compatibility/2006">
-        <mc:Choice xmlns:a14="http://schemas.microsoft.com/office/drawing/2010/main" Requires="a14">
+      <mc:AlternateContent xmlns:mc="http://schemas.openxmlformats.org/markup-compatibility/2006" xmlns:a14="http://schemas.microsoft.com/office/drawing/2010/main">
+        <mc:Choice Requires="a14">
           <p:sp>
             <p:nvSpPr>
               <p:cNvPr id="121" name="TextBox 120">
@@ -28240,7 +28314,7 @@
             </p:txBody>
           </p:sp>
         </mc:Choice>
-        <mc:Fallback>
+        <mc:Fallback xmlns="">
           <p:sp>
             <p:nvSpPr>
               <p:cNvPr id="121" name="TextBox 120">
@@ -28285,8 +28359,8 @@
           </p:sp>
         </mc:Fallback>
       </mc:AlternateContent>
-      <mc:AlternateContent xmlns:mc="http://schemas.openxmlformats.org/markup-compatibility/2006">
-        <mc:Choice xmlns:a14="http://schemas.microsoft.com/office/drawing/2010/main" Requires="a14">
+      <mc:AlternateContent xmlns:mc="http://schemas.openxmlformats.org/markup-compatibility/2006" xmlns:a14="http://schemas.microsoft.com/office/drawing/2010/main">
+        <mc:Choice Requires="a14">
           <p:sp>
             <p:nvSpPr>
               <p:cNvPr id="122" name="TextBox 121">
@@ -28361,7 +28435,7 @@
             </p:txBody>
           </p:sp>
         </mc:Choice>
-        <mc:Fallback>
+        <mc:Fallback xmlns="">
           <p:sp>
             <p:nvSpPr>
               <p:cNvPr id="122" name="TextBox 121">
@@ -28406,8 +28480,8 @@
           </p:sp>
         </mc:Fallback>
       </mc:AlternateContent>
-      <mc:AlternateContent xmlns:mc="http://schemas.openxmlformats.org/markup-compatibility/2006">
-        <mc:Choice xmlns:a14="http://schemas.microsoft.com/office/drawing/2010/main" Requires="a14">
+      <mc:AlternateContent xmlns:mc="http://schemas.openxmlformats.org/markup-compatibility/2006" xmlns:a14="http://schemas.microsoft.com/office/drawing/2010/main">
+        <mc:Choice Requires="a14">
           <p:sp>
             <p:nvSpPr>
               <p:cNvPr id="123" name="TextBox 122">
@@ -28436,7 +28510,6 @@
               </a:bodyPr>
               <a:lstStyle/>
               <a:p>
-                <a:pPr/>
                 <a14:m>
                   <m:oMath xmlns:m="http://schemas.openxmlformats.org/officeDocument/2006/math">
                     <m:r>
@@ -28542,7 +28615,7 @@
             </p:txBody>
           </p:sp>
         </mc:Choice>
-        <mc:Fallback>
+        <mc:Fallback xmlns="">
           <p:sp>
             <p:nvSpPr>
               <p:cNvPr id="123" name="TextBox 122">
@@ -28587,8 +28660,8 @@
           </p:sp>
         </mc:Fallback>
       </mc:AlternateContent>
-      <mc:AlternateContent xmlns:mc="http://schemas.openxmlformats.org/markup-compatibility/2006">
-        <mc:Choice xmlns:a14="http://schemas.microsoft.com/office/drawing/2010/main" Requires="a14">
+      <mc:AlternateContent xmlns:mc="http://schemas.openxmlformats.org/markup-compatibility/2006" xmlns:a14="http://schemas.microsoft.com/office/drawing/2010/main">
+        <mc:Choice Requires="a14">
           <p:sp>
             <p:nvSpPr>
               <p:cNvPr id="124" name="TextBox 123">
@@ -28617,7 +28690,6 @@
               </a:bodyPr>
               <a:lstStyle/>
               <a:p>
-                <a:pPr/>
                 <a14:m>
                   <m:oMath xmlns:m="http://schemas.openxmlformats.org/officeDocument/2006/math">
                     <m:r>
@@ -28723,7 +28795,7 @@
             </p:txBody>
           </p:sp>
         </mc:Choice>
-        <mc:Fallback>
+        <mc:Fallback xmlns="">
           <p:sp>
             <p:nvSpPr>
               <p:cNvPr id="124" name="TextBox 123">
@@ -28768,8 +28840,8 @@
           </p:sp>
         </mc:Fallback>
       </mc:AlternateContent>
-      <mc:AlternateContent xmlns:mc="http://schemas.openxmlformats.org/markup-compatibility/2006">
-        <mc:Choice xmlns:a14="http://schemas.microsoft.com/office/drawing/2010/main" Requires="a14">
+      <mc:AlternateContent xmlns:mc="http://schemas.openxmlformats.org/markup-compatibility/2006" xmlns:a14="http://schemas.microsoft.com/office/drawing/2010/main">
+        <mc:Choice Requires="a14">
           <p:sp>
             <p:nvSpPr>
               <p:cNvPr id="125" name="TextBox 124">
@@ -28837,7 +28909,7 @@
             </p:txBody>
           </p:sp>
         </mc:Choice>
-        <mc:Fallback>
+        <mc:Fallback xmlns="">
           <p:sp>
             <p:nvSpPr>
               <p:cNvPr id="125" name="TextBox 124">
@@ -29253,8 +29325,8 @@
           </a:fontRef>
         </p:style>
       </p:cxnSp>
-      <mc:AlternateContent xmlns:mc="http://schemas.openxmlformats.org/markup-compatibility/2006">
-        <mc:Choice xmlns:a14="http://schemas.microsoft.com/office/drawing/2010/main" Requires="a14">
+      <mc:AlternateContent xmlns:mc="http://schemas.openxmlformats.org/markup-compatibility/2006" xmlns:a14="http://schemas.microsoft.com/office/drawing/2010/main">
+        <mc:Choice Requires="a14">
           <p:sp>
             <p:nvSpPr>
               <p:cNvPr id="16" name="TextBox 15">
@@ -29344,7 +29416,7 @@
             </p:txBody>
           </p:sp>
         </mc:Choice>
-        <mc:Fallback>
+        <mc:Fallback xmlns="">
           <p:sp>
             <p:nvSpPr>
               <p:cNvPr id="16" name="TextBox 15">
@@ -29389,8 +29461,8 @@
           </p:sp>
         </mc:Fallback>
       </mc:AlternateContent>
-      <mc:AlternateContent xmlns:mc="http://schemas.openxmlformats.org/markup-compatibility/2006">
-        <mc:Choice xmlns:a14="http://schemas.microsoft.com/office/drawing/2010/main" Requires="a14">
+      <mc:AlternateContent xmlns:mc="http://schemas.openxmlformats.org/markup-compatibility/2006" xmlns:a14="http://schemas.microsoft.com/office/drawing/2010/main">
+        <mc:Choice Requires="a14">
           <p:sp>
             <p:nvSpPr>
               <p:cNvPr id="109" name="TextBox 108">
@@ -29472,7 +29544,7 @@
             </p:txBody>
           </p:sp>
         </mc:Choice>
-        <mc:Fallback>
+        <mc:Fallback xmlns="">
           <p:sp>
             <p:nvSpPr>
               <p:cNvPr id="109" name="TextBox 108">
@@ -29718,8 +29790,8 @@
           </p:style>
         </p:cxnSp>
       </p:grpSp>
-      <mc:AlternateContent xmlns:mc="http://schemas.openxmlformats.org/markup-compatibility/2006">
-        <mc:Choice xmlns:a14="http://schemas.microsoft.com/office/drawing/2010/main" Requires="a14">
+      <mc:AlternateContent xmlns:mc="http://schemas.openxmlformats.org/markup-compatibility/2006" xmlns:a14="http://schemas.microsoft.com/office/drawing/2010/main">
+        <mc:Choice Requires="a14">
           <p:sp>
             <p:nvSpPr>
               <p:cNvPr id="64" name="TextBox 63">
@@ -29748,7 +29820,6 @@
               </a:bodyPr>
               <a:lstStyle/>
               <a:p>
-                <a:pPr/>
                 <a:r>
                   <a:rPr lang="en-US" sz="2400" b="1" dirty="0">
                     <a:solidFill>
@@ -29818,7 +29889,6 @@
                 </a:endParaRPr>
               </a:p>
               <a:p>
-                <a:pPr/>
                 <a:r>
                   <a:rPr lang="en-US" sz="2400" b="1" dirty="0">
                     <a:solidFill>
@@ -29833,7 +29903,7 @@
             </p:txBody>
           </p:sp>
         </mc:Choice>
-        <mc:Fallback>
+        <mc:Fallback xmlns="">
           <p:sp>
             <p:nvSpPr>
               <p:cNvPr id="64" name="TextBox 63">
@@ -29878,8 +29948,8 @@
           </p:sp>
         </mc:Fallback>
       </mc:AlternateContent>
-      <mc:AlternateContent xmlns:mc="http://schemas.openxmlformats.org/markup-compatibility/2006">
-        <mc:Choice xmlns:a14="http://schemas.microsoft.com/office/drawing/2010/main" Requires="a14">
+      <mc:AlternateContent xmlns:mc="http://schemas.openxmlformats.org/markup-compatibility/2006" xmlns:a14="http://schemas.microsoft.com/office/drawing/2010/main">
+        <mc:Choice Requires="a14">
           <p:sp>
             <p:nvSpPr>
               <p:cNvPr id="67" name="TextBox 66">
@@ -29932,7 +30002,7 @@
             </p:txBody>
           </p:sp>
         </mc:Choice>
-        <mc:Fallback>
+        <mc:Fallback xmlns="">
           <p:sp>
             <p:nvSpPr>
               <p:cNvPr id="67" name="TextBox 66">
@@ -29981,6 +30051,865 @@
     <p:extLst>
       <p:ext uri="{BB962C8B-B14F-4D97-AF65-F5344CB8AC3E}">
         <p14:creationId xmlns:p14="http://schemas.microsoft.com/office/powerpoint/2010/main" val="895399908"/>
+      </p:ext>
+    </p:extLst>
+  </p:cSld>
+  <p:clrMapOvr>
+    <a:masterClrMapping/>
+  </p:clrMapOvr>
+</p:sld>
+</file>
+
+<file path=ppt/slides/slide8.xml><?xml version="1.0" encoding="utf-8"?>
+<p:sld xmlns:a="http://schemas.openxmlformats.org/drawingml/2006/main" xmlns:r="http://schemas.openxmlformats.org/officeDocument/2006/relationships" xmlns:p="http://schemas.openxmlformats.org/presentationml/2006/main">
+  <p:cSld>
+    <p:spTree>
+      <p:nvGrpSpPr>
+        <p:cNvPr id="1" name="">
+          <a:extLst>
+            <a:ext uri="{FF2B5EF4-FFF2-40B4-BE49-F238E27FC236}">
+              <a16:creationId xmlns:a16="http://schemas.microsoft.com/office/drawing/2014/main" id="{4F25F722-76B3-F10D-25AF-6B8167006030}"/>
+            </a:ext>
+          </a:extLst>
+        </p:cNvPr>
+        <p:cNvGrpSpPr/>
+        <p:nvPr/>
+      </p:nvGrpSpPr>
+      <p:grpSpPr>
+        <a:xfrm>
+          <a:off x="0" y="0"/>
+          <a:ext cx="0" cy="0"/>
+          <a:chOff x="0" y="0"/>
+          <a:chExt cx="0" cy="0"/>
+        </a:xfrm>
+      </p:grpSpPr>
+      <p:graphicFrame>
+        <p:nvGraphicFramePr>
+          <p:cNvPr id="3" name="표 2">
+            <a:extLst>
+              <a:ext uri="{FF2B5EF4-FFF2-40B4-BE49-F238E27FC236}">
+                <a16:creationId xmlns:a16="http://schemas.microsoft.com/office/drawing/2014/main" id="{9DFCF147-2E44-397E-D777-6FFF10D42C55}"/>
+              </a:ext>
+            </a:extLst>
+          </p:cNvPr>
+          <p:cNvGraphicFramePr>
+            <a:graphicFrameLocks noGrp="1"/>
+          </p:cNvGraphicFramePr>
+          <p:nvPr>
+            <p:extLst>
+              <p:ext uri="{D42A27DB-BD31-4B8C-83A1-F6EECF244321}">
+                <p14:modId xmlns:p14="http://schemas.microsoft.com/office/powerpoint/2010/main" val="55603934"/>
+              </p:ext>
+            </p:extLst>
+          </p:nvPr>
+        </p:nvGraphicFramePr>
+        <p:xfrm>
+          <a:off x="4461390" y="1833830"/>
+          <a:ext cx="2415272" cy="1973060"/>
+        </p:xfrm>
+        <a:graphic>
+          <a:graphicData uri="http://schemas.openxmlformats.org/drawingml/2006/table">
+            <a:tbl>
+              <a:tblPr firstRow="1" bandRow="1">
+                <a:tableStyleId>{5C22544A-7EE6-4342-B048-85BDC9FD1C3A}</a:tableStyleId>
+              </a:tblPr>
+              <a:tblGrid>
+                <a:gridCol w="1207636">
+                  <a:extLst>
+                    <a:ext uri="{9D8B030D-6E8A-4147-A177-3AD203B41FA5}">
+                      <a16:colId xmlns:a16="http://schemas.microsoft.com/office/drawing/2014/main" val="2859339397"/>
+                    </a:ext>
+                  </a:extLst>
+                </a:gridCol>
+                <a:gridCol w="1207636">
+                  <a:extLst>
+                    <a:ext uri="{9D8B030D-6E8A-4147-A177-3AD203B41FA5}">
+                      <a16:colId xmlns:a16="http://schemas.microsoft.com/office/drawing/2014/main" val="3235844781"/>
+                    </a:ext>
+                  </a:extLst>
+                </a:gridCol>
+              </a:tblGrid>
+              <a:tr h="986530">
+                <a:tc>
+                  <a:txBody>
+                    <a:bodyPr/>
+                    <a:lstStyle/>
+                    <a:p>
+                      <a:pPr algn="ctr"/>
+                      <a:r>
+                        <a:rPr lang="en-US" sz="2800" b="0" i="1" dirty="0">
+                          <a:solidFill>
+                            <a:schemeClr val="tx1"/>
+                          </a:solidFill>
+                        </a:rPr>
+                        <a:t>HH</a:t>
+                      </a:r>
+                    </a:p>
+                  </a:txBody>
+                  <a:tcPr anchor="ctr">
+                    <a:lnL w="12700" cap="flat" cmpd="sng" algn="ctr">
+                      <a:solidFill>
+                        <a:schemeClr val="tx1"/>
+                      </a:solidFill>
+                      <a:prstDash val="solid"/>
+                      <a:round/>
+                      <a:headEnd type="none" w="med" len="med"/>
+                      <a:tailEnd type="none" w="med" len="med"/>
+                    </a:lnL>
+                    <a:lnR w="12700" cap="flat" cmpd="sng" algn="ctr">
+                      <a:solidFill>
+                        <a:schemeClr val="tx1"/>
+                      </a:solidFill>
+                      <a:prstDash val="solid"/>
+                      <a:round/>
+                      <a:headEnd type="none" w="med" len="med"/>
+                      <a:tailEnd type="none" w="med" len="med"/>
+                    </a:lnR>
+                    <a:lnT w="12700" cap="flat" cmpd="sng" algn="ctr">
+                      <a:solidFill>
+                        <a:schemeClr val="tx1"/>
+                      </a:solidFill>
+                      <a:prstDash val="solid"/>
+                      <a:round/>
+                      <a:headEnd type="none" w="med" len="med"/>
+                      <a:tailEnd type="none" w="med" len="med"/>
+                    </a:lnT>
+                    <a:lnB w="12700" cap="flat" cmpd="sng" algn="ctr">
+                      <a:solidFill>
+                        <a:schemeClr val="tx1"/>
+                      </a:solidFill>
+                      <a:prstDash val="solid"/>
+                      <a:round/>
+                      <a:headEnd type="none" w="med" len="med"/>
+                      <a:tailEnd type="none" w="med" len="med"/>
+                    </a:lnB>
+                    <a:noFill/>
+                  </a:tcPr>
+                </a:tc>
+                <a:tc>
+                  <a:txBody>
+                    <a:bodyPr/>
+                    <a:lstStyle/>
+                    <a:p>
+                      <a:pPr algn="ctr"/>
+                      <a:r>
+                        <a:rPr lang="en-US" sz="2800" b="0" i="1" dirty="0">
+                          <a:solidFill>
+                            <a:schemeClr val="tx1"/>
+                          </a:solidFill>
+                        </a:rPr>
+                        <a:t>HT</a:t>
+                      </a:r>
+                    </a:p>
+                  </a:txBody>
+                  <a:tcPr anchor="ctr">
+                    <a:lnL w="12700" cap="flat" cmpd="sng" algn="ctr">
+                      <a:solidFill>
+                        <a:schemeClr val="tx1"/>
+                      </a:solidFill>
+                      <a:prstDash val="solid"/>
+                      <a:round/>
+                      <a:headEnd type="none" w="med" len="med"/>
+                      <a:tailEnd type="none" w="med" len="med"/>
+                    </a:lnL>
+                    <a:lnR w="12700" cap="flat" cmpd="sng" algn="ctr">
+                      <a:solidFill>
+                        <a:schemeClr val="tx1"/>
+                      </a:solidFill>
+                      <a:prstDash val="solid"/>
+                      <a:round/>
+                      <a:headEnd type="none" w="med" len="med"/>
+                      <a:tailEnd type="none" w="med" len="med"/>
+                    </a:lnR>
+                    <a:lnT w="12700" cap="flat" cmpd="sng" algn="ctr">
+                      <a:solidFill>
+                        <a:schemeClr val="tx1"/>
+                      </a:solidFill>
+                      <a:prstDash val="solid"/>
+                      <a:round/>
+                      <a:headEnd type="none" w="med" len="med"/>
+                      <a:tailEnd type="none" w="med" len="med"/>
+                    </a:lnT>
+                    <a:lnB w="12700" cap="flat" cmpd="sng" algn="ctr">
+                      <a:solidFill>
+                        <a:schemeClr val="tx1"/>
+                      </a:solidFill>
+                      <a:prstDash val="solid"/>
+                      <a:round/>
+                      <a:headEnd type="none" w="med" len="med"/>
+                      <a:tailEnd type="none" w="med" len="med"/>
+                    </a:lnB>
+                    <a:noFill/>
+                  </a:tcPr>
+                </a:tc>
+                <a:extLst>
+                  <a:ext uri="{0D108BD9-81ED-4DB2-BD59-A6C34878D82A}">
+                    <a16:rowId xmlns:a16="http://schemas.microsoft.com/office/drawing/2014/main" val="3815277642"/>
+                  </a:ext>
+                </a:extLst>
+              </a:tr>
+              <a:tr h="986530">
+                <a:tc>
+                  <a:txBody>
+                    <a:bodyPr/>
+                    <a:lstStyle/>
+                    <a:p>
+                      <a:pPr algn="ctr"/>
+                      <a:r>
+                        <a:rPr lang="en-US" sz="2800" b="0" i="1" dirty="0">
+                          <a:solidFill>
+                            <a:schemeClr val="tx1"/>
+                          </a:solidFill>
+                        </a:rPr>
+                        <a:t>TH</a:t>
+                      </a:r>
+                    </a:p>
+                  </a:txBody>
+                  <a:tcPr anchor="ctr">
+                    <a:lnL w="12700" cap="flat" cmpd="sng" algn="ctr">
+                      <a:solidFill>
+                        <a:schemeClr val="tx1"/>
+                      </a:solidFill>
+                      <a:prstDash val="solid"/>
+                      <a:round/>
+                      <a:headEnd type="none" w="med" len="med"/>
+                      <a:tailEnd type="none" w="med" len="med"/>
+                    </a:lnL>
+                    <a:lnR w="12700" cap="flat" cmpd="sng" algn="ctr">
+                      <a:solidFill>
+                        <a:schemeClr val="tx1"/>
+                      </a:solidFill>
+                      <a:prstDash val="solid"/>
+                      <a:round/>
+                      <a:headEnd type="none" w="med" len="med"/>
+                      <a:tailEnd type="none" w="med" len="med"/>
+                    </a:lnR>
+                    <a:lnT w="12700" cap="flat" cmpd="sng" algn="ctr">
+                      <a:solidFill>
+                        <a:schemeClr val="tx1"/>
+                      </a:solidFill>
+                      <a:prstDash val="solid"/>
+                      <a:round/>
+                      <a:headEnd type="none" w="med" len="med"/>
+                      <a:tailEnd type="none" w="med" len="med"/>
+                    </a:lnT>
+                    <a:lnB w="12700" cap="flat" cmpd="sng" algn="ctr">
+                      <a:solidFill>
+                        <a:schemeClr val="tx1"/>
+                      </a:solidFill>
+                      <a:prstDash val="solid"/>
+                      <a:round/>
+                      <a:headEnd type="none" w="med" len="med"/>
+                      <a:tailEnd type="none" w="med" len="med"/>
+                    </a:lnB>
+                    <a:noFill/>
+                  </a:tcPr>
+                </a:tc>
+                <a:tc>
+                  <a:txBody>
+                    <a:bodyPr/>
+                    <a:lstStyle/>
+                    <a:p>
+                      <a:pPr algn="ctr"/>
+                      <a:r>
+                        <a:rPr lang="en-US" sz="2800" b="0" i="1" dirty="0">
+                          <a:solidFill>
+                            <a:schemeClr val="tx1"/>
+                          </a:solidFill>
+                        </a:rPr>
+                        <a:t>TT</a:t>
+                      </a:r>
+                    </a:p>
+                  </a:txBody>
+                  <a:tcPr anchor="ctr">
+                    <a:lnL w="12700" cap="flat" cmpd="sng" algn="ctr">
+                      <a:solidFill>
+                        <a:schemeClr val="tx1"/>
+                      </a:solidFill>
+                      <a:prstDash val="solid"/>
+                      <a:round/>
+                      <a:headEnd type="none" w="med" len="med"/>
+                      <a:tailEnd type="none" w="med" len="med"/>
+                    </a:lnL>
+                    <a:lnR w="12700" cap="flat" cmpd="sng" algn="ctr">
+                      <a:solidFill>
+                        <a:schemeClr val="tx1"/>
+                      </a:solidFill>
+                      <a:prstDash val="solid"/>
+                      <a:round/>
+                      <a:headEnd type="none" w="med" len="med"/>
+                      <a:tailEnd type="none" w="med" len="med"/>
+                    </a:lnR>
+                    <a:lnT w="12700" cap="flat" cmpd="sng" algn="ctr">
+                      <a:solidFill>
+                        <a:schemeClr val="tx1"/>
+                      </a:solidFill>
+                      <a:prstDash val="solid"/>
+                      <a:round/>
+                      <a:headEnd type="none" w="med" len="med"/>
+                      <a:tailEnd type="none" w="med" len="med"/>
+                    </a:lnT>
+                    <a:lnB w="12700" cap="flat" cmpd="sng" algn="ctr">
+                      <a:solidFill>
+                        <a:schemeClr val="tx1"/>
+                      </a:solidFill>
+                      <a:prstDash val="solid"/>
+                      <a:round/>
+                      <a:headEnd type="none" w="med" len="med"/>
+                      <a:tailEnd type="none" w="med" len="med"/>
+                    </a:lnB>
+                    <a:noFill/>
+                  </a:tcPr>
+                </a:tc>
+                <a:extLst>
+                  <a:ext uri="{0D108BD9-81ED-4DB2-BD59-A6C34878D82A}">
+                    <a16:rowId xmlns:a16="http://schemas.microsoft.com/office/drawing/2014/main" val="877946960"/>
+                  </a:ext>
+                </a:extLst>
+              </a:tr>
+            </a:tbl>
+          </a:graphicData>
+        </a:graphic>
+      </p:graphicFrame>
+      <p:sp>
+        <p:nvSpPr>
+          <p:cNvPr id="4" name="사각형: 둥근 모서리 3">
+            <a:extLst>
+              <a:ext uri="{FF2B5EF4-FFF2-40B4-BE49-F238E27FC236}">
+                <a16:creationId xmlns:a16="http://schemas.microsoft.com/office/drawing/2014/main" id="{72E0F489-9DF4-084B-0E3D-9969531AAB98}"/>
+              </a:ext>
+            </a:extLst>
+          </p:cNvPr>
+          <p:cNvSpPr/>
+          <p:nvPr/>
+        </p:nvSpPr>
+        <p:spPr>
+          <a:xfrm>
+            <a:off x="4301411" y="2071396"/>
+            <a:ext cx="2677887" cy="550506"/>
+          </a:xfrm>
+          <a:prstGeom prst="roundRect">
+            <a:avLst>
+              <a:gd name="adj" fmla="val 50000"/>
+            </a:avLst>
+          </a:prstGeom>
+          <a:noFill/>
+          <a:ln w="28575">
+            <a:solidFill>
+              <a:srgbClr val="FF0000"/>
+            </a:solidFill>
+          </a:ln>
+        </p:spPr>
+        <p:style>
+          <a:lnRef idx="2">
+            <a:schemeClr val="accent1">
+              <a:shade val="15000"/>
+            </a:schemeClr>
+          </a:lnRef>
+          <a:fillRef idx="1">
+            <a:schemeClr val="accent1"/>
+          </a:fillRef>
+          <a:effectRef idx="0">
+            <a:schemeClr val="accent1"/>
+          </a:effectRef>
+          <a:fontRef idx="minor">
+            <a:schemeClr val="lt1"/>
+          </a:fontRef>
+        </p:style>
+        <p:txBody>
+          <a:bodyPr rtlCol="0" anchor="ctr"/>
+          <a:lstStyle/>
+          <a:p>
+            <a:pPr algn="ctr"/>
+            <a:endParaRPr lang="en-US"/>
+          </a:p>
+        </p:txBody>
+      </p:sp>
+      <p:sp>
+        <p:nvSpPr>
+          <p:cNvPr id="5" name="사각형: 둥근 모서리 4">
+            <a:extLst>
+              <a:ext uri="{FF2B5EF4-FFF2-40B4-BE49-F238E27FC236}">
+                <a16:creationId xmlns:a16="http://schemas.microsoft.com/office/drawing/2014/main" id="{2D768D38-FFB2-FCDA-6DF7-CC7C990568EC}"/>
+              </a:ext>
+            </a:extLst>
+          </p:cNvPr>
+          <p:cNvSpPr/>
+          <p:nvPr/>
+        </p:nvSpPr>
+        <p:spPr>
+          <a:xfrm>
+            <a:off x="4758612" y="1682620"/>
+            <a:ext cx="653143" cy="2189583"/>
+          </a:xfrm>
+          <a:prstGeom prst="roundRect">
+            <a:avLst>
+              <a:gd name="adj" fmla="val 50000"/>
+            </a:avLst>
+          </a:prstGeom>
+          <a:noFill/>
+          <a:ln w="28575">
+            <a:solidFill>
+              <a:schemeClr val="accent6">
+                <a:lumMod val="50000"/>
+              </a:schemeClr>
+            </a:solidFill>
+          </a:ln>
+        </p:spPr>
+        <p:style>
+          <a:lnRef idx="2">
+            <a:schemeClr val="accent1">
+              <a:shade val="15000"/>
+            </a:schemeClr>
+          </a:lnRef>
+          <a:fillRef idx="1">
+            <a:schemeClr val="accent1"/>
+          </a:fillRef>
+          <a:effectRef idx="0">
+            <a:schemeClr val="accent1"/>
+          </a:effectRef>
+          <a:fontRef idx="minor">
+            <a:schemeClr val="lt1"/>
+          </a:fontRef>
+        </p:style>
+        <p:txBody>
+          <a:bodyPr rtlCol="0" anchor="ctr"/>
+          <a:lstStyle/>
+          <a:p>
+            <a:pPr algn="ctr"/>
+            <a:endParaRPr lang="en-US"/>
+          </a:p>
+        </p:txBody>
+      </p:sp>
+      <p:sp>
+        <p:nvSpPr>
+          <p:cNvPr id="6" name="타원 5">
+            <a:extLst>
+              <a:ext uri="{FF2B5EF4-FFF2-40B4-BE49-F238E27FC236}">
+                <a16:creationId xmlns:a16="http://schemas.microsoft.com/office/drawing/2014/main" id="{FA8D5BD8-DBDD-E0F2-6F25-85460B91DD04}"/>
+              </a:ext>
+            </a:extLst>
+          </p:cNvPr>
+          <p:cNvSpPr/>
+          <p:nvPr/>
+        </p:nvSpPr>
+        <p:spPr>
+          <a:xfrm rot="2142731">
+            <a:off x="3994774" y="2317582"/>
+            <a:ext cx="3291428" cy="945894"/>
+          </a:xfrm>
+          <a:prstGeom prst="ellipse">
+            <a:avLst/>
+          </a:prstGeom>
+          <a:noFill/>
+          <a:ln w="28575">
+            <a:solidFill>
+              <a:schemeClr val="accent5">
+                <a:lumMod val="50000"/>
+              </a:schemeClr>
+            </a:solidFill>
+          </a:ln>
+        </p:spPr>
+        <p:style>
+          <a:lnRef idx="2">
+            <a:schemeClr val="accent1">
+              <a:shade val="15000"/>
+            </a:schemeClr>
+          </a:lnRef>
+          <a:fillRef idx="1">
+            <a:schemeClr val="accent1"/>
+          </a:fillRef>
+          <a:effectRef idx="0">
+            <a:schemeClr val="accent1"/>
+          </a:effectRef>
+          <a:fontRef idx="minor">
+            <a:schemeClr val="lt1"/>
+          </a:fontRef>
+        </p:style>
+        <p:txBody>
+          <a:bodyPr rtlCol="0" anchor="ctr"/>
+          <a:lstStyle/>
+          <a:p>
+            <a:pPr algn="ctr"/>
+            <a:endParaRPr lang="en-US"/>
+          </a:p>
+        </p:txBody>
+      </p:sp>
+      <mc:AlternateContent xmlns:mc="http://schemas.openxmlformats.org/markup-compatibility/2006">
+        <mc:Choice xmlns:a14="http://schemas.microsoft.com/office/drawing/2010/main" Requires="a14">
+          <p:sp>
+            <p:nvSpPr>
+              <p:cNvPr id="7" name="TextBox 6">
+                <a:extLst>
+                  <a:ext uri="{FF2B5EF4-FFF2-40B4-BE49-F238E27FC236}">
+                    <a16:creationId xmlns:a16="http://schemas.microsoft.com/office/drawing/2014/main" id="{45CE3310-A528-6FF0-41DF-24F9E56D7AAE}"/>
+                  </a:ext>
+                </a:extLst>
+              </p:cNvPr>
+              <p:cNvSpPr txBox="1"/>
+              <p:nvPr/>
+            </p:nvSpPr>
+            <p:spPr>
+              <a:xfrm>
+                <a:off x="6940618" y="3622224"/>
+                <a:ext cx="354561" cy="369332"/>
+              </a:xfrm>
+              <a:prstGeom prst="rect">
+                <a:avLst/>
+              </a:prstGeom>
+              <a:noFill/>
+            </p:spPr>
+            <p:txBody>
+              <a:bodyPr wrap="square" rtlCol="0">
+                <a:spAutoFit/>
+              </a:bodyPr>
+              <a:lstStyle/>
+              <a:p>
+                <a:pPr/>
+                <a14:m>
+                  <m:oMathPara xmlns:m="http://schemas.openxmlformats.org/officeDocument/2006/math">
+                    <m:oMathParaPr>
+                      <m:jc m:val="center"/>
+                    </m:oMathParaPr>
+                    <m:oMath xmlns:m="http://schemas.openxmlformats.org/officeDocument/2006/math">
+                      <m:r>
+                        <a:rPr lang="en-US" b="1" i="1" dirty="0" smtClean="0">
+                          <a:solidFill>
+                            <a:schemeClr val="accent5">
+                              <a:lumMod val="50000"/>
+                            </a:schemeClr>
+                          </a:solidFill>
+                          <a:latin typeface="Cambria Math" panose="02040503050406030204" pitchFamily="18" charset="0"/>
+                        </a:rPr>
+                        <m:t>𝑪</m:t>
+                      </m:r>
+                    </m:oMath>
+                  </m:oMathPara>
+                </a14:m>
+                <a:endParaRPr lang="ar-AE" sz="2400" b="1" dirty="0">
+                  <a:solidFill>
+                    <a:schemeClr val="accent5">
+                      <a:lumMod val="50000"/>
+                    </a:schemeClr>
+                  </a:solidFill>
+                </a:endParaRPr>
+              </a:p>
+            </p:txBody>
+          </p:sp>
+        </mc:Choice>
+        <mc:Fallback>
+          <p:sp>
+            <p:nvSpPr>
+              <p:cNvPr id="7" name="TextBox 6">
+                <a:extLst>
+                  <a:ext uri="{FF2B5EF4-FFF2-40B4-BE49-F238E27FC236}">
+                    <a16:creationId xmlns:a16="http://schemas.microsoft.com/office/drawing/2014/main" id="{45CE3310-A528-6FF0-41DF-24F9E56D7AAE}"/>
+                  </a:ext>
+                </a:extLst>
+              </p:cNvPr>
+              <p:cNvSpPr txBox="1">
+                <a:spLocks noRot="1" noChangeAspect="1" noMove="1" noResize="1" noEditPoints="1" noAdjustHandles="1" noChangeArrowheads="1" noChangeShapeType="1" noTextEdit="1"/>
+              </p:cNvSpPr>
+              <p:nvPr/>
+            </p:nvSpPr>
+            <p:spPr>
+              <a:xfrm>
+                <a:off x="6940618" y="3622224"/>
+                <a:ext cx="354561" cy="369332"/>
+              </a:xfrm>
+              <a:prstGeom prst="rect">
+                <a:avLst/>
+              </a:prstGeom>
+              <a:blipFill>
+                <a:blip r:embed="rId3"/>
+                <a:stretch>
+                  <a:fillRect/>
+                </a:stretch>
+              </a:blipFill>
+            </p:spPr>
+            <p:txBody>
+              <a:bodyPr/>
+              <a:lstStyle/>
+              <a:p>
+                <a:r>
+                  <a:rPr lang="en-US">
+                    <a:noFill/>
+                  </a:rPr>
+                  <a:t> </a:t>
+                </a:r>
+              </a:p>
+            </p:txBody>
+          </p:sp>
+        </mc:Fallback>
+      </mc:AlternateContent>
+      <mc:AlternateContent xmlns:mc="http://schemas.openxmlformats.org/markup-compatibility/2006">
+        <mc:Choice xmlns:a14="http://schemas.microsoft.com/office/drawing/2010/main" Requires="a14">
+          <p:sp>
+            <p:nvSpPr>
+              <p:cNvPr id="8" name="TextBox 7">
+                <a:extLst>
+                  <a:ext uri="{FF2B5EF4-FFF2-40B4-BE49-F238E27FC236}">
+                    <a16:creationId xmlns:a16="http://schemas.microsoft.com/office/drawing/2014/main" id="{DBD0582E-DA19-48E4-CF98-E93B6301A9F1}"/>
+                  </a:ext>
+                </a:extLst>
+              </p:cNvPr>
+              <p:cNvSpPr txBox="1"/>
+              <p:nvPr/>
+            </p:nvSpPr>
+            <p:spPr>
+              <a:xfrm>
+                <a:off x="6919432" y="1977317"/>
+                <a:ext cx="354561" cy="369332"/>
+              </a:xfrm>
+              <a:prstGeom prst="rect">
+                <a:avLst/>
+              </a:prstGeom>
+              <a:noFill/>
+            </p:spPr>
+            <p:txBody>
+              <a:bodyPr wrap="square" rtlCol="0">
+                <a:spAutoFit/>
+              </a:bodyPr>
+              <a:lstStyle/>
+              <a:p>
+                <a:pPr/>
+                <a14:m>
+                  <m:oMathPara xmlns:m="http://schemas.openxmlformats.org/officeDocument/2006/math">
+                    <m:oMathParaPr>
+                      <m:jc m:val="center"/>
+                    </m:oMathParaPr>
+                    <m:oMath xmlns:m="http://schemas.openxmlformats.org/officeDocument/2006/math">
+                      <m:sSub>
+                        <m:sSubPr>
+                          <m:ctrlPr>
+                            <a:rPr lang="en-US" b="1" i="1" dirty="0" smtClean="0">
+                              <a:solidFill>
+                                <a:srgbClr val="FF0000"/>
+                              </a:solidFill>
+                              <a:latin typeface="Cambria Math" panose="02040503050406030204" pitchFamily="18" charset="0"/>
+                            </a:rPr>
+                          </m:ctrlPr>
+                        </m:sSubPr>
+                        <m:e>
+                          <m:r>
+                            <a:rPr lang="en-US" b="1" i="1" dirty="0" smtClean="0">
+                              <a:solidFill>
+                                <a:srgbClr val="FF0000"/>
+                              </a:solidFill>
+                              <a:latin typeface="Cambria Math" panose="02040503050406030204" pitchFamily="18" charset="0"/>
+                            </a:rPr>
+                            <m:t>𝑯</m:t>
+                          </m:r>
+                        </m:e>
+                        <m:sub>
+                          <m:r>
+                            <a:rPr lang="en-US" b="1" i="1" dirty="0" smtClean="0">
+                              <a:solidFill>
+                                <a:srgbClr val="FF0000"/>
+                              </a:solidFill>
+                              <a:latin typeface="Cambria Math" panose="02040503050406030204" pitchFamily="18" charset="0"/>
+                            </a:rPr>
+                            <m:t>𝟏</m:t>
+                          </m:r>
+                        </m:sub>
+                      </m:sSub>
+                    </m:oMath>
+                  </m:oMathPara>
+                </a14:m>
+                <a:endParaRPr lang="en-US" b="1" dirty="0">
+                  <a:solidFill>
+                    <a:srgbClr val="FF0000"/>
+                  </a:solidFill>
+                </a:endParaRPr>
+              </a:p>
+            </p:txBody>
+          </p:sp>
+        </mc:Choice>
+        <mc:Fallback>
+          <p:sp>
+            <p:nvSpPr>
+              <p:cNvPr id="8" name="TextBox 7">
+                <a:extLst>
+                  <a:ext uri="{FF2B5EF4-FFF2-40B4-BE49-F238E27FC236}">
+                    <a16:creationId xmlns:a16="http://schemas.microsoft.com/office/drawing/2014/main" id="{DBD0582E-DA19-48E4-CF98-E93B6301A9F1}"/>
+                  </a:ext>
+                </a:extLst>
+              </p:cNvPr>
+              <p:cNvSpPr txBox="1">
+                <a:spLocks noRot="1" noChangeAspect="1" noMove="1" noResize="1" noEditPoints="1" noAdjustHandles="1" noChangeArrowheads="1" noChangeShapeType="1" noTextEdit="1"/>
+              </p:cNvSpPr>
+              <p:nvPr/>
+            </p:nvSpPr>
+            <p:spPr>
+              <a:xfrm>
+                <a:off x="6919432" y="1977317"/>
+                <a:ext cx="354561" cy="369332"/>
+              </a:xfrm>
+              <a:prstGeom prst="rect">
+                <a:avLst/>
+              </a:prstGeom>
+              <a:blipFill>
+                <a:blip r:embed="rId4"/>
+                <a:stretch>
+                  <a:fillRect r="-22414"/>
+                </a:stretch>
+              </a:blipFill>
+            </p:spPr>
+            <p:txBody>
+              <a:bodyPr/>
+              <a:lstStyle/>
+              <a:p>
+                <a:r>
+                  <a:rPr lang="en-US">
+                    <a:noFill/>
+                  </a:rPr>
+                  <a:t> </a:t>
+                </a:r>
+              </a:p>
+            </p:txBody>
+          </p:sp>
+        </mc:Fallback>
+      </mc:AlternateContent>
+      <mc:AlternateContent xmlns:mc="http://schemas.openxmlformats.org/markup-compatibility/2006">
+        <mc:Choice xmlns:a14="http://schemas.microsoft.com/office/drawing/2010/main" Requires="a14">
+          <p:sp>
+            <p:nvSpPr>
+              <p:cNvPr id="9" name="TextBox 8">
+                <a:extLst>
+                  <a:ext uri="{FF2B5EF4-FFF2-40B4-BE49-F238E27FC236}">
+                    <a16:creationId xmlns:a16="http://schemas.microsoft.com/office/drawing/2014/main" id="{1965552A-D9AC-19B5-DCAA-E2DD924CF442}"/>
+                  </a:ext>
+                </a:extLst>
+              </p:cNvPr>
+              <p:cNvSpPr txBox="1"/>
+              <p:nvPr/>
+            </p:nvSpPr>
+            <p:spPr>
+              <a:xfrm>
+                <a:off x="4549354" y="3739602"/>
+                <a:ext cx="354561" cy="369332"/>
+              </a:xfrm>
+              <a:prstGeom prst="rect">
+                <a:avLst/>
+              </a:prstGeom>
+              <a:noFill/>
+            </p:spPr>
+            <p:txBody>
+              <a:bodyPr wrap="square" rtlCol="0">
+                <a:spAutoFit/>
+              </a:bodyPr>
+              <a:lstStyle/>
+              <a:p>
+                <a:pPr/>
+                <a14:m>
+                  <m:oMathPara xmlns:m="http://schemas.openxmlformats.org/officeDocument/2006/math">
+                    <m:oMathParaPr>
+                      <m:jc m:val="center"/>
+                    </m:oMathParaPr>
+                    <m:oMath xmlns:m="http://schemas.openxmlformats.org/officeDocument/2006/math">
+                      <m:sSub>
+                        <m:sSubPr>
+                          <m:ctrlPr>
+                            <a:rPr lang="en-US" b="1" i="1" dirty="0" smtClean="0">
+                              <a:solidFill>
+                                <a:schemeClr val="accent6">
+                                  <a:lumMod val="50000"/>
+                                </a:schemeClr>
+                              </a:solidFill>
+                              <a:latin typeface="Cambria Math" panose="02040503050406030204" pitchFamily="18" charset="0"/>
+                            </a:rPr>
+                          </m:ctrlPr>
+                        </m:sSubPr>
+                        <m:e>
+                          <m:r>
+                            <a:rPr lang="en-US" b="1" i="1" dirty="0" smtClean="0">
+                              <a:solidFill>
+                                <a:schemeClr val="accent6">
+                                  <a:lumMod val="50000"/>
+                                </a:schemeClr>
+                              </a:solidFill>
+                              <a:latin typeface="Cambria Math" panose="02040503050406030204" pitchFamily="18" charset="0"/>
+                            </a:rPr>
+                            <m:t>𝑯</m:t>
+                          </m:r>
+                        </m:e>
+                        <m:sub>
+                          <m:r>
+                            <a:rPr lang="en-US" b="1" i="1" dirty="0" smtClean="0">
+                              <a:solidFill>
+                                <a:schemeClr val="accent6">
+                                  <a:lumMod val="50000"/>
+                                </a:schemeClr>
+                              </a:solidFill>
+                              <a:latin typeface="Cambria Math" panose="02040503050406030204" pitchFamily="18" charset="0"/>
+                            </a:rPr>
+                            <m:t>𝟐</m:t>
+                          </m:r>
+                        </m:sub>
+                      </m:sSub>
+                    </m:oMath>
+                  </m:oMathPara>
+                </a14:m>
+                <a:endParaRPr lang="en-US" b="1" dirty="0">
+                  <a:solidFill>
+                    <a:schemeClr val="accent6">
+                      <a:lumMod val="50000"/>
+                    </a:schemeClr>
+                  </a:solidFill>
+                </a:endParaRPr>
+              </a:p>
+            </p:txBody>
+          </p:sp>
+        </mc:Choice>
+        <mc:Fallback>
+          <p:sp>
+            <p:nvSpPr>
+              <p:cNvPr id="9" name="TextBox 8">
+                <a:extLst>
+                  <a:ext uri="{FF2B5EF4-FFF2-40B4-BE49-F238E27FC236}">
+                    <a16:creationId xmlns:a16="http://schemas.microsoft.com/office/drawing/2014/main" id="{1965552A-D9AC-19B5-DCAA-E2DD924CF442}"/>
+                  </a:ext>
+                </a:extLst>
+              </p:cNvPr>
+              <p:cNvSpPr txBox="1">
+                <a:spLocks noRot="1" noChangeAspect="1" noMove="1" noResize="1" noEditPoints="1" noAdjustHandles="1" noChangeArrowheads="1" noChangeShapeType="1" noTextEdit="1"/>
+              </p:cNvSpPr>
+              <p:nvPr/>
+            </p:nvSpPr>
+            <p:spPr>
+              <a:xfrm>
+                <a:off x="4549354" y="3739602"/>
+                <a:ext cx="354561" cy="369332"/>
+              </a:xfrm>
+              <a:prstGeom prst="rect">
+                <a:avLst/>
+              </a:prstGeom>
+              <a:blipFill>
+                <a:blip r:embed="rId5"/>
+                <a:stretch>
+                  <a:fillRect r="-22414"/>
+                </a:stretch>
+              </a:blipFill>
+            </p:spPr>
+            <p:txBody>
+              <a:bodyPr/>
+              <a:lstStyle/>
+              <a:p>
+                <a:r>
+                  <a:rPr lang="en-US">
+                    <a:noFill/>
+                  </a:rPr>
+                  <a:t> </a:t>
+                </a:r>
+              </a:p>
+            </p:txBody>
+          </p:sp>
+        </mc:Fallback>
+      </mc:AlternateContent>
+    </p:spTree>
+    <p:extLst>
+      <p:ext uri="{BB962C8B-B14F-4D97-AF65-F5344CB8AC3E}">
+        <p14:creationId xmlns:p14="http://schemas.microsoft.com/office/powerpoint/2010/main" val="2553594707"/>
       </p:ext>
     </p:extLst>
   </p:cSld>
